--- a/Solar_Flare_PBL_Final_Review.pptx
+++ b/Solar_Flare_PBL_Final_Review.pptx
@@ -3875,8 +3875,12 @@
           <a:p>
             <a:r>
               <a:rPr lang="en-US" sz="3200" b="1" dirty="0">
+                <a:solidFill>
+                  <a:srgbClr val="000000"/>
+                </a:solidFill>
                 <a:latin typeface="Times New Roman" panose="02020603050405020304" pitchFamily="18" charset="0"/>
-                <a:cs typeface="Times New Roman" panose="02020603050405020304" pitchFamily="18" charset="0"/>
+                <a:ea typeface="Times New Roman"/>
+                <a:cs typeface="Times New Roman"/>
               </a:rPr>
               <a:t>CS3503 – Machine Learning PBL</a:t>
             </a:r>
@@ -3888,14 +3892,22 @@
             </a:br>
             <a:r>
               <a:rPr lang="en-US" sz="3200" b="1" dirty="0">
+                <a:solidFill>
+                  <a:srgbClr val="000000"/>
+                </a:solidFill>
                 <a:latin typeface="Times New Roman" panose="02020603050405020304" pitchFamily="18" charset="0"/>
-                <a:cs typeface="Times New Roman" panose="02020603050405020304" pitchFamily="18" charset="0"/>
+                <a:ea typeface="Times New Roman"/>
+                <a:cs typeface="Times New Roman"/>
               </a:rPr>
               <a:t>Project Review</a:t>
             </a:r>
             <a:endParaRPr lang="en-IN" sz="3200" b="1" dirty="0">
-              <a:latin typeface="Times New Roman" panose="02020603050405020304" pitchFamily="18" charset="0"/>
-              <a:cs typeface="Times New Roman" panose="02020603050405020304" pitchFamily="18" charset="0"/>
+              <a:solidFill>
+                <a:srgbClr val="000000"/>
+              </a:solidFill>
+              <a:latin typeface="Times New Roman"/>
+              <a:ea typeface="Times New Roman"/>
+              <a:cs typeface="Times New Roman"/>
             </a:endParaRPr>
           </a:p>
         </p:txBody>
@@ -3940,13 +3952,23 @@
                 <a:spcPts val="700"/>
               </a:spcAft>
               <a:buNone/>
-              <a:defRPr/>
+              <a:defRPr>
+                <a:solidFill>
+                  <a:srgbClr val="000000"/>
+                </a:solidFill>
+                <a:latin typeface="Times New Roman"/>
+                <a:ea typeface="Times New Roman"/>
+                <a:cs typeface="Times New Roman"/>
+              </a:defRPr>
             </a:pPr>
             <a:r>
-              <a:rPr sz="1800" b="1" i="0">
-                <a:solidFill>
-                  <a:srgbClr val="1F3864"/>
-                </a:solidFill>
+              <a:rPr sz="1980" b="1" i="0">
+                <a:solidFill>
+                  <a:srgbClr val="000000"/>
+                </a:solidFill>
+                <a:latin typeface="Times New Roman"/>
+                <a:ea typeface="Times New Roman"/>
+                <a:cs typeface="Times New Roman"/>
               </a:rPr>
               <a:t>Presentation by</a:t>
             </a:r>
@@ -3954,8 +3976,9 @@
               <a:solidFill>
                 <a:srgbClr val="000000"/>
               </a:solidFill>
-              <a:latin typeface="Times New Roman" panose="02020603050405020304" pitchFamily="18" charset="0"/>
-              <a:cs typeface="Times New Roman" panose="02020603050405020304" pitchFamily="18" charset="0"/>
+              <a:latin typeface="Times New Roman"/>
+              <a:ea typeface="Times New Roman"/>
+              <a:cs typeface="Times New Roman"/>
             </a:endParaRPr>
           </a:p>
           <a:p>
@@ -3972,18 +3995,24 @@
               <a:buNone/>
             </a:pPr>
             <a:r>
-              <a:rPr sz="1500" b="0" i="0">
-                <a:solidFill>
-                  <a:srgbClr val="262626"/>
-                </a:solidFill>
+              <a:rPr sz="1650" b="0" i="0">
+                <a:solidFill>
+                  <a:srgbClr val="000000"/>
+                </a:solidFill>
+                <a:latin typeface="Times New Roman"/>
+                <a:ea typeface="Times New Roman"/>
+                <a:cs typeface="Times New Roman"/>
               </a:rPr>
               <a:t>Madhavan G  </a:t>
             </a:r>
             <a:r>
-              <a:rPr sz="1500" b="1" i="0">
-                <a:solidFill>
-                  <a:srgbClr val="262626"/>
-                </a:solidFill>
+              <a:rPr sz="1650" b="1" i="0">
+                <a:solidFill>
+                  <a:srgbClr val="000000"/>
+                </a:solidFill>
+                <a:latin typeface="Times New Roman"/>
+                <a:ea typeface="Times New Roman"/>
+                <a:cs typeface="Times New Roman"/>
               </a:rPr>
               <a:t>(2104251040518)</a:t>
             </a:r>
@@ -4002,18 +4031,24 @@
               <a:buNone/>
             </a:pPr>
             <a:r>
-              <a:rPr sz="1500" b="0" i="0">
-                <a:solidFill>
-                  <a:srgbClr val="262626"/>
-                </a:solidFill>
+              <a:rPr sz="1650" b="0" i="0">
+                <a:solidFill>
+                  <a:srgbClr val="000000"/>
+                </a:solidFill>
+                <a:latin typeface="Times New Roman"/>
+                <a:ea typeface="Times New Roman"/>
+                <a:cs typeface="Times New Roman"/>
               </a:rPr>
               <a:t>Sriram Sivakumar  </a:t>
             </a:r>
             <a:r>
-              <a:rPr sz="1500" b="1" i="0">
-                <a:solidFill>
-                  <a:srgbClr val="262626"/>
-                </a:solidFill>
+              <a:rPr sz="1650" b="1" i="0">
+                <a:solidFill>
+                  <a:srgbClr val="000000"/>
+                </a:solidFill>
+                <a:latin typeface="Times New Roman"/>
+                <a:ea typeface="Times New Roman"/>
+                <a:cs typeface="Times New Roman"/>
               </a:rPr>
               <a:t>(2104251040971)</a:t>
             </a:r>
@@ -4032,10 +4067,13 @@
               <a:buNone/>
             </a:pPr>
             <a:r>
-              <a:rPr sz="1400" b="0" i="0">
-                <a:solidFill>
-                  <a:srgbClr val="595959"/>
-                </a:solidFill>
+              <a:rPr sz="1540" b="0" i="0">
+                <a:solidFill>
+                  <a:srgbClr val="000000"/>
+                </a:solidFill>
+                <a:latin typeface="Times New Roman"/>
+                <a:ea typeface="Times New Roman"/>
+                <a:cs typeface="Times New Roman"/>
               </a:rPr>
               <a:t>B.E. Computer Science and Engineering</a:t>
             </a:r>
@@ -4114,16 +4152,23 @@
               <a:buNone/>
             </a:pPr>
             <a:r>
-              <a:rPr sz="2600" b="1" i="0">
-                <a:solidFill>
-                  <a:srgbClr val="1F3864"/>
-                </a:solidFill>
+              <a:rPr sz="2860" b="1" i="0">
+                <a:solidFill>
+                  <a:srgbClr val="000000"/>
+                </a:solidFill>
+                <a:latin typeface="Times New Roman"/>
+                <a:ea typeface="Times New Roman"/>
+                <a:cs typeface="Times New Roman"/>
               </a:rPr>
               <a:t>Solar Flare Prediction &amp; Space Weather Alert System</a:t>
             </a:r>
             <a:endParaRPr lang="en-IN" sz="2000" dirty="0">
-              <a:latin typeface="Times New Roman" panose="02020603050405020304" pitchFamily="18" charset="0"/>
-              <a:cs typeface="Times New Roman" panose="02020603050405020304" pitchFamily="18" charset="0"/>
+              <a:solidFill>
+                <a:srgbClr val="000000"/>
+              </a:solidFill>
+              <a:latin typeface="Times New Roman"/>
+              <a:ea typeface="Times New Roman"/>
+              <a:cs typeface="Times New Roman"/>
             </a:endParaRPr>
           </a:p>
           <a:p>
@@ -4140,10 +4185,13 @@
               <a:buNone/>
             </a:pPr>
             <a:r>
-              <a:rPr sz="1400" b="0" i="1">
-                <a:solidFill>
-                  <a:srgbClr val="595959"/>
-                </a:solidFill>
+              <a:rPr sz="1540" b="0" i="1">
+                <a:solidFill>
+                  <a:srgbClr val="000000"/>
+                </a:solidFill>
+                <a:latin typeface="Times New Roman"/>
+                <a:ea typeface="Times New Roman"/>
+                <a:cs typeface="Times New Roman"/>
               </a:rPr>
               <a:t>Forecasting major (M/X-class) flares 24 hours ahead from solar magnetic-field data</a:t>
             </a:r>
@@ -4190,11 +4238,11 @@
               <a:buNone/>
               <a:defRPr sz="2400" kern="1200">
                 <a:solidFill>
-                  <a:schemeClr val="tx1"/>
-                </a:solidFill>
-                <a:latin typeface="+mn-lt"/>
-                <a:ea typeface="+mn-ea"/>
-                <a:cs typeface="+mn-cs"/>
+                  <a:srgbClr val="000000"/>
+                </a:solidFill>
+                <a:latin typeface="Times New Roman"/>
+                <a:ea typeface="Times New Roman"/>
+                <a:cs typeface="Times New Roman"/>
               </a:defRPr>
             </a:lvl1pPr>
             <a:lvl2pPr marL="457200" indent="0" algn="ctr" defTabSz="914400" rtl="0" eaLnBrk="1" latinLnBrk="0" hangingPunct="1">
@@ -4208,11 +4256,11 @@
               <a:buNone/>
               <a:defRPr sz="2000" kern="1200">
                 <a:solidFill>
-                  <a:schemeClr val="tx1"/>
-                </a:solidFill>
-                <a:latin typeface="+mn-lt"/>
-                <a:ea typeface="+mn-ea"/>
-                <a:cs typeface="+mn-cs"/>
+                  <a:srgbClr val="000000"/>
+                </a:solidFill>
+                <a:latin typeface="Times New Roman"/>
+                <a:ea typeface="Times New Roman"/>
+                <a:cs typeface="Times New Roman"/>
               </a:defRPr>
             </a:lvl2pPr>
             <a:lvl3pPr marL="914400" indent="0" algn="ctr" defTabSz="914400" rtl="0" eaLnBrk="1" latinLnBrk="0" hangingPunct="1">
@@ -4226,11 +4274,11 @@
               <a:buNone/>
               <a:defRPr sz="1800" kern="1200">
                 <a:solidFill>
-                  <a:schemeClr val="tx1"/>
-                </a:solidFill>
-                <a:latin typeface="+mn-lt"/>
-                <a:ea typeface="+mn-ea"/>
-                <a:cs typeface="+mn-cs"/>
+                  <a:srgbClr val="000000"/>
+                </a:solidFill>
+                <a:latin typeface="Times New Roman"/>
+                <a:ea typeface="Times New Roman"/>
+                <a:cs typeface="Times New Roman"/>
               </a:defRPr>
             </a:lvl3pPr>
             <a:lvl4pPr marL="1371600" indent="0" algn="ctr" defTabSz="914400" rtl="0" eaLnBrk="1" latinLnBrk="0" hangingPunct="1">
@@ -4244,11 +4292,11 @@
               <a:buNone/>
               <a:defRPr sz="1600" kern="1200">
                 <a:solidFill>
-                  <a:schemeClr val="tx1"/>
-                </a:solidFill>
-                <a:latin typeface="+mn-lt"/>
-                <a:ea typeface="+mn-ea"/>
-                <a:cs typeface="+mn-cs"/>
+                  <a:srgbClr val="000000"/>
+                </a:solidFill>
+                <a:latin typeface="Times New Roman"/>
+                <a:ea typeface="Times New Roman"/>
+                <a:cs typeface="Times New Roman"/>
               </a:defRPr>
             </a:lvl4pPr>
             <a:lvl5pPr marL="1828800" indent="0" algn="ctr" defTabSz="914400" rtl="0" eaLnBrk="1" latinLnBrk="0" hangingPunct="1">
@@ -4262,11 +4310,11 @@
               <a:buNone/>
               <a:defRPr sz="1600" kern="1200">
                 <a:solidFill>
-                  <a:schemeClr val="tx1"/>
-                </a:solidFill>
-                <a:latin typeface="+mn-lt"/>
-                <a:ea typeface="+mn-ea"/>
-                <a:cs typeface="+mn-cs"/>
+                  <a:srgbClr val="000000"/>
+                </a:solidFill>
+                <a:latin typeface="Times New Roman"/>
+                <a:ea typeface="Times New Roman"/>
+                <a:cs typeface="Times New Roman"/>
               </a:defRPr>
             </a:lvl5pPr>
             <a:lvl6pPr marL="2286000" indent="0" algn="ctr" defTabSz="914400" rtl="0" eaLnBrk="1" latinLnBrk="0" hangingPunct="1">
@@ -4280,11 +4328,11 @@
               <a:buNone/>
               <a:defRPr sz="1600" kern="1200">
                 <a:solidFill>
-                  <a:schemeClr val="tx1"/>
-                </a:solidFill>
-                <a:latin typeface="+mn-lt"/>
-                <a:ea typeface="+mn-ea"/>
-                <a:cs typeface="+mn-cs"/>
+                  <a:srgbClr val="000000"/>
+                </a:solidFill>
+                <a:latin typeface="Times New Roman"/>
+                <a:ea typeface="Times New Roman"/>
+                <a:cs typeface="Times New Roman"/>
               </a:defRPr>
             </a:lvl6pPr>
             <a:lvl7pPr marL="2743200" indent="0" algn="ctr" defTabSz="914400" rtl="0" eaLnBrk="1" latinLnBrk="0" hangingPunct="1">
@@ -4298,11 +4346,11 @@
               <a:buNone/>
               <a:defRPr sz="1600" kern="1200">
                 <a:solidFill>
-                  <a:schemeClr val="tx1"/>
-                </a:solidFill>
-                <a:latin typeface="+mn-lt"/>
-                <a:ea typeface="+mn-ea"/>
-                <a:cs typeface="+mn-cs"/>
+                  <a:srgbClr val="000000"/>
+                </a:solidFill>
+                <a:latin typeface="Times New Roman"/>
+                <a:ea typeface="Times New Roman"/>
+                <a:cs typeface="Times New Roman"/>
               </a:defRPr>
             </a:lvl7pPr>
             <a:lvl8pPr marL="3200400" indent="0" algn="ctr" defTabSz="914400" rtl="0" eaLnBrk="1" latinLnBrk="0" hangingPunct="1">
@@ -4316,11 +4364,11 @@
               <a:buNone/>
               <a:defRPr sz="1600" kern="1200">
                 <a:solidFill>
-                  <a:schemeClr val="tx1"/>
-                </a:solidFill>
-                <a:latin typeface="+mn-lt"/>
-                <a:ea typeface="+mn-ea"/>
-                <a:cs typeface="+mn-cs"/>
+                  <a:srgbClr val="000000"/>
+                </a:solidFill>
+                <a:latin typeface="Times New Roman"/>
+                <a:ea typeface="Times New Roman"/>
+                <a:cs typeface="Times New Roman"/>
               </a:defRPr>
             </a:lvl8pPr>
             <a:lvl9pPr marL="3657600" indent="0" algn="ctr" defTabSz="914400" rtl="0" eaLnBrk="1" latinLnBrk="0" hangingPunct="1">
@@ -4334,11 +4382,11 @@
               <a:buNone/>
               <a:defRPr sz="1600" kern="1200">
                 <a:solidFill>
-                  <a:schemeClr val="tx1"/>
-                </a:solidFill>
-                <a:latin typeface="+mn-lt"/>
-                <a:ea typeface="+mn-ea"/>
-                <a:cs typeface="+mn-cs"/>
+                  <a:srgbClr val="000000"/>
+                </a:solidFill>
+                <a:latin typeface="Times New Roman"/>
+                <a:ea typeface="Times New Roman"/>
+                <a:cs typeface="Times New Roman"/>
               </a:defRPr>
             </a:lvl9pPr>
           </a:lstStyle>
@@ -4354,13 +4402,23 @@
                 <a:spcPts val="700"/>
               </a:spcAft>
               <a:buNone/>
-              <a:defRPr/>
+              <a:defRPr>
+                <a:solidFill>
+                  <a:srgbClr val="000000"/>
+                </a:solidFill>
+                <a:latin typeface="Times New Roman"/>
+                <a:ea typeface="Times New Roman"/>
+                <a:cs typeface="Times New Roman"/>
+              </a:defRPr>
             </a:pPr>
             <a:r>
-              <a:rPr sz="1800" b="1" i="0">
-                <a:solidFill>
-                  <a:srgbClr val="1F3864"/>
-                </a:solidFill>
+              <a:rPr sz="1980" b="1" i="0">
+                <a:solidFill>
+                  <a:srgbClr val="000000"/>
+                </a:solidFill>
+                <a:latin typeface="Times New Roman"/>
+                <a:ea typeface="Times New Roman"/>
+                <a:cs typeface="Times New Roman"/>
               </a:rPr>
               <a:t>Mentor</a:t>
             </a:r>
@@ -4379,10 +4437,13 @@
               <a:buNone/>
             </a:pPr>
             <a:r>
-              <a:rPr sz="1500" b="0" i="0">
-                <a:solidFill>
-                  <a:srgbClr val="262626"/>
-                </a:solidFill>
+              <a:rPr sz="1650" b="0" i="0">
+                <a:solidFill>
+                  <a:srgbClr val="000000"/>
+                </a:solidFill>
+                <a:latin typeface="Times New Roman"/>
+                <a:ea typeface="Times New Roman"/>
+                <a:cs typeface="Times New Roman"/>
               </a:rPr>
               <a:t>Ms Poornima Lakshmi</a:t>
             </a:r>
@@ -4401,10 +4462,13 @@
               <a:buNone/>
             </a:pPr>
             <a:r>
-              <a:rPr sz="1400" b="0" i="0">
-                <a:solidFill>
-                  <a:srgbClr val="595959"/>
-                </a:solidFill>
+              <a:rPr sz="1540" b="0" i="0">
+                <a:solidFill>
+                  <a:srgbClr val="000000"/>
+                </a:solidFill>
+                <a:latin typeface="Times New Roman"/>
+                <a:ea typeface="Times New Roman"/>
+                <a:cs typeface="Times New Roman"/>
               </a:rPr>
               <a:t>Mentor &amp; Project Coordinator</a:t>
             </a:r>
@@ -4423,10 +4487,13 @@
               <a:buNone/>
             </a:pPr>
             <a:r>
-              <a:rPr sz="1400" b="0" i="0">
-                <a:solidFill>
-                  <a:srgbClr val="595959"/>
-                </a:solidFill>
+              <a:rPr sz="1540" b="0" i="0">
+                <a:solidFill>
+                  <a:srgbClr val="000000"/>
+                </a:solidFill>
+                <a:latin typeface="Times New Roman"/>
+                <a:ea typeface="Times New Roman"/>
+                <a:cs typeface="Times New Roman"/>
               </a:rPr>
               <a:t>Dept. of Computer Science and Engineering</a:t>
             </a:r>
@@ -4455,10 +4522,24 @@
           <a:lstStyle/>
           <a:p>
             <a:fld id="{B4EE2AE5-9218-4A07-842F-E84162EAAD55}" type="slidenum">
-              <a:rPr lang="en-IN" smtClean="0"/>
+              <a:rPr lang="en-IN" smtClean="0">
+                <a:solidFill>
+                  <a:srgbClr val="000000"/>
+                </a:solidFill>
+                <a:latin typeface="Times New Roman"/>
+                <a:ea typeface="Times New Roman"/>
+                <a:cs typeface="Times New Roman"/>
+              </a:rPr>
               <a:t>1</a:t>
             </a:fld>
-            <a:endParaRPr lang="en-IN" dirty="0"/>
+            <a:endParaRPr lang="en-IN" dirty="0">
+              <a:solidFill>
+                <a:srgbClr val="000000"/>
+              </a:solidFill>
+              <a:latin typeface="Times New Roman"/>
+              <a:ea typeface="Times New Roman"/>
+              <a:cs typeface="Times New Roman"/>
+            </a:endParaRPr>
           </a:p>
         </p:txBody>
       </p:sp>
@@ -4484,10 +4565,24 @@
           <a:lstStyle/>
           <a:p>
             <a:r>
-              <a:rPr lang="en-US"/>
+              <a:rPr lang="en-US">
+                <a:solidFill>
+                  <a:srgbClr val="000000"/>
+                </a:solidFill>
+                <a:latin typeface="Times New Roman"/>
+                <a:ea typeface="Times New Roman"/>
+                <a:cs typeface="Times New Roman"/>
+              </a:rPr>
               <a:t>Date: 07/10/2026</a:t>
             </a:r>
-            <a:endParaRPr lang="en-IN" dirty="0"/>
+            <a:endParaRPr lang="en-IN" dirty="0">
+              <a:solidFill>
+                <a:srgbClr val="000000"/>
+              </a:solidFill>
+              <a:latin typeface="Times New Roman"/>
+              <a:ea typeface="Times New Roman"/>
+              <a:cs typeface="Times New Roman"/>
+            </a:endParaRPr>
           </a:p>
         </p:txBody>
       </p:sp>
@@ -4513,10 +4608,24 @@
           <a:lstStyle/>
           <a:p>
             <a:r>
-              <a:rPr lang="en-US" dirty="0"/>
+              <a:rPr lang="en-US" dirty="0">
+                <a:solidFill>
+                  <a:srgbClr val="000000"/>
+                </a:solidFill>
+                <a:latin typeface="Times New Roman"/>
+                <a:ea typeface="Times New Roman"/>
+                <a:cs typeface="Times New Roman"/>
+              </a:rPr>
               <a:t>II–Year PBL Project Final Review</a:t>
             </a:r>
-            <a:endParaRPr lang="en-IN" dirty="0"/>
+            <a:endParaRPr lang="en-IN" dirty="0">
+              <a:solidFill>
+                <a:srgbClr val="000000"/>
+              </a:solidFill>
+              <a:latin typeface="Times New Roman"/>
+              <a:ea typeface="Times New Roman"/>
+              <a:cs typeface="Times New Roman"/>
+            </a:endParaRPr>
           </a:p>
         </p:txBody>
       </p:sp>
@@ -4584,8 +4693,12 @@
             <a:pPr algn="ctr"/>
             <a:r>
               <a:rPr lang="en-IN" sz="3200" b="1" dirty="0">
+                <a:solidFill>
+                  <a:srgbClr val="000000"/>
+                </a:solidFill>
                 <a:latin typeface="Times New Roman" panose="02020603050405020304" pitchFamily="18" charset="0"/>
-                <a:cs typeface="Times New Roman" panose="02020603050405020304" pitchFamily="18" charset="0"/>
+                <a:ea typeface="Times New Roman"/>
+                <a:cs typeface="Times New Roman"/>
               </a:rPr>
               <a:t>Problem &amp; Objectives</a:t>
             </a:r>
@@ -4611,7 +4724,7 @@
         <p:spPr>
           <a:xfrm>
             <a:off x="528320" y="995680"/>
-            <a:ext cx="11135360" cy="2103120"/>
+            <a:ext cx="11135360" cy="2377440"/>
           </a:xfrm>
           <a:noFill/>
           <a:ln>
@@ -4639,16 +4752,23 @@
               <a:buNone/>
             </a:pPr>
             <a:r>
-              <a:rPr sz="1700" b="1" i="0">
-                <a:solidFill>
-                  <a:srgbClr val="1F3864"/>
-                </a:solidFill>
+              <a:rPr sz="1870" b="1" i="0">
+                <a:solidFill>
+                  <a:srgbClr val="000000"/>
+                </a:solidFill>
+                <a:latin typeface="Times New Roman"/>
+                <a:ea typeface="Times New Roman"/>
+                <a:cs typeface="Times New Roman"/>
               </a:rPr>
               <a:t>Problem Statement</a:t>
             </a:r>
             <a:endParaRPr lang="en-US" sz="2200" b="1" dirty="0">
-              <a:latin typeface="Times New Roman" panose="02020603050405020304" pitchFamily="18" charset="0"/>
-              <a:cs typeface="Times New Roman" panose="02020603050405020304" pitchFamily="18" charset="0"/>
+              <a:solidFill>
+                <a:srgbClr val="000000"/>
+              </a:solidFill>
+              <a:latin typeface="Times New Roman"/>
+              <a:ea typeface="Times New Roman"/>
+              <a:cs typeface="Times New Roman"/>
             </a:endParaRPr>
           </a:p>
           <a:p>
@@ -4665,18 +4785,24 @@
               <a:buNone/>
             </a:pPr>
             <a:r>
-              <a:rPr sz="1400" b="0" i="0">
-                <a:solidFill>
-                  <a:srgbClr val="262626"/>
-                </a:solidFill>
+              <a:rPr sz="1540" b="0" i="0">
+                <a:solidFill>
+                  <a:srgbClr val="000000"/>
+                </a:solidFill>
+                <a:latin typeface="Times New Roman"/>
+                <a:ea typeface="Times New Roman"/>
+                <a:cs typeface="Times New Roman"/>
               </a:rPr>
               <a:t>A major solar flare releases in minutes the energy of billions of tonnes of TNT. The radiation reaches Earth in about eight minutes and disrupts </a:t>
             </a:r>
             <a:r>
-              <a:rPr sz="1400" b="1" i="0">
-                <a:solidFill>
-                  <a:srgbClr val="262626"/>
-                </a:solidFill>
+              <a:rPr sz="1540" b="1" i="0">
+                <a:solidFill>
+                  <a:srgbClr val="000000"/>
+                </a:solidFill>
+                <a:latin typeface="Times New Roman"/>
+                <a:ea typeface="Times New Roman"/>
+                <a:cs typeface="Times New Roman"/>
               </a:rPr>
               <a:t>HF radio and aviation communication, degrades GPS accuracy, damages satellite electronics and can induce currents that destabilise power grids.</a:t>
             </a:r>
@@ -4695,10 +4821,13 @@
               <a:buNone/>
             </a:pPr>
             <a:r>
-              <a:rPr sz="1400" b="0" i="0">
-                <a:solidFill>
-                  <a:srgbClr val="262626"/>
-                </a:solidFill>
+              <a:rPr sz="1540" b="0" i="0">
+                <a:solidFill>
+                  <a:srgbClr val="000000"/>
+                </a:solidFill>
+                <a:latin typeface="Times New Roman"/>
+                <a:ea typeface="Times New Roman"/>
+                <a:cs typeface="Times New Roman"/>
               </a:rPr>
               <a:t>Satellite operators, polar-route airlines, power utilities and space agencies are all affected, and once an eruption is visible it is already too late to act.</a:t>
             </a:r>
@@ -4717,26 +4846,35 @@
               <a:buNone/>
             </a:pPr>
             <a:r>
-              <a:rPr sz="1400" b="0" i="0">
-                <a:solidFill>
-                  <a:srgbClr val="262626"/>
-                </a:solidFill>
+              <a:rPr sz="1540" b="0" i="0">
+                <a:solidFill>
+                  <a:srgbClr val="000000"/>
+                </a:solidFill>
+                <a:latin typeface="Times New Roman"/>
+                <a:ea typeface="Times New Roman"/>
+                <a:cs typeface="Times New Roman"/>
               </a:rPr>
               <a:t>The magnetic field of a solar active region, however, </a:t>
             </a:r>
             <a:r>
-              <a:rPr sz="1400" b="1" i="0">
-                <a:solidFill>
-                  <a:srgbClr val="262626"/>
-                </a:solidFill>
+              <a:rPr sz="1540" b="1" i="0">
+                <a:solidFill>
+                  <a:srgbClr val="000000"/>
+                </a:solidFill>
+                <a:latin typeface="Times New Roman"/>
+                <a:ea typeface="Times New Roman"/>
+                <a:cs typeface="Times New Roman"/>
               </a:rPr>
               <a:t>changes measurably in the hours before it erupts.</a:t>
             </a:r>
             <a:r>
-              <a:rPr sz="1400" b="0" i="0">
-                <a:solidFill>
-                  <a:srgbClr val="262626"/>
-                </a:solidFill>
+              <a:rPr sz="1540" b="0" i="0">
+                <a:solidFill>
+                  <a:srgbClr val="000000"/>
+                </a:solidFill>
+                <a:latin typeface="Times New Roman"/>
+                <a:ea typeface="Times New Roman"/>
+                <a:cs typeface="Times New Roman"/>
               </a:rPr>
               <a:t> The question this project asks is whether that change can be learned from historical observations and turned into a usable 24-hour advance warning.</a:t>
             </a:r>
@@ -4765,10 +4903,24 @@
           <a:lstStyle/>
           <a:p>
             <a:fld id="{B4EE2AE5-9218-4A07-842F-E84162EAAD55}" type="slidenum">
-              <a:rPr lang="en-IN" smtClean="0"/>
+              <a:rPr lang="en-IN" smtClean="0">
+                <a:solidFill>
+                  <a:srgbClr val="000000"/>
+                </a:solidFill>
+                <a:latin typeface="Times New Roman"/>
+                <a:ea typeface="Times New Roman"/>
+                <a:cs typeface="Times New Roman"/>
+              </a:rPr>
               <a:t>2</a:t>
             </a:fld>
-            <a:endParaRPr lang="en-IN" dirty="0"/>
+            <a:endParaRPr lang="en-IN" dirty="0">
+              <a:solidFill>
+                <a:srgbClr val="000000"/>
+              </a:solidFill>
+              <a:latin typeface="Times New Roman"/>
+              <a:ea typeface="Times New Roman"/>
+              <a:cs typeface="Times New Roman"/>
+            </a:endParaRPr>
           </a:p>
         </p:txBody>
       </p:sp>
@@ -4794,10 +4946,24 @@
           <a:lstStyle/>
           <a:p>
             <a:r>
-              <a:rPr lang="en-US"/>
+              <a:rPr lang="en-US">
+                <a:solidFill>
+                  <a:srgbClr val="000000"/>
+                </a:solidFill>
+                <a:latin typeface="Times New Roman"/>
+                <a:ea typeface="Times New Roman"/>
+                <a:cs typeface="Times New Roman"/>
+              </a:rPr>
               <a:t>Date: 07/10/2026</a:t>
             </a:r>
-            <a:endParaRPr lang="en-IN" dirty="0"/>
+            <a:endParaRPr lang="en-IN" dirty="0">
+              <a:solidFill>
+                <a:srgbClr val="000000"/>
+              </a:solidFill>
+              <a:latin typeface="Times New Roman"/>
+              <a:ea typeface="Times New Roman"/>
+              <a:cs typeface="Times New Roman"/>
+            </a:endParaRPr>
           </a:p>
         </p:txBody>
       </p:sp>
@@ -4859,10 +5025,24 @@
           <a:lstStyle/>
           <a:p>
             <a:r>
-              <a:rPr lang="en-US" dirty="0"/>
+              <a:rPr lang="en-US" dirty="0">
+                <a:solidFill>
+                  <a:srgbClr val="000000"/>
+                </a:solidFill>
+                <a:latin typeface="Times New Roman"/>
+                <a:ea typeface="Times New Roman"/>
+                <a:cs typeface="Times New Roman"/>
+              </a:rPr>
               <a:t>II–Year PBL Project Final Review</a:t>
             </a:r>
-            <a:endParaRPr lang="en-IN" dirty="0"/>
+            <a:endParaRPr lang="en-IN" dirty="0">
+              <a:solidFill>
+                <a:srgbClr val="000000"/>
+              </a:solidFill>
+              <a:latin typeface="Times New Roman"/>
+              <a:ea typeface="Times New Roman"/>
+              <a:cs typeface="Times New Roman"/>
+            </a:endParaRPr>
           </a:p>
         </p:txBody>
       </p:sp>
@@ -4882,8 +5062,8 @@
         </p:nvSpPr>
         <p:spPr>
           <a:xfrm>
-            <a:off x="528320" y="3246120"/>
-            <a:ext cx="5431322" cy="3108960"/>
+            <a:off x="528320" y="3456432"/>
+            <a:ext cx="5431322" cy="2898648"/>
           </a:xfrm>
           <a:prstGeom prst="rect">
             <a:avLst/>
@@ -4911,11 +5091,11 @@
               <a:buChar char="•"/>
               <a:defRPr sz="2800" kern="1200">
                 <a:solidFill>
-                  <a:schemeClr val="tx1"/>
-                </a:solidFill>
-                <a:latin typeface="+mn-lt"/>
-                <a:ea typeface="+mn-ea"/>
-                <a:cs typeface="+mn-cs"/>
+                  <a:srgbClr val="000000"/>
+                </a:solidFill>
+                <a:latin typeface="Times New Roman"/>
+                <a:ea typeface="Times New Roman"/>
+                <a:cs typeface="Times New Roman"/>
               </a:defRPr>
             </a:lvl1pPr>
             <a:lvl2pPr marL="685800" indent="-228600" algn="l" defTabSz="914400" rtl="0" eaLnBrk="1" latinLnBrk="0" hangingPunct="1">
@@ -4929,11 +5109,11 @@
               <a:buChar char="•"/>
               <a:defRPr sz="2400" kern="1200">
                 <a:solidFill>
-                  <a:schemeClr val="tx1"/>
-                </a:solidFill>
-                <a:latin typeface="+mn-lt"/>
-                <a:ea typeface="+mn-ea"/>
-                <a:cs typeface="+mn-cs"/>
+                  <a:srgbClr val="000000"/>
+                </a:solidFill>
+                <a:latin typeface="Times New Roman"/>
+                <a:ea typeface="Times New Roman"/>
+                <a:cs typeface="Times New Roman"/>
               </a:defRPr>
             </a:lvl2pPr>
             <a:lvl3pPr marL="1143000" indent="-228600" algn="l" defTabSz="914400" rtl="0" eaLnBrk="1" latinLnBrk="0" hangingPunct="1">
@@ -4947,11 +5127,11 @@
               <a:buChar char="•"/>
               <a:defRPr sz="2000" kern="1200">
                 <a:solidFill>
-                  <a:schemeClr val="tx1"/>
-                </a:solidFill>
-                <a:latin typeface="+mn-lt"/>
-                <a:ea typeface="+mn-ea"/>
-                <a:cs typeface="+mn-cs"/>
+                  <a:srgbClr val="000000"/>
+                </a:solidFill>
+                <a:latin typeface="Times New Roman"/>
+                <a:ea typeface="Times New Roman"/>
+                <a:cs typeface="Times New Roman"/>
               </a:defRPr>
             </a:lvl3pPr>
             <a:lvl4pPr marL="1600200" indent="-228600" algn="l" defTabSz="914400" rtl="0" eaLnBrk="1" latinLnBrk="0" hangingPunct="1">
@@ -4965,11 +5145,11 @@
               <a:buChar char="•"/>
               <a:defRPr sz="1800" kern="1200">
                 <a:solidFill>
-                  <a:schemeClr val="tx1"/>
-                </a:solidFill>
-                <a:latin typeface="+mn-lt"/>
-                <a:ea typeface="+mn-ea"/>
-                <a:cs typeface="+mn-cs"/>
+                  <a:srgbClr val="000000"/>
+                </a:solidFill>
+                <a:latin typeface="Times New Roman"/>
+                <a:ea typeface="Times New Roman"/>
+                <a:cs typeface="Times New Roman"/>
               </a:defRPr>
             </a:lvl4pPr>
             <a:lvl5pPr marL="2057400" indent="-228600" algn="l" defTabSz="914400" rtl="0" eaLnBrk="1" latinLnBrk="0" hangingPunct="1">
@@ -4983,11 +5163,11 @@
               <a:buChar char="•"/>
               <a:defRPr sz="1800" kern="1200">
                 <a:solidFill>
-                  <a:schemeClr val="tx1"/>
-                </a:solidFill>
-                <a:latin typeface="+mn-lt"/>
-                <a:ea typeface="+mn-ea"/>
-                <a:cs typeface="+mn-cs"/>
+                  <a:srgbClr val="000000"/>
+                </a:solidFill>
+                <a:latin typeface="Times New Roman"/>
+                <a:ea typeface="Times New Roman"/>
+                <a:cs typeface="Times New Roman"/>
               </a:defRPr>
             </a:lvl5pPr>
             <a:lvl6pPr marL="2514600" indent="-228600" algn="l" defTabSz="914400" rtl="0" eaLnBrk="1" latinLnBrk="0" hangingPunct="1">
@@ -5001,11 +5181,11 @@
               <a:buChar char="•"/>
               <a:defRPr sz="1800" kern="1200">
                 <a:solidFill>
-                  <a:schemeClr val="tx1"/>
-                </a:solidFill>
-                <a:latin typeface="+mn-lt"/>
-                <a:ea typeface="+mn-ea"/>
-                <a:cs typeface="+mn-cs"/>
+                  <a:srgbClr val="000000"/>
+                </a:solidFill>
+                <a:latin typeface="Times New Roman"/>
+                <a:ea typeface="Times New Roman"/>
+                <a:cs typeface="Times New Roman"/>
               </a:defRPr>
             </a:lvl6pPr>
             <a:lvl7pPr marL="2971800" indent="-228600" algn="l" defTabSz="914400" rtl="0" eaLnBrk="1" latinLnBrk="0" hangingPunct="1">
@@ -5019,11 +5199,11 @@
               <a:buChar char="•"/>
               <a:defRPr sz="1800" kern="1200">
                 <a:solidFill>
-                  <a:schemeClr val="tx1"/>
-                </a:solidFill>
-                <a:latin typeface="+mn-lt"/>
-                <a:ea typeface="+mn-ea"/>
-                <a:cs typeface="+mn-cs"/>
+                  <a:srgbClr val="000000"/>
+                </a:solidFill>
+                <a:latin typeface="Times New Roman"/>
+                <a:ea typeface="Times New Roman"/>
+                <a:cs typeface="Times New Roman"/>
               </a:defRPr>
             </a:lvl7pPr>
             <a:lvl8pPr marL="3429000" indent="-228600" algn="l" defTabSz="914400" rtl="0" eaLnBrk="1" latinLnBrk="0" hangingPunct="1">
@@ -5037,11 +5217,11 @@
               <a:buChar char="•"/>
               <a:defRPr sz="1800" kern="1200">
                 <a:solidFill>
-                  <a:schemeClr val="tx1"/>
-                </a:solidFill>
-                <a:latin typeface="+mn-lt"/>
-                <a:ea typeface="+mn-ea"/>
-                <a:cs typeface="+mn-cs"/>
+                  <a:srgbClr val="000000"/>
+                </a:solidFill>
+                <a:latin typeface="Times New Roman"/>
+                <a:ea typeface="Times New Roman"/>
+                <a:cs typeface="Times New Roman"/>
               </a:defRPr>
             </a:lvl8pPr>
             <a:lvl9pPr marL="3886200" indent="-228600" algn="l" defTabSz="914400" rtl="0" eaLnBrk="1" latinLnBrk="0" hangingPunct="1">
@@ -5055,11 +5235,11 @@
               <a:buChar char="•"/>
               <a:defRPr sz="1800" kern="1200">
                 <a:solidFill>
-                  <a:schemeClr val="tx1"/>
-                </a:solidFill>
-                <a:latin typeface="+mn-lt"/>
-                <a:ea typeface="+mn-ea"/>
-                <a:cs typeface="+mn-cs"/>
+                  <a:srgbClr val="000000"/>
+                </a:solidFill>
+                <a:latin typeface="Times New Roman"/>
+                <a:ea typeface="Times New Roman"/>
+                <a:cs typeface="Times New Roman"/>
               </a:defRPr>
             </a:lvl9pPr>
           </a:lstStyle>
@@ -5077,10 +5257,13 @@
               <a:buNone/>
             </a:pPr>
             <a:r>
-              <a:rPr sz="1700" b="1" i="0">
-                <a:solidFill>
-                  <a:srgbClr val="1F3864"/>
-                </a:solidFill>
+              <a:rPr sz="1870" b="1" i="0">
+                <a:solidFill>
+                  <a:srgbClr val="000000"/>
+                </a:solidFill>
+                <a:latin typeface="Times New Roman"/>
+                <a:ea typeface="Times New Roman"/>
+                <a:cs typeface="Times New Roman"/>
               </a:rPr>
               <a:t>Objective</a:t>
             </a:r>
@@ -5099,26 +5282,35 @@
               <a:buNone/>
             </a:pPr>
             <a:r>
-              <a:rPr sz="1350" b="1">
-                <a:solidFill>
-                  <a:srgbClr val="4472C4"/>
-                </a:solidFill>
-              </a:rPr>
-              <a:t>▪  </a:t>
-            </a:r>
-            <a:r>
-              <a:rPr sz="1350" b="1" i="0">
-                <a:solidFill>
-                  <a:srgbClr val="262626"/>
-                </a:solidFill>
+              <a:rPr sz="1490" b="1">
+                <a:solidFill>
+                  <a:srgbClr val="000000"/>
+                </a:solidFill>
+                <a:latin typeface="Times New Roman"/>
+                <a:ea typeface="Times New Roman"/>
+                <a:cs typeface="Times New Roman"/>
+              </a:rPr>
+              <a:t>•  </a:t>
+            </a:r>
+            <a:r>
+              <a:rPr sz="1490" b="1" i="0">
+                <a:solidFill>
+                  <a:srgbClr val="000000"/>
+                </a:solidFill>
+                <a:latin typeface="Times New Roman"/>
+                <a:ea typeface="Times New Roman"/>
+                <a:cs typeface="Times New Roman"/>
               </a:rPr>
               <a:t>Identify</a:t>
             </a:r>
             <a:r>
-              <a:rPr sz="1350" b="0" i="0">
-                <a:solidFill>
-                  <a:srgbClr val="262626"/>
-                </a:solidFill>
+              <a:rPr sz="1490" b="0" i="0">
+                <a:solidFill>
+                  <a:srgbClr val="000000"/>
+                </a:solidFill>
+                <a:latin typeface="Times New Roman"/>
+                <a:ea typeface="Times New Roman"/>
+                <a:cs typeface="Times New Roman"/>
               </a:rPr>
               <a:t> the magnetic-field signatures that precede major flares, using SDO/HMI SHARP parameters from the SWAN-SF benchmark.</a:t>
             </a:r>
@@ -5137,26 +5329,35 @@
               <a:buNone/>
             </a:pPr>
             <a:r>
-              <a:rPr sz="1350" b="1">
-                <a:solidFill>
-                  <a:srgbClr val="4472C4"/>
-                </a:solidFill>
-              </a:rPr>
-              <a:t>▪  </a:t>
-            </a:r>
-            <a:r>
-              <a:rPr sz="1350" b="1" i="0">
-                <a:solidFill>
-                  <a:srgbClr val="262626"/>
-                </a:solidFill>
+              <a:rPr sz="1490" b="1">
+                <a:solidFill>
+                  <a:srgbClr val="000000"/>
+                </a:solidFill>
+                <a:latin typeface="Times New Roman"/>
+                <a:ea typeface="Times New Roman"/>
+                <a:cs typeface="Times New Roman"/>
+              </a:rPr>
+              <a:t>•  </a:t>
+            </a:r>
+            <a:r>
+              <a:rPr sz="1490" b="1" i="0">
+                <a:solidFill>
+                  <a:srgbClr val="000000"/>
+                </a:solidFill>
+                <a:latin typeface="Times New Roman"/>
+                <a:ea typeface="Times New Roman"/>
+                <a:cs typeface="Times New Roman"/>
               </a:rPr>
               <a:t>Develop</a:t>
             </a:r>
             <a:r>
-              <a:rPr sz="1350" b="0" i="0">
-                <a:solidFill>
-                  <a:srgbClr val="262626"/>
-                </a:solidFill>
+              <a:rPr sz="1490" b="0" i="0">
+                <a:solidFill>
+                  <a:srgbClr val="000000"/>
+                </a:solidFill>
+                <a:latin typeface="Times New Roman"/>
+                <a:ea typeface="Times New Roman"/>
+                <a:cs typeface="Times New Roman"/>
               </a:rPr>
               <a:t> a leakage-safe pipeline that turns a 12-hour observation window into a 24-hour forecast.</a:t>
             </a:r>
@@ -5175,26 +5376,35 @@
               <a:buNone/>
             </a:pPr>
             <a:r>
-              <a:rPr sz="1350" b="1">
-                <a:solidFill>
-                  <a:srgbClr val="4472C4"/>
-                </a:solidFill>
-              </a:rPr>
-              <a:t>▪  </a:t>
-            </a:r>
-            <a:r>
-              <a:rPr sz="1350" b="1" i="0">
-                <a:solidFill>
-                  <a:srgbClr val="262626"/>
-                </a:solidFill>
+              <a:rPr sz="1490" b="1">
+                <a:solidFill>
+                  <a:srgbClr val="000000"/>
+                </a:solidFill>
+                <a:latin typeface="Times New Roman"/>
+                <a:ea typeface="Times New Roman"/>
+                <a:cs typeface="Times New Roman"/>
+              </a:rPr>
+              <a:t>•  </a:t>
+            </a:r>
+            <a:r>
+              <a:rPr sz="1490" b="1" i="0">
+                <a:solidFill>
+                  <a:srgbClr val="000000"/>
+                </a:solidFill>
+                <a:latin typeface="Times New Roman"/>
+                <a:ea typeface="Times New Roman"/>
+                <a:cs typeface="Times New Roman"/>
               </a:rPr>
               <a:t>Apply and compare</a:t>
             </a:r>
             <a:r>
-              <a:rPr sz="1350" b="0" i="0">
-                <a:solidFill>
-                  <a:srgbClr val="262626"/>
-                </a:solidFill>
+              <a:rPr sz="1490" b="0" i="0">
+                <a:solidFill>
+                  <a:srgbClr val="000000"/>
+                </a:solidFill>
+                <a:latin typeface="Times New Roman"/>
+                <a:ea typeface="Times New Roman"/>
+                <a:cs typeface="Times New Roman"/>
               </a:rPr>
               <a:t> Logistic Regression and Random Forest across two feature iterations, selecting on validation data only.</a:t>
             </a:r>
@@ -5213,26 +5423,35 @@
               <a:buNone/>
             </a:pPr>
             <a:r>
-              <a:rPr sz="1350" b="1">
-                <a:solidFill>
-                  <a:srgbClr val="4472C4"/>
-                </a:solidFill>
-              </a:rPr>
-              <a:t>▪  </a:t>
-            </a:r>
-            <a:r>
-              <a:rPr sz="1350" b="1" i="0">
-                <a:solidFill>
-                  <a:srgbClr val="262626"/>
-                </a:solidFill>
+              <a:rPr sz="1490" b="1">
+                <a:solidFill>
+                  <a:srgbClr val="000000"/>
+                </a:solidFill>
+                <a:latin typeface="Times New Roman"/>
+                <a:ea typeface="Times New Roman"/>
+                <a:cs typeface="Times New Roman"/>
+              </a:rPr>
+              <a:t>•  </a:t>
+            </a:r>
+            <a:r>
+              <a:rPr sz="1490" b="1" i="0">
+                <a:solidFill>
+                  <a:srgbClr val="000000"/>
+                </a:solidFill>
+                <a:latin typeface="Times New Roman"/>
+                <a:ea typeface="Times New Roman"/>
+                <a:cs typeface="Times New Roman"/>
               </a:rPr>
               <a:t>Evaluate</a:t>
             </a:r>
             <a:r>
-              <a:rPr sz="1350" b="0" i="0">
-                <a:solidFill>
-                  <a:srgbClr val="262626"/>
-                </a:solidFill>
+              <a:rPr sz="1490" b="0" i="0">
+                <a:solidFill>
+                  <a:srgbClr val="000000"/>
+                </a:solidFill>
+                <a:latin typeface="Times New Roman"/>
+                <a:ea typeface="Times New Roman"/>
+                <a:cs typeface="Times New Roman"/>
               </a:rPr>
               <a:t> on a locked test partition, scored once, using imbalance-aware metrics (TSS, PR-AUC, HSS2) rather than accuracy.</a:t>
             </a:r>
@@ -5255,8 +5474,8 @@
         </p:nvSpPr>
         <p:spPr>
           <a:xfrm>
-            <a:off x="6232358" y="3246120"/>
-            <a:ext cx="5431322" cy="3108960"/>
+            <a:off x="6232358" y="3456432"/>
+            <a:ext cx="5431322" cy="2898648"/>
           </a:xfrm>
           <a:prstGeom prst="rect">
             <a:avLst/>
@@ -5284,11 +5503,11 @@
               <a:buChar char="•"/>
               <a:defRPr sz="2800" kern="1200">
                 <a:solidFill>
-                  <a:schemeClr val="tx1"/>
-                </a:solidFill>
-                <a:latin typeface="+mn-lt"/>
-                <a:ea typeface="+mn-ea"/>
-                <a:cs typeface="+mn-cs"/>
+                  <a:srgbClr val="000000"/>
+                </a:solidFill>
+                <a:latin typeface="Times New Roman"/>
+                <a:ea typeface="Times New Roman"/>
+                <a:cs typeface="Times New Roman"/>
               </a:defRPr>
             </a:lvl1pPr>
             <a:lvl2pPr marL="685800" indent="-228600" algn="l" defTabSz="914400" rtl="0" eaLnBrk="1" latinLnBrk="0" hangingPunct="1">
@@ -5302,11 +5521,11 @@
               <a:buChar char="•"/>
               <a:defRPr sz="2400" kern="1200">
                 <a:solidFill>
-                  <a:schemeClr val="tx1"/>
-                </a:solidFill>
-                <a:latin typeface="+mn-lt"/>
-                <a:ea typeface="+mn-ea"/>
-                <a:cs typeface="+mn-cs"/>
+                  <a:srgbClr val="000000"/>
+                </a:solidFill>
+                <a:latin typeface="Times New Roman"/>
+                <a:ea typeface="Times New Roman"/>
+                <a:cs typeface="Times New Roman"/>
               </a:defRPr>
             </a:lvl2pPr>
             <a:lvl3pPr marL="1143000" indent="-228600" algn="l" defTabSz="914400" rtl="0" eaLnBrk="1" latinLnBrk="0" hangingPunct="1">
@@ -5320,11 +5539,11 @@
               <a:buChar char="•"/>
               <a:defRPr sz="2000" kern="1200">
                 <a:solidFill>
-                  <a:schemeClr val="tx1"/>
-                </a:solidFill>
-                <a:latin typeface="+mn-lt"/>
-                <a:ea typeface="+mn-ea"/>
-                <a:cs typeface="+mn-cs"/>
+                  <a:srgbClr val="000000"/>
+                </a:solidFill>
+                <a:latin typeface="Times New Roman"/>
+                <a:ea typeface="Times New Roman"/>
+                <a:cs typeface="Times New Roman"/>
               </a:defRPr>
             </a:lvl3pPr>
             <a:lvl4pPr marL="1600200" indent="-228600" algn="l" defTabSz="914400" rtl="0" eaLnBrk="1" latinLnBrk="0" hangingPunct="1">
@@ -5338,11 +5557,11 @@
               <a:buChar char="•"/>
               <a:defRPr sz="1800" kern="1200">
                 <a:solidFill>
-                  <a:schemeClr val="tx1"/>
-                </a:solidFill>
-                <a:latin typeface="+mn-lt"/>
-                <a:ea typeface="+mn-ea"/>
-                <a:cs typeface="+mn-cs"/>
+                  <a:srgbClr val="000000"/>
+                </a:solidFill>
+                <a:latin typeface="Times New Roman"/>
+                <a:ea typeface="Times New Roman"/>
+                <a:cs typeface="Times New Roman"/>
               </a:defRPr>
             </a:lvl4pPr>
             <a:lvl5pPr marL="2057400" indent="-228600" algn="l" defTabSz="914400" rtl="0" eaLnBrk="1" latinLnBrk="0" hangingPunct="1">
@@ -5356,11 +5575,11 @@
               <a:buChar char="•"/>
               <a:defRPr sz="1800" kern="1200">
                 <a:solidFill>
-                  <a:schemeClr val="tx1"/>
-                </a:solidFill>
-                <a:latin typeface="+mn-lt"/>
-                <a:ea typeface="+mn-ea"/>
-                <a:cs typeface="+mn-cs"/>
+                  <a:srgbClr val="000000"/>
+                </a:solidFill>
+                <a:latin typeface="Times New Roman"/>
+                <a:ea typeface="Times New Roman"/>
+                <a:cs typeface="Times New Roman"/>
               </a:defRPr>
             </a:lvl5pPr>
             <a:lvl6pPr marL="2514600" indent="-228600" algn="l" defTabSz="914400" rtl="0" eaLnBrk="1" latinLnBrk="0" hangingPunct="1">
@@ -5374,11 +5593,11 @@
               <a:buChar char="•"/>
               <a:defRPr sz="1800" kern="1200">
                 <a:solidFill>
-                  <a:schemeClr val="tx1"/>
-                </a:solidFill>
-                <a:latin typeface="+mn-lt"/>
-                <a:ea typeface="+mn-ea"/>
-                <a:cs typeface="+mn-cs"/>
+                  <a:srgbClr val="000000"/>
+                </a:solidFill>
+                <a:latin typeface="Times New Roman"/>
+                <a:ea typeface="Times New Roman"/>
+                <a:cs typeface="Times New Roman"/>
               </a:defRPr>
             </a:lvl6pPr>
             <a:lvl7pPr marL="2971800" indent="-228600" algn="l" defTabSz="914400" rtl="0" eaLnBrk="1" latinLnBrk="0" hangingPunct="1">
@@ -5392,11 +5611,11 @@
               <a:buChar char="•"/>
               <a:defRPr sz="1800" kern="1200">
                 <a:solidFill>
-                  <a:schemeClr val="tx1"/>
-                </a:solidFill>
-                <a:latin typeface="+mn-lt"/>
-                <a:ea typeface="+mn-ea"/>
-                <a:cs typeface="+mn-cs"/>
+                  <a:srgbClr val="000000"/>
+                </a:solidFill>
+                <a:latin typeface="Times New Roman"/>
+                <a:ea typeface="Times New Roman"/>
+                <a:cs typeface="Times New Roman"/>
               </a:defRPr>
             </a:lvl7pPr>
             <a:lvl8pPr marL="3429000" indent="-228600" algn="l" defTabSz="914400" rtl="0" eaLnBrk="1" latinLnBrk="0" hangingPunct="1">
@@ -5410,11 +5629,11 @@
               <a:buChar char="•"/>
               <a:defRPr sz="1800" kern="1200">
                 <a:solidFill>
-                  <a:schemeClr val="tx1"/>
-                </a:solidFill>
-                <a:latin typeface="+mn-lt"/>
-                <a:ea typeface="+mn-ea"/>
-                <a:cs typeface="+mn-cs"/>
+                  <a:srgbClr val="000000"/>
+                </a:solidFill>
+                <a:latin typeface="Times New Roman"/>
+                <a:ea typeface="Times New Roman"/>
+                <a:cs typeface="Times New Roman"/>
               </a:defRPr>
             </a:lvl8pPr>
             <a:lvl9pPr marL="3886200" indent="-228600" algn="l" defTabSz="914400" rtl="0" eaLnBrk="1" latinLnBrk="0" hangingPunct="1">
@@ -5428,11 +5647,11 @@
               <a:buChar char="•"/>
               <a:defRPr sz="1800" kern="1200">
                 <a:solidFill>
-                  <a:schemeClr val="tx1"/>
-                </a:solidFill>
-                <a:latin typeface="+mn-lt"/>
-                <a:ea typeface="+mn-ea"/>
-                <a:cs typeface="+mn-cs"/>
+                  <a:srgbClr val="000000"/>
+                </a:solidFill>
+                <a:latin typeface="Times New Roman"/>
+                <a:ea typeface="Times New Roman"/>
+                <a:cs typeface="Times New Roman"/>
               </a:defRPr>
             </a:lvl9pPr>
           </a:lstStyle>
@@ -5450,10 +5669,13 @@
               <a:buNone/>
             </a:pPr>
             <a:r>
-              <a:rPr sz="1700" b="1" i="0">
-                <a:solidFill>
-                  <a:srgbClr val="1F3864"/>
-                </a:solidFill>
+              <a:rPr sz="1870" b="1" i="0">
+                <a:solidFill>
+                  <a:srgbClr val="000000"/>
+                </a:solidFill>
+                <a:latin typeface="Times New Roman"/>
+                <a:ea typeface="Times New Roman"/>
+                <a:cs typeface="Times New Roman"/>
               </a:rPr>
               <a:t>Expected Outcome</a:t>
             </a:r>
@@ -5472,26 +5694,35 @@
               <a:buNone/>
             </a:pPr>
             <a:r>
-              <a:rPr sz="1350" b="0" i="0">
-                <a:solidFill>
-                  <a:srgbClr val="262626"/>
-                </a:solidFill>
+              <a:rPr sz="1490" b="0" i="0">
+                <a:solidFill>
+                  <a:srgbClr val="000000"/>
+                </a:solidFill>
+                <a:latin typeface="Times New Roman"/>
+                <a:ea typeface="Times New Roman"/>
+                <a:cs typeface="Times New Roman"/>
               </a:rPr>
               <a:t>A machine-learning system capable of flagging, </a:t>
             </a:r>
             <a:r>
-              <a:rPr sz="1350" b="1" i="0">
-                <a:solidFill>
-                  <a:srgbClr val="262626"/>
-                </a:solidFill>
+              <a:rPr sz="1490" b="1" i="0">
+                <a:solidFill>
+                  <a:srgbClr val="000000"/>
+                </a:solidFill>
+                <a:latin typeface="Times New Roman"/>
+                <a:ea typeface="Times New Roman"/>
+                <a:cs typeface="Times New Roman"/>
               </a:rPr>
               <a:t>24 hours in advance</a:t>
             </a:r>
             <a:r>
-              <a:rPr sz="1350" b="0" i="0">
-                <a:solidFill>
-                  <a:srgbClr val="262626"/>
-                </a:solidFill>
+              <a:rPr sz="1490" b="0" i="0">
+                <a:solidFill>
+                  <a:srgbClr val="000000"/>
+                </a:solidFill>
+                <a:latin typeface="Times New Roman"/>
+                <a:ea typeface="Times New Roman"/>
+                <a:cs typeface="Times New Roman"/>
               </a:rPr>
               <a:t>, which solar active regions are likely to produce a major flare.</a:t>
             </a:r>
@@ -5510,10 +5741,13 @@
               <a:buNone/>
             </a:pPr>
             <a:r>
-              <a:rPr sz="1200" b="0" i="0">
-                <a:solidFill>
-                  <a:srgbClr val="262626"/>
-                </a:solidFill>
+              <a:rPr sz="1320" b="0" i="0">
+                <a:solidFill>
+                  <a:srgbClr val="000000"/>
+                </a:solidFill>
+                <a:latin typeface="Times New Roman"/>
+                <a:ea typeface="Times New Roman"/>
+                <a:cs typeface="Times New Roman"/>
               </a:rPr>
               <a:t>Delivered as:</a:t>
             </a:r>
@@ -5532,18 +5766,24 @@
               <a:buNone/>
             </a:pPr>
             <a:r>
-              <a:rPr sz="1350" b="1">
-                <a:solidFill>
-                  <a:srgbClr val="4472C4"/>
-                </a:solidFill>
-              </a:rPr>
-              <a:t>▪  </a:t>
-            </a:r>
-            <a:r>
-              <a:rPr sz="1350" b="0" i="0">
-                <a:solidFill>
-                  <a:srgbClr val="262626"/>
-                </a:solidFill>
+              <a:rPr sz="1490" b="1">
+                <a:solidFill>
+                  <a:srgbClr val="000000"/>
+                </a:solidFill>
+                <a:latin typeface="Times New Roman"/>
+                <a:ea typeface="Times New Roman"/>
+                <a:cs typeface="Times New Roman"/>
+              </a:rPr>
+              <a:t>•  </a:t>
+            </a:r>
+            <a:r>
+              <a:rPr sz="1490" b="0" i="0">
+                <a:solidFill>
+                  <a:srgbClr val="000000"/>
+                </a:solidFill>
+                <a:latin typeface="Times New Roman"/>
+                <a:ea typeface="Times New Roman"/>
+                <a:cs typeface="Times New Roman"/>
               </a:rPr>
               <a:t>a reproducible codebase that recomputes every published number with one command;</a:t>
             </a:r>
@@ -5562,18 +5802,24 @@
               <a:buNone/>
             </a:pPr>
             <a:r>
-              <a:rPr sz="1350" b="1">
-                <a:solidFill>
-                  <a:srgbClr val="4472C4"/>
-                </a:solidFill>
-              </a:rPr>
-              <a:t>▪  </a:t>
-            </a:r>
-            <a:r>
-              <a:rPr sz="1350" b="0" i="0">
-                <a:solidFill>
-                  <a:srgbClr val="262626"/>
-                </a:solidFill>
+              <a:rPr sz="1490" b="1">
+                <a:solidFill>
+                  <a:srgbClr val="000000"/>
+                </a:solidFill>
+                <a:latin typeface="Times New Roman"/>
+                <a:ea typeface="Times New Roman"/>
+                <a:cs typeface="Times New Roman"/>
+              </a:rPr>
+              <a:t>•  </a:t>
+            </a:r>
+            <a:r>
+              <a:rPr sz="1490" b="0" i="0">
+                <a:solidFill>
+                  <a:srgbClr val="000000"/>
+                </a:solidFill>
+                <a:latin typeface="Times New Roman"/>
+                <a:ea typeface="Times New Roman"/>
+                <a:cs typeface="Times New Roman"/>
               </a:rPr>
               <a:t>an interactive web dashboard showing the forecast, the risk level and the exact reason for each decision;</a:t>
             </a:r>
@@ -5592,18 +5838,24 @@
               <a:buNone/>
             </a:pPr>
             <a:r>
-              <a:rPr sz="1350" b="1">
-                <a:solidFill>
-                  <a:srgbClr val="4472C4"/>
-                </a:solidFill>
-              </a:rPr>
-              <a:t>▪  </a:t>
-            </a:r>
-            <a:r>
-              <a:rPr sz="1350" b="0" i="0">
-                <a:solidFill>
-                  <a:srgbClr val="262626"/>
-                </a:solidFill>
+              <a:rPr sz="1490" b="1">
+                <a:solidFill>
+                  <a:srgbClr val="000000"/>
+                </a:solidFill>
+                <a:latin typeface="Times New Roman"/>
+                <a:ea typeface="Times New Roman"/>
+                <a:cs typeface="Times New Roman"/>
+              </a:rPr>
+              <a:t>•  </a:t>
+            </a:r>
+            <a:r>
+              <a:rPr sz="1490" b="0" i="0">
+                <a:solidFill>
+                  <a:srgbClr val="000000"/>
+                </a:solidFill>
+                <a:latin typeface="Times New Roman"/>
+                <a:ea typeface="Times New Roman"/>
+                <a:cs typeface="Times New Roman"/>
               </a:rPr>
               <a:t>an honest account of the error rates, with the failures shown rather than hidden.</a:t>
             </a:r>
@@ -5680,8 +5932,12 @@
             <a:pPr algn="ctr"/>
             <a:r>
               <a:rPr lang="en-IN" sz="3200" b="1" dirty="0">
+                <a:solidFill>
+                  <a:srgbClr val="000000"/>
+                </a:solidFill>
                 <a:latin typeface="Times New Roman" panose="02020603050405020304" pitchFamily="18" charset="0"/>
-                <a:cs typeface="Times New Roman" panose="02020603050405020304" pitchFamily="18" charset="0"/>
+                <a:ea typeface="Times New Roman"/>
+                <a:cs typeface="Times New Roman"/>
               </a:rPr>
               <a:t>Input, Analysis &amp; Insights</a:t>
             </a:r>
@@ -5710,10 +5966,24 @@
           <a:lstStyle/>
           <a:p>
             <a:fld id="{B4EE2AE5-9218-4A07-842F-E84162EAAD55}" type="slidenum">
-              <a:rPr lang="en-IN" smtClean="0"/>
+              <a:rPr lang="en-IN" smtClean="0">
+                <a:solidFill>
+                  <a:srgbClr val="000000"/>
+                </a:solidFill>
+                <a:latin typeface="Times New Roman"/>
+                <a:ea typeface="Times New Roman"/>
+                <a:cs typeface="Times New Roman"/>
+              </a:rPr>
               <a:t>3</a:t>
             </a:fld>
-            <a:endParaRPr lang="en-IN" dirty="0"/>
+            <a:endParaRPr lang="en-IN" dirty="0">
+              <a:solidFill>
+                <a:srgbClr val="000000"/>
+              </a:solidFill>
+              <a:latin typeface="Times New Roman"/>
+              <a:ea typeface="Times New Roman"/>
+              <a:cs typeface="Times New Roman"/>
+            </a:endParaRPr>
           </a:p>
         </p:txBody>
       </p:sp>
@@ -5739,10 +6009,24 @@
           <a:lstStyle/>
           <a:p>
             <a:r>
-              <a:rPr lang="en-US"/>
+              <a:rPr lang="en-US">
+                <a:solidFill>
+                  <a:srgbClr val="000000"/>
+                </a:solidFill>
+                <a:latin typeface="Times New Roman"/>
+                <a:ea typeface="Times New Roman"/>
+                <a:cs typeface="Times New Roman"/>
+              </a:rPr>
               <a:t>Date: 07/10/2026</a:t>
             </a:r>
-            <a:endParaRPr lang="en-IN" dirty="0"/>
+            <a:endParaRPr lang="en-IN" dirty="0">
+              <a:solidFill>
+                <a:srgbClr val="000000"/>
+              </a:solidFill>
+              <a:latin typeface="Times New Roman"/>
+              <a:ea typeface="Times New Roman"/>
+              <a:cs typeface="Times New Roman"/>
+            </a:endParaRPr>
           </a:p>
         </p:txBody>
       </p:sp>
@@ -5804,10 +6088,24 @@
           <a:lstStyle/>
           <a:p>
             <a:r>
-              <a:rPr lang="en-US" dirty="0"/>
+              <a:rPr lang="en-US" dirty="0">
+                <a:solidFill>
+                  <a:srgbClr val="000000"/>
+                </a:solidFill>
+                <a:latin typeface="Times New Roman"/>
+                <a:ea typeface="Times New Roman"/>
+                <a:cs typeface="Times New Roman"/>
+              </a:rPr>
               <a:t>II–Year PBL Project Final Review</a:t>
             </a:r>
-            <a:endParaRPr lang="en-IN" dirty="0"/>
+            <a:endParaRPr lang="en-IN" dirty="0">
+              <a:solidFill>
+                <a:srgbClr val="000000"/>
+              </a:solidFill>
+              <a:latin typeface="Times New Roman"/>
+              <a:ea typeface="Times New Roman"/>
+              <a:cs typeface="Times New Roman"/>
+            </a:endParaRPr>
           </a:p>
         </p:txBody>
       </p:sp>
@@ -5828,7 +6126,7 @@
         <p:spPr>
           <a:xfrm>
             <a:off x="528320" y="995680"/>
-            <a:ext cx="5431322" cy="2377440"/>
+            <a:ext cx="5431322" cy="2670048"/>
           </a:xfrm>
           <a:prstGeom prst="rect">
             <a:avLst/>
@@ -5856,11 +6154,11 @@
               <a:buChar char="•"/>
               <a:defRPr sz="2800" kern="1200">
                 <a:solidFill>
-                  <a:schemeClr val="tx1"/>
-                </a:solidFill>
-                <a:latin typeface="+mn-lt"/>
-                <a:ea typeface="+mn-ea"/>
-                <a:cs typeface="+mn-cs"/>
+                  <a:srgbClr val="000000"/>
+                </a:solidFill>
+                <a:latin typeface="Times New Roman"/>
+                <a:ea typeface="Times New Roman"/>
+                <a:cs typeface="Times New Roman"/>
               </a:defRPr>
             </a:lvl1pPr>
             <a:lvl2pPr marL="685800" indent="-228600" algn="l" defTabSz="914400" rtl="0" eaLnBrk="1" latinLnBrk="0" hangingPunct="1">
@@ -5874,11 +6172,11 @@
               <a:buChar char="•"/>
               <a:defRPr sz="2400" kern="1200">
                 <a:solidFill>
-                  <a:schemeClr val="tx1"/>
-                </a:solidFill>
-                <a:latin typeface="+mn-lt"/>
-                <a:ea typeface="+mn-ea"/>
-                <a:cs typeface="+mn-cs"/>
+                  <a:srgbClr val="000000"/>
+                </a:solidFill>
+                <a:latin typeface="Times New Roman"/>
+                <a:ea typeface="Times New Roman"/>
+                <a:cs typeface="Times New Roman"/>
               </a:defRPr>
             </a:lvl2pPr>
             <a:lvl3pPr marL="1143000" indent="-228600" algn="l" defTabSz="914400" rtl="0" eaLnBrk="1" latinLnBrk="0" hangingPunct="1">
@@ -5892,11 +6190,11 @@
               <a:buChar char="•"/>
               <a:defRPr sz="2000" kern="1200">
                 <a:solidFill>
-                  <a:schemeClr val="tx1"/>
-                </a:solidFill>
-                <a:latin typeface="+mn-lt"/>
-                <a:ea typeface="+mn-ea"/>
-                <a:cs typeface="+mn-cs"/>
+                  <a:srgbClr val="000000"/>
+                </a:solidFill>
+                <a:latin typeface="Times New Roman"/>
+                <a:ea typeface="Times New Roman"/>
+                <a:cs typeface="Times New Roman"/>
               </a:defRPr>
             </a:lvl3pPr>
             <a:lvl4pPr marL="1600200" indent="-228600" algn="l" defTabSz="914400" rtl="0" eaLnBrk="1" latinLnBrk="0" hangingPunct="1">
@@ -5910,11 +6208,11 @@
               <a:buChar char="•"/>
               <a:defRPr sz="1800" kern="1200">
                 <a:solidFill>
-                  <a:schemeClr val="tx1"/>
-                </a:solidFill>
-                <a:latin typeface="+mn-lt"/>
-                <a:ea typeface="+mn-ea"/>
-                <a:cs typeface="+mn-cs"/>
+                  <a:srgbClr val="000000"/>
+                </a:solidFill>
+                <a:latin typeface="Times New Roman"/>
+                <a:ea typeface="Times New Roman"/>
+                <a:cs typeface="Times New Roman"/>
               </a:defRPr>
             </a:lvl4pPr>
             <a:lvl5pPr marL="2057400" indent="-228600" algn="l" defTabSz="914400" rtl="0" eaLnBrk="1" latinLnBrk="0" hangingPunct="1">
@@ -5928,11 +6226,11 @@
               <a:buChar char="•"/>
               <a:defRPr sz="1800" kern="1200">
                 <a:solidFill>
-                  <a:schemeClr val="tx1"/>
-                </a:solidFill>
-                <a:latin typeface="+mn-lt"/>
-                <a:ea typeface="+mn-ea"/>
-                <a:cs typeface="+mn-cs"/>
+                  <a:srgbClr val="000000"/>
+                </a:solidFill>
+                <a:latin typeface="Times New Roman"/>
+                <a:ea typeface="Times New Roman"/>
+                <a:cs typeface="Times New Roman"/>
               </a:defRPr>
             </a:lvl5pPr>
             <a:lvl6pPr marL="2514600" indent="-228600" algn="l" defTabSz="914400" rtl="0" eaLnBrk="1" latinLnBrk="0" hangingPunct="1">
@@ -5946,11 +6244,11 @@
               <a:buChar char="•"/>
               <a:defRPr sz="1800" kern="1200">
                 <a:solidFill>
-                  <a:schemeClr val="tx1"/>
-                </a:solidFill>
-                <a:latin typeface="+mn-lt"/>
-                <a:ea typeface="+mn-ea"/>
-                <a:cs typeface="+mn-cs"/>
+                  <a:srgbClr val="000000"/>
+                </a:solidFill>
+                <a:latin typeface="Times New Roman"/>
+                <a:ea typeface="Times New Roman"/>
+                <a:cs typeface="Times New Roman"/>
               </a:defRPr>
             </a:lvl6pPr>
             <a:lvl7pPr marL="2971800" indent="-228600" algn="l" defTabSz="914400" rtl="0" eaLnBrk="1" latinLnBrk="0" hangingPunct="1">
@@ -5964,11 +6262,11 @@
               <a:buChar char="•"/>
               <a:defRPr sz="1800" kern="1200">
                 <a:solidFill>
-                  <a:schemeClr val="tx1"/>
-                </a:solidFill>
-                <a:latin typeface="+mn-lt"/>
-                <a:ea typeface="+mn-ea"/>
-                <a:cs typeface="+mn-cs"/>
+                  <a:srgbClr val="000000"/>
+                </a:solidFill>
+                <a:latin typeface="Times New Roman"/>
+                <a:ea typeface="Times New Roman"/>
+                <a:cs typeface="Times New Roman"/>
               </a:defRPr>
             </a:lvl7pPr>
             <a:lvl8pPr marL="3429000" indent="-228600" algn="l" defTabSz="914400" rtl="0" eaLnBrk="1" latinLnBrk="0" hangingPunct="1">
@@ -5982,11 +6280,11 @@
               <a:buChar char="•"/>
               <a:defRPr sz="1800" kern="1200">
                 <a:solidFill>
-                  <a:schemeClr val="tx1"/>
-                </a:solidFill>
-                <a:latin typeface="+mn-lt"/>
-                <a:ea typeface="+mn-ea"/>
-                <a:cs typeface="+mn-cs"/>
+                  <a:srgbClr val="000000"/>
+                </a:solidFill>
+                <a:latin typeface="Times New Roman"/>
+                <a:ea typeface="Times New Roman"/>
+                <a:cs typeface="Times New Roman"/>
               </a:defRPr>
             </a:lvl8pPr>
             <a:lvl9pPr marL="3886200" indent="-228600" algn="l" defTabSz="914400" rtl="0" eaLnBrk="1" latinLnBrk="0" hangingPunct="1">
@@ -6000,11 +6298,11 @@
               <a:buChar char="•"/>
               <a:defRPr sz="1800" kern="1200">
                 <a:solidFill>
-                  <a:schemeClr val="tx1"/>
-                </a:solidFill>
-                <a:latin typeface="+mn-lt"/>
-                <a:ea typeface="+mn-ea"/>
-                <a:cs typeface="+mn-cs"/>
+                  <a:srgbClr val="000000"/>
+                </a:solidFill>
+                <a:latin typeface="Times New Roman"/>
+                <a:ea typeface="Times New Roman"/>
+                <a:cs typeface="Times New Roman"/>
               </a:defRPr>
             </a:lvl9pPr>
           </a:lstStyle>
@@ -6022,10 +6320,13 @@
               <a:buNone/>
             </a:pPr>
             <a:r>
-              <a:rPr sz="1700" b="1" i="0">
-                <a:solidFill>
-                  <a:srgbClr val="1F3864"/>
-                </a:solidFill>
+              <a:rPr sz="1870" b="1" i="0">
+                <a:solidFill>
+                  <a:srgbClr val="000000"/>
+                </a:solidFill>
+                <a:latin typeface="Times New Roman"/>
+                <a:ea typeface="Times New Roman"/>
+                <a:cs typeface="Times New Roman"/>
               </a:rPr>
               <a:t>Input / Data Sources</a:t>
             </a:r>
@@ -6044,26 +6345,35 @@
               <a:buNone/>
             </a:pPr>
             <a:r>
-              <a:rPr sz="1200" b="1">
-                <a:solidFill>
-                  <a:srgbClr val="4472C4"/>
-                </a:solidFill>
-              </a:rPr>
-              <a:t>▪  </a:t>
-            </a:r>
-            <a:r>
-              <a:rPr sz="1200" b="1" i="0">
-                <a:solidFill>
-                  <a:srgbClr val="262626"/>
-                </a:solidFill>
+              <a:rPr sz="1320" b="1">
+                <a:solidFill>
+                  <a:srgbClr val="000000"/>
+                </a:solidFill>
+                <a:latin typeface="Times New Roman"/>
+                <a:ea typeface="Times New Roman"/>
+                <a:cs typeface="Times New Roman"/>
+              </a:rPr>
+              <a:t>•  </a:t>
+            </a:r>
+            <a:r>
+              <a:rPr sz="1320" b="1" i="0">
+                <a:solidFill>
+                  <a:srgbClr val="000000"/>
+                </a:solidFill>
+                <a:latin typeface="Times New Roman"/>
+                <a:ea typeface="Times New Roman"/>
+                <a:cs typeface="Times New Roman"/>
               </a:rPr>
               <a:t>SWAN-SF v1.2</a:t>
             </a:r>
             <a:r>
-              <a:rPr sz="1200" b="0" i="0">
-                <a:solidFill>
-                  <a:srgbClr val="262626"/>
-                </a:solidFill>
+              <a:rPr sz="1320" b="0" i="0">
+                <a:solidFill>
+                  <a:srgbClr val="000000"/>
+                </a:solidFill>
+                <a:latin typeface="Times New Roman"/>
+                <a:ea typeface="Times New Roman"/>
+                <a:cs typeface="Times New Roman"/>
               </a:rPr>
               <a:t> benchmark, Harvard Dataverse (DOI 10.7910/DVN/EBCFKM).</a:t>
             </a:r>
@@ -6082,42 +6392,57 @@
               <a:buNone/>
             </a:pPr>
             <a:r>
-              <a:rPr sz="1200" b="1">
-                <a:solidFill>
-                  <a:srgbClr val="4472C4"/>
-                </a:solidFill>
-              </a:rPr>
-              <a:t>▪  </a:t>
-            </a:r>
-            <a:r>
-              <a:rPr sz="1200" b="1" i="0">
-                <a:solidFill>
-                  <a:srgbClr val="262626"/>
-                </a:solidFill>
+              <a:rPr sz="1320" b="1">
+                <a:solidFill>
+                  <a:srgbClr val="000000"/>
+                </a:solidFill>
+                <a:latin typeface="Times New Roman"/>
+                <a:ea typeface="Times New Roman"/>
+                <a:cs typeface="Times New Roman"/>
+              </a:rPr>
+              <a:t>•  </a:t>
+            </a:r>
+            <a:r>
+              <a:rPr sz="1320" b="1" i="0">
+                <a:solidFill>
+                  <a:srgbClr val="000000"/>
+                </a:solidFill>
+                <a:latin typeface="Times New Roman"/>
+                <a:ea typeface="Times New Roman"/>
+                <a:cs typeface="Times New Roman"/>
               </a:rPr>
               <a:t>331,185</a:t>
             </a:r>
             <a:r>
-              <a:rPr sz="1200" b="0" i="0">
-                <a:solidFill>
-                  <a:srgbClr val="262626"/>
-                </a:solidFill>
+              <a:rPr sz="1320" b="0" i="0">
+                <a:solidFill>
+                  <a:srgbClr val="000000"/>
+                </a:solidFill>
+                <a:latin typeface="Times New Roman"/>
+                <a:ea typeface="Times New Roman"/>
+                <a:cs typeface="Times New Roman"/>
               </a:rPr>
               <a:t> multivariate time-series windows spanning </a:t>
             </a:r>
             <a:r>
-              <a:rPr sz="1200" b="1" i="0">
-                <a:solidFill>
-                  <a:srgbClr val="262626"/>
-                </a:solidFill>
+              <a:rPr sz="1320" b="1" i="0">
+                <a:solidFill>
+                  <a:srgbClr val="000000"/>
+                </a:solidFill>
+                <a:latin typeface="Times New Roman"/>
+                <a:ea typeface="Times New Roman"/>
+                <a:cs typeface="Times New Roman"/>
               </a:rPr>
               <a:t>2010-05-01 to 2018-08-17</a:t>
             </a:r>
             <a:r>
-              <a:rPr sz="1200" b="0" i="0">
-                <a:solidFill>
-                  <a:srgbClr val="262626"/>
-                </a:solidFill>
+              <a:rPr sz="1320" b="0" i="0">
+                <a:solidFill>
+                  <a:srgbClr val="000000"/>
+                </a:solidFill>
+                <a:latin typeface="Times New Roman"/>
+                <a:ea typeface="Times New Roman"/>
+                <a:cs typeface="Times New Roman"/>
               </a:rPr>
               <a:t>.</a:t>
             </a:r>
@@ -6136,34 +6461,46 @@
               <a:buNone/>
             </a:pPr>
             <a:r>
-              <a:rPr sz="1200" b="1">
-                <a:solidFill>
-                  <a:srgbClr val="4472C4"/>
-                </a:solidFill>
-              </a:rPr>
-              <a:t>▪  </a:t>
-            </a:r>
-            <a:r>
-              <a:rPr sz="1200" b="0" i="0">
-                <a:solidFill>
-                  <a:srgbClr val="262626"/>
-                </a:solidFill>
+              <a:rPr sz="1320" b="1">
+                <a:solidFill>
+                  <a:srgbClr val="000000"/>
+                </a:solidFill>
+                <a:latin typeface="Times New Roman"/>
+                <a:ea typeface="Times New Roman"/>
+                <a:cs typeface="Times New Roman"/>
+              </a:rPr>
+              <a:t>•  </a:t>
+            </a:r>
+            <a:r>
+              <a:rPr sz="1320" b="0" i="0">
+                <a:solidFill>
+                  <a:srgbClr val="000000"/>
+                </a:solidFill>
+                <a:latin typeface="Times New Roman"/>
+                <a:ea typeface="Times New Roman"/>
+                <a:cs typeface="Times New Roman"/>
               </a:rPr>
               <a:t>Each window: </a:t>
             </a:r>
             <a:r>
-              <a:rPr sz="1200" b="1" i="0">
-                <a:solidFill>
-                  <a:srgbClr val="262626"/>
-                </a:solidFill>
+              <a:rPr sz="1320" b="1" i="0">
+                <a:solidFill>
+                  <a:srgbClr val="000000"/>
+                </a:solidFill>
+                <a:latin typeface="Times New Roman"/>
+                <a:ea typeface="Times New Roman"/>
+                <a:cs typeface="Times New Roman"/>
               </a:rPr>
               <a:t>12 h</a:t>
             </a:r>
             <a:r>
-              <a:rPr sz="1200" b="0" i="0">
-                <a:solidFill>
-                  <a:srgbClr val="262626"/>
-                </a:solidFill>
+              <a:rPr sz="1320" b="0" i="0">
+                <a:solidFill>
+                  <a:srgbClr val="000000"/>
+                </a:solidFill>
+                <a:latin typeface="Times New Roman"/>
+                <a:ea typeface="Times New Roman"/>
+                <a:cs typeface="Times New Roman"/>
               </a:rPr>
               <a:t> of SDO/HMI SHARP magnetic parameters at 12-minute cadence — 60 readings × 24 parameters.</a:t>
             </a:r>
@@ -6182,34 +6519,46 @@
               <a:buNone/>
             </a:pPr>
             <a:r>
-              <a:rPr sz="1200" b="1">
-                <a:solidFill>
-                  <a:srgbClr val="4472C4"/>
-                </a:solidFill>
-              </a:rPr>
-              <a:t>▪  </a:t>
-            </a:r>
-            <a:r>
-              <a:rPr sz="1200" b="0" i="0">
-                <a:solidFill>
-                  <a:srgbClr val="262626"/>
-                </a:solidFill>
+              <a:rPr sz="1320" b="1">
+                <a:solidFill>
+                  <a:srgbClr val="000000"/>
+                </a:solidFill>
+                <a:latin typeface="Times New Roman"/>
+                <a:ea typeface="Times New Roman"/>
+                <a:cs typeface="Times New Roman"/>
+              </a:rPr>
+              <a:t>•  </a:t>
+            </a:r>
+            <a:r>
+              <a:rPr sz="1320" b="0" i="0">
+                <a:solidFill>
+                  <a:srgbClr val="000000"/>
+                </a:solidFill>
+                <a:latin typeface="Times New Roman"/>
+                <a:ea typeface="Times New Roman"/>
+                <a:cs typeface="Times New Roman"/>
               </a:rPr>
               <a:t>Label y = 1 if a </a:t>
             </a:r>
             <a:r>
-              <a:rPr sz="1200" b="1" i="0">
-                <a:solidFill>
-                  <a:srgbClr val="262626"/>
-                </a:solidFill>
+              <a:rPr sz="1320" b="1" i="0">
+                <a:solidFill>
+                  <a:srgbClr val="000000"/>
+                </a:solidFill>
+                <a:latin typeface="Times New Roman"/>
+                <a:ea typeface="Times New Roman"/>
+                <a:cs typeface="Times New Roman"/>
               </a:rPr>
               <a:t>GOES M- or X-class</a:t>
             </a:r>
             <a:r>
-              <a:rPr sz="1200" b="0" i="0">
-                <a:solidFill>
-                  <a:srgbClr val="262626"/>
-                </a:solidFill>
+              <a:rPr sz="1320" b="0" i="0">
+                <a:solidFill>
+                  <a:srgbClr val="000000"/>
+                </a:solidFill>
+                <a:latin typeface="Times New Roman"/>
+                <a:ea typeface="Times New Roman"/>
+                <a:cs typeface="Times New Roman"/>
               </a:rPr>
               <a:t> flare begins within the next 24 h.</a:t>
             </a:r>
@@ -6228,66 +6577,90 @@
               <a:buNone/>
             </a:pPr>
             <a:r>
-              <a:rPr sz="1200" b="1">
-                <a:solidFill>
-                  <a:srgbClr val="4472C4"/>
-                </a:solidFill>
-              </a:rPr>
-              <a:t>▪  </a:t>
-            </a:r>
-            <a:r>
-              <a:rPr sz="1200" b="0" i="0">
-                <a:solidFill>
-                  <a:srgbClr val="262626"/>
-                </a:solidFill>
+              <a:rPr sz="1320" b="1">
+                <a:solidFill>
+                  <a:srgbClr val="000000"/>
+                </a:solidFill>
+                <a:latin typeface="Times New Roman"/>
+                <a:ea typeface="Times New Roman"/>
+                <a:cs typeface="Times New Roman"/>
+              </a:rPr>
+              <a:t>•  </a:t>
+            </a:r>
+            <a:r>
+              <a:rPr sz="1320" b="0" i="0">
+                <a:solidFill>
+                  <a:srgbClr val="000000"/>
+                </a:solidFill>
+                <a:latin typeface="Times New Roman"/>
+                <a:ea typeface="Times New Roman"/>
+                <a:cs typeface="Times New Roman"/>
               </a:rPr>
               <a:t>Five chronological partitions: </a:t>
             </a:r>
             <a:r>
-              <a:rPr sz="1200" b="1" i="0">
-                <a:solidFill>
-                  <a:srgbClr val="262626"/>
-                </a:solidFill>
+              <a:rPr sz="1320" b="1" i="0">
+                <a:solidFill>
+                  <a:srgbClr val="000000"/>
+                </a:solidFill>
+                <a:latin typeface="Times New Roman"/>
+                <a:ea typeface="Times New Roman"/>
+                <a:cs typeface="Times New Roman"/>
               </a:rPr>
               <a:t>P1–P3 train (204,559)</a:t>
             </a:r>
             <a:r>
-              <a:rPr sz="1200" b="0" i="0">
-                <a:solidFill>
-                  <a:srgbClr val="262626"/>
-                </a:solidFill>
+              <a:rPr sz="1320" b="0" i="0">
+                <a:solidFill>
+                  <a:srgbClr val="000000"/>
+                </a:solidFill>
+                <a:latin typeface="Times New Roman"/>
+                <a:ea typeface="Times New Roman"/>
+                <a:cs typeface="Times New Roman"/>
               </a:rPr>
               <a:t>, </a:t>
             </a:r>
             <a:r>
-              <a:rPr sz="1200" b="1" i="0">
-                <a:solidFill>
-                  <a:srgbClr val="262626"/>
-                </a:solidFill>
+              <a:rPr sz="1320" b="1" i="0">
+                <a:solidFill>
+                  <a:srgbClr val="000000"/>
+                </a:solidFill>
+                <a:latin typeface="Times New Roman"/>
+                <a:ea typeface="Times New Roman"/>
+                <a:cs typeface="Times New Roman"/>
               </a:rPr>
               <a:t>P4 validation (51,261)</a:t>
             </a:r>
             <a:r>
-              <a:rPr sz="1200" b="0" i="0">
-                <a:solidFill>
-                  <a:srgbClr val="262626"/>
-                </a:solidFill>
+              <a:rPr sz="1320" b="0" i="0">
+                <a:solidFill>
+                  <a:srgbClr val="000000"/>
+                </a:solidFill>
+                <a:latin typeface="Times New Roman"/>
+                <a:ea typeface="Times New Roman"/>
+                <a:cs typeface="Times New Roman"/>
               </a:rPr>
               <a:t>, </a:t>
             </a:r>
             <a:r>
-              <a:rPr sz="1200" b="1" i="0">
-                <a:solidFill>
-                  <a:srgbClr val="262626"/>
-                </a:solidFill>
+              <a:rPr sz="1320" b="1" i="0">
+                <a:solidFill>
+                  <a:srgbClr val="000000"/>
+                </a:solidFill>
+                <a:latin typeface="Times New Roman"/>
+                <a:ea typeface="Times New Roman"/>
+                <a:cs typeface="Times New Roman"/>
               </a:rPr>
               <a:t>P5 test (75,365)</a:t>
             </a:r>
             <a:r>
-              <a:rPr sz="1200" b="0" i="0">
-                <a:solidFill>
-                  <a:srgbClr val="262626"/>
-                </a:solidFill>
+              <a:rPr sz="1320" b="0" i="0">
+                <a:solidFill>
+                  <a:srgbClr val="000000"/>
+                </a:solidFill>
+                <a:latin typeface="Times New Roman"/>
+                <a:ea typeface="Times New Roman"/>
+                <a:cs typeface="Times New Roman"/>
               </a:rPr>
               <a:t>.</a:t>
             </a:r>
@@ -6339,11 +6712,11 @@
               <a:buChar char="•"/>
               <a:defRPr sz="2800" kern="1200">
                 <a:solidFill>
-                  <a:schemeClr val="tx1"/>
-                </a:solidFill>
-                <a:latin typeface="+mn-lt"/>
-                <a:ea typeface="+mn-ea"/>
-                <a:cs typeface="+mn-cs"/>
+                  <a:srgbClr val="000000"/>
+                </a:solidFill>
+                <a:latin typeface="Times New Roman"/>
+                <a:ea typeface="Times New Roman"/>
+                <a:cs typeface="Times New Roman"/>
               </a:defRPr>
             </a:lvl1pPr>
             <a:lvl2pPr marL="685800" indent="-228600" algn="l" defTabSz="914400" rtl="0" eaLnBrk="1" latinLnBrk="0" hangingPunct="1">
@@ -6357,11 +6730,11 @@
               <a:buChar char="•"/>
               <a:defRPr sz="2400" kern="1200">
                 <a:solidFill>
-                  <a:schemeClr val="tx1"/>
-                </a:solidFill>
-                <a:latin typeface="+mn-lt"/>
-                <a:ea typeface="+mn-ea"/>
-                <a:cs typeface="+mn-cs"/>
+                  <a:srgbClr val="000000"/>
+                </a:solidFill>
+                <a:latin typeface="Times New Roman"/>
+                <a:ea typeface="Times New Roman"/>
+                <a:cs typeface="Times New Roman"/>
               </a:defRPr>
             </a:lvl2pPr>
             <a:lvl3pPr marL="1143000" indent="-228600" algn="l" defTabSz="914400" rtl="0" eaLnBrk="1" latinLnBrk="0" hangingPunct="1">
@@ -6375,11 +6748,11 @@
               <a:buChar char="•"/>
               <a:defRPr sz="2000" kern="1200">
                 <a:solidFill>
-                  <a:schemeClr val="tx1"/>
-                </a:solidFill>
-                <a:latin typeface="+mn-lt"/>
-                <a:ea typeface="+mn-ea"/>
-                <a:cs typeface="+mn-cs"/>
+                  <a:srgbClr val="000000"/>
+                </a:solidFill>
+                <a:latin typeface="Times New Roman"/>
+                <a:ea typeface="Times New Roman"/>
+                <a:cs typeface="Times New Roman"/>
               </a:defRPr>
             </a:lvl3pPr>
             <a:lvl4pPr marL="1600200" indent="-228600" algn="l" defTabSz="914400" rtl="0" eaLnBrk="1" latinLnBrk="0" hangingPunct="1">
@@ -6393,11 +6766,11 @@
               <a:buChar char="•"/>
               <a:defRPr sz="1800" kern="1200">
                 <a:solidFill>
-                  <a:schemeClr val="tx1"/>
-                </a:solidFill>
-                <a:latin typeface="+mn-lt"/>
-                <a:ea typeface="+mn-ea"/>
-                <a:cs typeface="+mn-cs"/>
+                  <a:srgbClr val="000000"/>
+                </a:solidFill>
+                <a:latin typeface="Times New Roman"/>
+                <a:ea typeface="Times New Roman"/>
+                <a:cs typeface="Times New Roman"/>
               </a:defRPr>
             </a:lvl4pPr>
             <a:lvl5pPr marL="2057400" indent="-228600" algn="l" defTabSz="914400" rtl="0" eaLnBrk="1" latinLnBrk="0" hangingPunct="1">
@@ -6411,11 +6784,11 @@
               <a:buChar char="•"/>
               <a:defRPr sz="1800" kern="1200">
                 <a:solidFill>
-                  <a:schemeClr val="tx1"/>
-                </a:solidFill>
-                <a:latin typeface="+mn-lt"/>
-                <a:ea typeface="+mn-ea"/>
-                <a:cs typeface="+mn-cs"/>
+                  <a:srgbClr val="000000"/>
+                </a:solidFill>
+                <a:latin typeface="Times New Roman"/>
+                <a:ea typeface="Times New Roman"/>
+                <a:cs typeface="Times New Roman"/>
               </a:defRPr>
             </a:lvl5pPr>
             <a:lvl6pPr marL="2514600" indent="-228600" algn="l" defTabSz="914400" rtl="0" eaLnBrk="1" latinLnBrk="0" hangingPunct="1">
@@ -6429,11 +6802,11 @@
               <a:buChar char="•"/>
               <a:defRPr sz="1800" kern="1200">
                 <a:solidFill>
-                  <a:schemeClr val="tx1"/>
-                </a:solidFill>
-                <a:latin typeface="+mn-lt"/>
-                <a:ea typeface="+mn-ea"/>
-                <a:cs typeface="+mn-cs"/>
+                  <a:srgbClr val="000000"/>
+                </a:solidFill>
+                <a:latin typeface="Times New Roman"/>
+                <a:ea typeface="Times New Roman"/>
+                <a:cs typeface="Times New Roman"/>
               </a:defRPr>
             </a:lvl6pPr>
             <a:lvl7pPr marL="2971800" indent="-228600" algn="l" defTabSz="914400" rtl="0" eaLnBrk="1" latinLnBrk="0" hangingPunct="1">
@@ -6447,11 +6820,11 @@
               <a:buChar char="•"/>
               <a:defRPr sz="1800" kern="1200">
                 <a:solidFill>
-                  <a:schemeClr val="tx1"/>
-                </a:solidFill>
-                <a:latin typeface="+mn-lt"/>
-                <a:ea typeface="+mn-ea"/>
-                <a:cs typeface="+mn-cs"/>
+                  <a:srgbClr val="000000"/>
+                </a:solidFill>
+                <a:latin typeface="Times New Roman"/>
+                <a:ea typeface="Times New Roman"/>
+                <a:cs typeface="Times New Roman"/>
               </a:defRPr>
             </a:lvl7pPr>
             <a:lvl8pPr marL="3429000" indent="-228600" algn="l" defTabSz="914400" rtl="0" eaLnBrk="1" latinLnBrk="0" hangingPunct="1">
@@ -6465,11 +6838,11 @@
               <a:buChar char="•"/>
               <a:defRPr sz="1800" kern="1200">
                 <a:solidFill>
-                  <a:schemeClr val="tx1"/>
-                </a:solidFill>
-                <a:latin typeface="+mn-lt"/>
-                <a:ea typeface="+mn-ea"/>
-                <a:cs typeface="+mn-cs"/>
+                  <a:srgbClr val="000000"/>
+                </a:solidFill>
+                <a:latin typeface="Times New Roman"/>
+                <a:ea typeface="Times New Roman"/>
+                <a:cs typeface="Times New Roman"/>
               </a:defRPr>
             </a:lvl8pPr>
             <a:lvl9pPr marL="3886200" indent="-228600" algn="l" defTabSz="914400" rtl="0" eaLnBrk="1" latinLnBrk="0" hangingPunct="1">
@@ -6483,11 +6856,11 @@
               <a:buChar char="•"/>
               <a:defRPr sz="1800" kern="1200">
                 <a:solidFill>
-                  <a:schemeClr val="tx1"/>
-                </a:solidFill>
-                <a:latin typeface="+mn-lt"/>
-                <a:ea typeface="+mn-ea"/>
-                <a:cs typeface="+mn-cs"/>
+                  <a:srgbClr val="000000"/>
+                </a:solidFill>
+                <a:latin typeface="Times New Roman"/>
+                <a:ea typeface="Times New Roman"/>
+                <a:cs typeface="Times New Roman"/>
               </a:defRPr>
             </a:lvl9pPr>
           </a:lstStyle>
@@ -6505,10 +6878,13 @@
               <a:buNone/>
             </a:pPr>
             <a:r>
-              <a:rPr sz="1700" b="1" i="0">
-                <a:solidFill>
-                  <a:srgbClr val="1F3864"/>
-                </a:solidFill>
+              <a:rPr sz="1870" b="1" i="0">
+                <a:solidFill>
+                  <a:srgbClr val="000000"/>
+                </a:solidFill>
+                <a:latin typeface="Times New Roman"/>
+                <a:ea typeface="Times New Roman"/>
+                <a:cs typeface="Times New Roman"/>
               </a:rPr>
               <a:t>Analysis / Processing</a:t>
             </a:r>
@@ -6527,34 +6903,46 @@
               <a:buNone/>
             </a:pPr>
             <a:r>
-              <a:rPr sz="1150" b="1">
-                <a:solidFill>
-                  <a:srgbClr val="4472C4"/>
-                </a:solidFill>
-              </a:rPr>
-              <a:t>▪  </a:t>
-            </a:r>
-            <a:r>
-              <a:rPr sz="1150" b="0" i="0">
-                <a:solidFill>
-                  <a:srgbClr val="262626"/>
-                </a:solidFill>
+              <a:rPr sz="1270" b="1">
+                <a:solidFill>
+                  <a:srgbClr val="000000"/>
+                </a:solidFill>
+                <a:latin typeface="Times New Roman"/>
+                <a:ea typeface="Times New Roman"/>
+                <a:cs typeface="Times New Roman"/>
+              </a:rPr>
+              <a:t>•  </a:t>
+            </a:r>
+            <a:r>
+              <a:rPr sz="1270" b="0" i="0">
+                <a:solidFill>
+                  <a:srgbClr val="000000"/>
+                </a:solidFill>
+                <a:latin typeface="Times New Roman"/>
+                <a:ea typeface="Times New Roman"/>
+                <a:cs typeface="Times New Roman"/>
               </a:rPr>
               <a:t>24 parameters × 6 statistics = </a:t>
             </a:r>
             <a:r>
-              <a:rPr sz="1150" b="1" i="0">
-                <a:solidFill>
-                  <a:srgbClr val="262626"/>
-                </a:solidFill>
+              <a:rPr sz="1270" b="1" i="0">
+                <a:solidFill>
+                  <a:srgbClr val="000000"/>
+                </a:solidFill>
+                <a:latin typeface="Times New Roman"/>
+                <a:ea typeface="Times New Roman"/>
+                <a:cs typeface="Times New Roman"/>
               </a:rPr>
               <a:t>144 features</a:t>
             </a:r>
             <a:r>
-              <a:rPr sz="1150" b="0" i="0">
-                <a:solidFill>
-                  <a:srgbClr val="262626"/>
-                </a:solidFill>
+              <a:rPr sz="1270" b="0" i="0">
+                <a:solidFill>
+                  <a:srgbClr val="000000"/>
+                </a:solidFill>
+                <a:latin typeface="Times New Roman"/>
+                <a:ea typeface="Times New Roman"/>
+                <a:cs typeface="Times New Roman"/>
               </a:rPr>
               <a:t> per window (mean, sd, min, max, slope, last value).</a:t>
             </a:r>
@@ -6573,26 +6961,35 @@
               <a:buNone/>
             </a:pPr>
             <a:r>
-              <a:rPr sz="1150" b="1">
-                <a:solidFill>
-                  <a:srgbClr val="4472C4"/>
-                </a:solidFill>
-              </a:rPr>
-              <a:t>▪  </a:t>
-            </a:r>
-            <a:r>
-              <a:rPr sz="1150" b="0" i="0">
-                <a:solidFill>
-                  <a:srgbClr val="262626"/>
-                </a:solidFill>
+              <a:rPr sz="1270" b="1">
+                <a:solidFill>
+                  <a:srgbClr val="000000"/>
+                </a:solidFill>
+                <a:latin typeface="Times New Roman"/>
+                <a:ea typeface="Times New Roman"/>
+                <a:cs typeface="Times New Roman"/>
+              </a:rPr>
+              <a:t>•  </a:t>
+            </a:r>
+            <a:r>
+              <a:rPr sz="1270" b="0" i="0">
+                <a:solidFill>
+                  <a:srgbClr val="000000"/>
+                </a:solidFill>
+                <a:latin typeface="Times New Roman"/>
+                <a:ea typeface="Times New Roman"/>
+                <a:cs typeface="Times New Roman"/>
               </a:rPr>
               <a:t>Signed-log transform → median imputation → standardisation — all </a:t>
             </a:r>
             <a:r>
-              <a:rPr sz="1150" b="1" i="0">
-                <a:solidFill>
-                  <a:srgbClr val="262626"/>
-                </a:solidFill>
+              <a:rPr sz="1270" b="1" i="0">
+                <a:solidFill>
+                  <a:srgbClr val="000000"/>
+                </a:solidFill>
+                <a:latin typeface="Times New Roman"/>
+                <a:ea typeface="Times New Roman"/>
+                <a:cs typeface="Times New Roman"/>
               </a:rPr>
               <a:t>fitted on training data only.</a:t>
             </a:r>
@@ -6611,34 +7008,46 @@
               <a:buNone/>
             </a:pPr>
             <a:r>
-              <a:rPr sz="1150" b="1">
-                <a:solidFill>
-                  <a:srgbClr val="4472C4"/>
-                </a:solidFill>
-              </a:rPr>
-              <a:t>▪  </a:t>
-            </a:r>
-            <a:r>
-              <a:rPr sz="1150" b="0" i="0">
-                <a:solidFill>
-                  <a:srgbClr val="262626"/>
-                </a:solidFill>
+              <a:rPr sz="1270" b="1">
+                <a:solidFill>
+                  <a:srgbClr val="000000"/>
+                </a:solidFill>
+                <a:latin typeface="Times New Roman"/>
+                <a:ea typeface="Times New Roman"/>
+                <a:cs typeface="Times New Roman"/>
+              </a:rPr>
+              <a:t>•  </a:t>
+            </a:r>
+            <a:r>
+              <a:rPr sz="1270" b="0" i="0">
+                <a:solidFill>
+                  <a:srgbClr val="000000"/>
+                </a:solidFill>
+                <a:latin typeface="Times New Roman"/>
+                <a:ea typeface="Times New Roman"/>
+                <a:cs typeface="Times New Roman"/>
               </a:rPr>
               <a:t>Partitions are </a:t>
             </a:r>
             <a:r>
-              <a:rPr sz="1150" b="1" i="0">
-                <a:solidFill>
-                  <a:srgbClr val="262626"/>
-                </a:solidFill>
+              <a:rPr sz="1270" b="1" i="0">
+                <a:solidFill>
+                  <a:srgbClr val="000000"/>
+                </a:solidFill>
+                <a:latin typeface="Times New Roman"/>
+                <a:ea typeface="Times New Roman"/>
+                <a:cs typeface="Times New Roman"/>
               </a:rPr>
               <a:t>region-disjoint and time-ordered</a:t>
             </a:r>
             <a:r>
-              <a:rPr sz="1150" b="0" i="0">
-                <a:solidFill>
-                  <a:srgbClr val="262626"/>
-                </a:solidFill>
+              <a:rPr sz="1270" b="0" i="0">
+                <a:solidFill>
+                  <a:srgbClr val="000000"/>
+                </a:solidFill>
+                <a:latin typeface="Times New Roman"/>
+                <a:ea typeface="Times New Roman"/>
+                <a:cs typeface="Times New Roman"/>
               </a:rPr>
               <a:t>: no window and no active region appears in two splits.</a:t>
             </a:r>
@@ -6657,34 +7066,46 @@
               <a:buNone/>
             </a:pPr>
             <a:r>
-              <a:rPr sz="1150" b="1">
-                <a:solidFill>
-                  <a:srgbClr val="4472C4"/>
-                </a:solidFill>
-              </a:rPr>
-              <a:t>▪  </a:t>
-            </a:r>
-            <a:r>
-              <a:rPr sz="1150" b="0" i="0">
-                <a:solidFill>
-                  <a:srgbClr val="262626"/>
-                </a:solidFill>
+              <a:rPr sz="1270" b="1">
+                <a:solidFill>
+                  <a:srgbClr val="000000"/>
+                </a:solidFill>
+                <a:latin typeface="Times New Roman"/>
+                <a:ea typeface="Times New Roman"/>
+                <a:cs typeface="Times New Roman"/>
+              </a:rPr>
+              <a:t>•  </a:t>
+            </a:r>
+            <a:r>
+              <a:rPr sz="1270" b="0" i="0">
+                <a:solidFill>
+                  <a:srgbClr val="000000"/>
+                </a:solidFill>
+                <a:latin typeface="Times New Roman"/>
+                <a:ea typeface="Times New Roman"/>
+                <a:cs typeface="Times New Roman"/>
               </a:rPr>
               <a:t>Class imbalance (1.99 % positive in training) handled with class_weight="balanced" — a </a:t>
             </a:r>
             <a:r>
-              <a:rPr sz="1150" b="1" i="0">
-                <a:solidFill>
-                  <a:srgbClr val="262626"/>
-                </a:solidFill>
+              <a:rPr sz="1270" b="1" i="0">
+                <a:solidFill>
+                  <a:srgbClr val="000000"/>
+                </a:solidFill>
+                <a:latin typeface="Times New Roman"/>
+                <a:ea typeface="Times New Roman"/>
+                <a:cs typeface="Times New Roman"/>
               </a:rPr>
               <a:t>49:1</a:t>
             </a:r>
             <a:r>
-              <a:rPr sz="1150" b="0" i="0">
-                <a:solidFill>
-                  <a:srgbClr val="262626"/>
-                </a:solidFill>
+              <a:rPr sz="1270" b="0" i="0">
+                <a:solidFill>
+                  <a:srgbClr val="000000"/>
+                </a:solidFill>
+                <a:latin typeface="Times New Roman"/>
+                <a:ea typeface="Times New Roman"/>
+                <a:cs typeface="Times New Roman"/>
               </a:rPr>
               <a:t> weighting.</a:t>
             </a:r>
@@ -6703,26 +7124,35 @@
               <a:buNone/>
             </a:pPr>
             <a:r>
-              <a:rPr sz="1150" b="1">
-                <a:solidFill>
-                  <a:srgbClr val="4472C4"/>
-                </a:solidFill>
-              </a:rPr>
-              <a:t>▪  </a:t>
-            </a:r>
-            <a:r>
-              <a:rPr sz="1150" b="0" i="0">
-                <a:solidFill>
-                  <a:srgbClr val="262626"/>
-                </a:solidFill>
+              <a:rPr sz="1270" b="1">
+                <a:solidFill>
+                  <a:srgbClr val="000000"/>
+                </a:solidFill>
+                <a:latin typeface="Times New Roman"/>
+                <a:ea typeface="Times New Roman"/>
+                <a:cs typeface="Times New Roman"/>
+              </a:rPr>
+              <a:t>•  </a:t>
+            </a:r>
+            <a:r>
+              <a:rPr sz="1270" b="0" i="0">
+                <a:solidFill>
+                  <a:srgbClr val="000000"/>
+                </a:solidFill>
+                <a:latin typeface="Times New Roman"/>
+                <a:ea typeface="Times New Roman"/>
+                <a:cs typeface="Times New Roman"/>
               </a:rPr>
               <a:t>Thresholds fixed on validation; the test partition was </a:t>
             </a:r>
             <a:r>
-              <a:rPr sz="1150" b="1" i="0">
-                <a:solidFill>
-                  <a:srgbClr val="262626"/>
-                </a:solidFill>
+              <a:rPr sz="1270" b="1" i="0">
+                <a:solidFill>
+                  <a:srgbClr val="000000"/>
+                </a:solidFill>
+                <a:latin typeface="Times New Roman"/>
+                <a:ea typeface="Times New Roman"/>
+                <a:cs typeface="Times New Roman"/>
               </a:rPr>
               <a:t>scored once.</a:t>
             </a:r>
@@ -6745,8 +7175,8 @@
         </p:nvSpPr>
         <p:spPr>
           <a:xfrm>
-            <a:off x="528320" y="3474720"/>
-            <a:ext cx="5431322" cy="2880360"/>
+            <a:off x="528320" y="3730752"/>
+            <a:ext cx="5431322" cy="2624328"/>
           </a:xfrm>
           <a:prstGeom prst="rect">
             <a:avLst/>
@@ -6774,11 +7204,11 @@
               <a:buChar char="•"/>
               <a:defRPr sz="2800" kern="1200">
                 <a:solidFill>
-                  <a:schemeClr val="tx1"/>
-                </a:solidFill>
-                <a:latin typeface="+mn-lt"/>
-                <a:ea typeface="+mn-ea"/>
-                <a:cs typeface="+mn-cs"/>
+                  <a:srgbClr val="000000"/>
+                </a:solidFill>
+                <a:latin typeface="Times New Roman"/>
+                <a:ea typeface="Times New Roman"/>
+                <a:cs typeface="Times New Roman"/>
               </a:defRPr>
             </a:lvl1pPr>
             <a:lvl2pPr marL="685800" indent="-228600" algn="l" defTabSz="914400" rtl="0" eaLnBrk="1" latinLnBrk="0" hangingPunct="1">
@@ -6792,11 +7222,11 @@
               <a:buChar char="•"/>
               <a:defRPr sz="2400" kern="1200">
                 <a:solidFill>
-                  <a:schemeClr val="tx1"/>
-                </a:solidFill>
-                <a:latin typeface="+mn-lt"/>
-                <a:ea typeface="+mn-ea"/>
-                <a:cs typeface="+mn-cs"/>
+                  <a:srgbClr val="000000"/>
+                </a:solidFill>
+                <a:latin typeface="Times New Roman"/>
+                <a:ea typeface="Times New Roman"/>
+                <a:cs typeface="Times New Roman"/>
               </a:defRPr>
             </a:lvl2pPr>
             <a:lvl3pPr marL="1143000" indent="-228600" algn="l" defTabSz="914400" rtl="0" eaLnBrk="1" latinLnBrk="0" hangingPunct="1">
@@ -6810,11 +7240,11 @@
               <a:buChar char="•"/>
               <a:defRPr sz="2000" kern="1200">
                 <a:solidFill>
-                  <a:schemeClr val="tx1"/>
-                </a:solidFill>
-                <a:latin typeface="+mn-lt"/>
-                <a:ea typeface="+mn-ea"/>
-                <a:cs typeface="+mn-cs"/>
+                  <a:srgbClr val="000000"/>
+                </a:solidFill>
+                <a:latin typeface="Times New Roman"/>
+                <a:ea typeface="Times New Roman"/>
+                <a:cs typeface="Times New Roman"/>
               </a:defRPr>
             </a:lvl3pPr>
             <a:lvl4pPr marL="1600200" indent="-228600" algn="l" defTabSz="914400" rtl="0" eaLnBrk="1" latinLnBrk="0" hangingPunct="1">
@@ -6828,11 +7258,11 @@
               <a:buChar char="•"/>
               <a:defRPr sz="1800" kern="1200">
                 <a:solidFill>
-                  <a:schemeClr val="tx1"/>
-                </a:solidFill>
-                <a:latin typeface="+mn-lt"/>
-                <a:ea typeface="+mn-ea"/>
-                <a:cs typeface="+mn-cs"/>
+                  <a:srgbClr val="000000"/>
+                </a:solidFill>
+                <a:latin typeface="Times New Roman"/>
+                <a:ea typeface="Times New Roman"/>
+                <a:cs typeface="Times New Roman"/>
               </a:defRPr>
             </a:lvl4pPr>
             <a:lvl5pPr marL="2057400" indent="-228600" algn="l" defTabSz="914400" rtl="0" eaLnBrk="1" latinLnBrk="0" hangingPunct="1">
@@ -6846,11 +7276,11 @@
               <a:buChar char="•"/>
               <a:defRPr sz="1800" kern="1200">
                 <a:solidFill>
-                  <a:schemeClr val="tx1"/>
-                </a:solidFill>
-                <a:latin typeface="+mn-lt"/>
-                <a:ea typeface="+mn-ea"/>
-                <a:cs typeface="+mn-cs"/>
+                  <a:srgbClr val="000000"/>
+                </a:solidFill>
+                <a:latin typeface="Times New Roman"/>
+                <a:ea typeface="Times New Roman"/>
+                <a:cs typeface="Times New Roman"/>
               </a:defRPr>
             </a:lvl5pPr>
             <a:lvl6pPr marL="2514600" indent="-228600" algn="l" defTabSz="914400" rtl="0" eaLnBrk="1" latinLnBrk="0" hangingPunct="1">
@@ -6864,11 +7294,11 @@
               <a:buChar char="•"/>
               <a:defRPr sz="1800" kern="1200">
                 <a:solidFill>
-                  <a:schemeClr val="tx1"/>
-                </a:solidFill>
-                <a:latin typeface="+mn-lt"/>
-                <a:ea typeface="+mn-ea"/>
-                <a:cs typeface="+mn-cs"/>
+                  <a:srgbClr val="000000"/>
+                </a:solidFill>
+                <a:latin typeface="Times New Roman"/>
+                <a:ea typeface="Times New Roman"/>
+                <a:cs typeface="Times New Roman"/>
               </a:defRPr>
             </a:lvl6pPr>
             <a:lvl7pPr marL="2971800" indent="-228600" algn="l" defTabSz="914400" rtl="0" eaLnBrk="1" latinLnBrk="0" hangingPunct="1">
@@ -6882,11 +7312,11 @@
               <a:buChar char="•"/>
               <a:defRPr sz="1800" kern="1200">
                 <a:solidFill>
-                  <a:schemeClr val="tx1"/>
-                </a:solidFill>
-                <a:latin typeface="+mn-lt"/>
-                <a:ea typeface="+mn-ea"/>
-                <a:cs typeface="+mn-cs"/>
+                  <a:srgbClr val="000000"/>
+                </a:solidFill>
+                <a:latin typeface="Times New Roman"/>
+                <a:ea typeface="Times New Roman"/>
+                <a:cs typeface="Times New Roman"/>
               </a:defRPr>
             </a:lvl7pPr>
             <a:lvl8pPr marL="3429000" indent="-228600" algn="l" defTabSz="914400" rtl="0" eaLnBrk="1" latinLnBrk="0" hangingPunct="1">
@@ -6900,11 +7330,11 @@
               <a:buChar char="•"/>
               <a:defRPr sz="1800" kern="1200">
                 <a:solidFill>
-                  <a:schemeClr val="tx1"/>
-                </a:solidFill>
-                <a:latin typeface="+mn-lt"/>
-                <a:ea typeface="+mn-ea"/>
-                <a:cs typeface="+mn-cs"/>
+                  <a:srgbClr val="000000"/>
+                </a:solidFill>
+                <a:latin typeface="Times New Roman"/>
+                <a:ea typeface="Times New Roman"/>
+                <a:cs typeface="Times New Roman"/>
               </a:defRPr>
             </a:lvl8pPr>
             <a:lvl9pPr marL="3886200" indent="-228600" algn="l" defTabSz="914400" rtl="0" eaLnBrk="1" latinLnBrk="0" hangingPunct="1">
@@ -6918,11 +7348,11 @@
               <a:buChar char="•"/>
               <a:defRPr sz="1800" kern="1200">
                 <a:solidFill>
-                  <a:schemeClr val="tx1"/>
-                </a:solidFill>
-                <a:latin typeface="+mn-lt"/>
-                <a:ea typeface="+mn-ea"/>
-                <a:cs typeface="+mn-cs"/>
+                  <a:srgbClr val="000000"/>
+                </a:solidFill>
+                <a:latin typeface="Times New Roman"/>
+                <a:ea typeface="Times New Roman"/>
+                <a:cs typeface="Times New Roman"/>
               </a:defRPr>
             </a:lvl9pPr>
           </a:lstStyle>
@@ -6940,10 +7370,13 @@
               <a:buNone/>
             </a:pPr>
             <a:r>
-              <a:rPr sz="1700" b="1" i="0">
-                <a:solidFill>
-                  <a:srgbClr val="1F3864"/>
-                </a:solidFill>
+              <a:rPr sz="1870" b="1" i="0">
+                <a:solidFill>
+                  <a:srgbClr val="000000"/>
+                </a:solidFill>
+                <a:latin typeface="Times New Roman"/>
+                <a:ea typeface="Times New Roman"/>
+                <a:cs typeface="Times New Roman"/>
               </a:rPr>
               <a:t>Key Insights</a:t>
             </a:r>
@@ -6962,26 +7395,35 @@
               <a:buNone/>
             </a:pPr>
             <a:r>
-              <a:rPr sz="1200" b="1">
-                <a:solidFill>
-                  <a:srgbClr val="4472C4"/>
-                </a:solidFill>
-              </a:rPr>
-              <a:t>▪  </a:t>
-            </a:r>
-            <a:r>
-              <a:rPr sz="1200" b="1" i="0">
-                <a:solidFill>
-                  <a:srgbClr val="262626"/>
-                </a:solidFill>
+              <a:rPr sz="1320" b="1">
+                <a:solidFill>
+                  <a:srgbClr val="000000"/>
+                </a:solidFill>
+                <a:latin typeface="Times New Roman"/>
+                <a:ea typeface="Times New Roman"/>
+                <a:cs typeface="Times New Roman"/>
+              </a:rPr>
+              <a:t>•  </a:t>
+            </a:r>
+            <a:r>
+              <a:rPr sz="1320" b="1" i="0">
+                <a:solidFill>
+                  <a:srgbClr val="000000"/>
+                </a:solidFill>
+                <a:latin typeface="Times New Roman"/>
+                <a:ea typeface="Times New Roman"/>
+                <a:cs typeface="Times New Roman"/>
               </a:rPr>
               <a:t>Trend beats snapshot.</a:t>
             </a:r>
             <a:r>
-              <a:rPr sz="1200" b="0" i="0">
-                <a:solidFill>
-                  <a:srgbClr val="262626"/>
-                </a:solidFill>
+              <a:rPr sz="1320" b="0" i="0">
+                <a:solidFill>
+                  <a:srgbClr val="000000"/>
+                </a:solidFill>
+                <a:latin typeface="Times New Roman"/>
+                <a:ea typeface="Times New Roman"/>
+                <a:cs typeface="Times New Roman"/>
               </a:rPr>
               <a:t> Adding slope and last-value features lifted validation TSS over point-in-time features alone.</a:t>
             </a:r>
@@ -7000,26 +7442,35 @@
               <a:buNone/>
             </a:pPr>
             <a:r>
-              <a:rPr sz="1200" b="1">
-                <a:solidFill>
-                  <a:srgbClr val="4472C4"/>
-                </a:solidFill>
-              </a:rPr>
-              <a:t>▪  </a:t>
-            </a:r>
-            <a:r>
-              <a:rPr sz="1200" b="1" i="0">
-                <a:solidFill>
-                  <a:srgbClr val="262626"/>
-                </a:solidFill>
+              <a:rPr sz="1320" b="1">
+                <a:solidFill>
+                  <a:srgbClr val="000000"/>
+                </a:solidFill>
+                <a:latin typeface="Times New Roman"/>
+                <a:ea typeface="Times New Roman"/>
+                <a:cs typeface="Times New Roman"/>
+              </a:rPr>
+              <a:t>•  </a:t>
+            </a:r>
+            <a:r>
+              <a:rPr sz="1320" b="1" i="0">
+                <a:solidFill>
+                  <a:srgbClr val="000000"/>
+                </a:solidFill>
+                <a:latin typeface="Times New Roman"/>
+                <a:ea typeface="Times New Roman"/>
+                <a:cs typeface="Times New Roman"/>
               </a:rPr>
               <a:t>Accuracy is meaningless here.</a:t>
             </a:r>
             <a:r>
-              <a:rPr sz="1200" b="0" i="0">
-                <a:solidFill>
-                  <a:srgbClr val="262626"/>
-                </a:solidFill>
+              <a:rPr sz="1320" b="0" i="0">
+                <a:solidFill>
+                  <a:srgbClr val="000000"/>
+                </a:solidFill>
+                <a:latin typeface="Times New Roman"/>
+                <a:ea typeface="Times New Roman"/>
+                <a:cs typeface="Times New Roman"/>
               </a:rPr>
               <a:t> Only 1.31 % of test windows precede a major flare, so never alerting already scores 98.69 %.</a:t>
             </a:r>
@@ -7038,50 +7489,68 @@
               <a:buNone/>
             </a:pPr>
             <a:r>
-              <a:rPr sz="1200" b="1">
-                <a:solidFill>
-                  <a:srgbClr val="4472C4"/>
-                </a:solidFill>
-              </a:rPr>
-              <a:t>▪  </a:t>
-            </a:r>
-            <a:r>
-              <a:rPr sz="1200" b="0" i="0">
-                <a:solidFill>
-                  <a:srgbClr val="262626"/>
-                </a:solidFill>
+              <a:rPr sz="1320" b="1">
+                <a:solidFill>
+                  <a:srgbClr val="000000"/>
+                </a:solidFill>
+                <a:latin typeface="Times New Roman"/>
+                <a:ea typeface="Times New Roman"/>
+                <a:cs typeface="Times New Roman"/>
+              </a:rPr>
+              <a:t>•  </a:t>
+            </a:r>
+            <a:r>
+              <a:rPr sz="1320" b="0" i="0">
+                <a:solidFill>
+                  <a:srgbClr val="000000"/>
+                </a:solidFill>
+                <a:latin typeface="Times New Roman"/>
+                <a:ea typeface="Times New Roman"/>
+                <a:cs typeface="Times New Roman"/>
               </a:rPr>
               <a:t>A constant-climatology baseline scores </a:t>
             </a:r>
             <a:r>
-              <a:rPr sz="1200" b="1" i="0">
-                <a:solidFill>
-                  <a:srgbClr val="262626"/>
-                </a:solidFill>
+              <a:rPr sz="1320" b="1" i="0">
+                <a:solidFill>
+                  <a:srgbClr val="000000"/>
+                </a:solidFill>
+                <a:latin typeface="Times New Roman"/>
+                <a:ea typeface="Times New Roman"/>
+                <a:cs typeface="Times New Roman"/>
               </a:rPr>
               <a:t>TSS 0.000</a:t>
             </a:r>
             <a:r>
-              <a:rPr sz="1200" b="0" i="0">
-                <a:solidFill>
-                  <a:srgbClr val="262626"/>
-                </a:solidFill>
+              <a:rPr sz="1320" b="0" i="0">
+                <a:solidFill>
+                  <a:srgbClr val="000000"/>
+                </a:solidFill>
+                <a:latin typeface="Times New Roman"/>
+                <a:ea typeface="Times New Roman"/>
+                <a:cs typeface="Times New Roman"/>
               </a:rPr>
               <a:t> and detects nothing; this model scores </a:t>
             </a:r>
             <a:r>
-              <a:rPr sz="1200" b="1" i="0">
-                <a:solidFill>
-                  <a:srgbClr val="262626"/>
-                </a:solidFill>
+              <a:rPr sz="1320" b="1" i="0">
+                <a:solidFill>
+                  <a:srgbClr val="000000"/>
+                </a:solidFill>
+                <a:latin typeface="Times New Roman"/>
+                <a:ea typeface="Times New Roman"/>
+                <a:cs typeface="Times New Roman"/>
               </a:rPr>
               <a:t>TSS 0.853</a:t>
             </a:r>
             <a:r>
-              <a:rPr sz="1200" b="0" i="0">
-                <a:solidFill>
-                  <a:srgbClr val="262626"/>
-                </a:solidFill>
+              <a:rPr sz="1320" b="0" i="0">
+                <a:solidFill>
+                  <a:srgbClr val="000000"/>
+                </a:solidFill>
+                <a:latin typeface="Times New Roman"/>
+                <a:ea typeface="Times New Roman"/>
+                <a:cs typeface="Times New Roman"/>
               </a:rPr>
               <a:t>.</a:t>
             </a:r>
@@ -7100,42 +7569,57 @@
               <a:buNone/>
             </a:pPr>
             <a:r>
-              <a:rPr sz="1200" b="1">
-                <a:solidFill>
-                  <a:srgbClr val="4472C4"/>
-                </a:solidFill>
-              </a:rPr>
-              <a:t>▪  </a:t>
-            </a:r>
-            <a:r>
-              <a:rPr sz="1200" b="1" i="0">
-                <a:solidFill>
-                  <a:srgbClr val="262626"/>
-                </a:solidFill>
+              <a:rPr sz="1320" b="1">
+                <a:solidFill>
+                  <a:srgbClr val="000000"/>
+                </a:solidFill>
+                <a:latin typeface="Times New Roman"/>
+                <a:ea typeface="Times New Roman"/>
+                <a:cs typeface="Times New Roman"/>
+              </a:rPr>
+              <a:t>•  </a:t>
+            </a:r>
+            <a:r>
+              <a:rPr sz="1320" b="1" i="0">
+                <a:solidFill>
+                  <a:srgbClr val="000000"/>
+                </a:solidFill>
+                <a:latin typeface="Times New Roman"/>
+                <a:ea typeface="Times New Roman"/>
+                <a:cs typeface="Times New Roman"/>
               </a:rPr>
               <a:t>Total unsigned current helicity</a:t>
             </a:r>
             <a:r>
-              <a:rPr sz="1200" b="0" i="0">
-                <a:solidFill>
-                  <a:srgbClr val="262626"/>
-                </a:solidFill>
+              <a:rPr sz="1320" b="0" i="0">
+                <a:solidFill>
+                  <a:srgbClr val="000000"/>
+                </a:solidFill>
+                <a:latin typeface="Times New Roman"/>
+                <a:ea typeface="Times New Roman"/>
+                <a:cs typeface="Times New Roman"/>
               </a:rPr>
               <a:t> and </a:t>
             </a:r>
             <a:r>
-              <a:rPr sz="1200" b="1" i="0">
-                <a:solidFill>
-                  <a:srgbClr val="262626"/>
-                </a:solidFill>
+              <a:rPr sz="1320" b="1" i="0">
+                <a:solidFill>
+                  <a:srgbClr val="000000"/>
+                </a:solidFill>
+                <a:latin typeface="Times New Roman"/>
+                <a:ea typeface="Times New Roman"/>
+                <a:cs typeface="Times New Roman"/>
               </a:rPr>
               <a:t>free magnetic energy</a:t>
             </a:r>
             <a:r>
-              <a:rPr sz="1200" b="0" i="0">
-                <a:solidFill>
-                  <a:srgbClr val="262626"/>
-                </a:solidFill>
+              <a:rPr sz="1320" b="0" i="0">
+                <a:solidFill>
+                  <a:srgbClr val="000000"/>
+                </a:solidFill>
+                <a:latin typeface="Times New Roman"/>
+                <a:ea typeface="Times New Roman"/>
+                <a:cs typeface="Times New Roman"/>
               </a:rPr>
               <a:t> dominate the fitted coefficients — consistent with the physics of flare onset.</a:t>
             </a:r>
@@ -7192,10 +7676,13 @@
               <a:buNone/>
             </a:pPr>
             <a:r>
-              <a:rPr sz="900" b="0" i="1">
-                <a:solidFill>
-                  <a:srgbClr val="595959"/>
-                </a:solidFill>
+              <a:rPr sz="990" b="0" i="1">
+                <a:solidFill>
+                  <a:srgbClr val="000000"/>
+                </a:solidFill>
+                <a:latin typeface="Times New Roman"/>
+                <a:ea typeface="Times New Roman"/>
+                <a:cs typeface="Times New Roman"/>
               </a:rPr>
               <a:t>Seven candidates were compared; the final model wins on F1 and PR-AUC while holding TSS.</a:t>
             </a:r>
@@ -7272,15 +7759,23 @@
             <a:pPr algn="ctr"/>
             <a:r>
               <a:rPr lang="en-IN" sz="3200" dirty="0">
+                <a:solidFill>
+                  <a:srgbClr val="000000"/>
+                </a:solidFill>
                 <a:latin typeface="Times New Roman" panose="02020603050405020304" pitchFamily="18" charset="0"/>
-                <a:cs typeface="Times New Roman" panose="02020603050405020304" pitchFamily="18" charset="0"/>
+                <a:ea typeface="Times New Roman"/>
+                <a:cs typeface="Times New Roman"/>
               </a:rPr>
               <a:t> </a:t>
             </a:r>
             <a:r>
               <a:rPr lang="en-IN" sz="3200" b="1" dirty="0">
+                <a:solidFill>
+                  <a:srgbClr val="000000"/>
+                </a:solidFill>
                 <a:latin typeface="Times New Roman" panose="02020603050405020304" pitchFamily="18" charset="0"/>
-                <a:cs typeface="Times New Roman" panose="02020603050405020304" pitchFamily="18" charset="0"/>
+                <a:ea typeface="Times New Roman"/>
+                <a:cs typeface="Times New Roman"/>
               </a:rPr>
               <a:t>Technical Approach</a:t>
             </a:r>
@@ -7309,10 +7804,24 @@
           <a:lstStyle/>
           <a:p>
             <a:fld id="{B4EE2AE5-9218-4A07-842F-E84162EAAD55}" type="slidenum">
-              <a:rPr lang="en-IN" smtClean="0"/>
+              <a:rPr lang="en-IN" smtClean="0">
+                <a:solidFill>
+                  <a:srgbClr val="000000"/>
+                </a:solidFill>
+                <a:latin typeface="Times New Roman"/>
+                <a:ea typeface="Times New Roman"/>
+                <a:cs typeface="Times New Roman"/>
+              </a:rPr>
               <a:t>4</a:t>
             </a:fld>
-            <a:endParaRPr lang="en-IN" dirty="0"/>
+            <a:endParaRPr lang="en-IN" dirty="0">
+              <a:solidFill>
+                <a:srgbClr val="000000"/>
+              </a:solidFill>
+              <a:latin typeface="Times New Roman"/>
+              <a:ea typeface="Times New Roman"/>
+              <a:cs typeface="Times New Roman"/>
+            </a:endParaRPr>
           </a:p>
         </p:txBody>
       </p:sp>
@@ -7338,10 +7847,24 @@
           <a:lstStyle/>
           <a:p>
             <a:r>
-              <a:rPr lang="en-US"/>
+              <a:rPr lang="en-US">
+                <a:solidFill>
+                  <a:srgbClr val="000000"/>
+                </a:solidFill>
+                <a:latin typeface="Times New Roman"/>
+                <a:ea typeface="Times New Roman"/>
+                <a:cs typeface="Times New Roman"/>
+              </a:rPr>
               <a:t>Date: 07/10/2026</a:t>
             </a:r>
-            <a:endParaRPr lang="en-IN" dirty="0"/>
+            <a:endParaRPr lang="en-IN" dirty="0">
+              <a:solidFill>
+                <a:srgbClr val="000000"/>
+              </a:solidFill>
+              <a:latin typeface="Times New Roman"/>
+              <a:ea typeface="Times New Roman"/>
+              <a:cs typeface="Times New Roman"/>
+            </a:endParaRPr>
           </a:p>
         </p:txBody>
       </p:sp>
@@ -7403,10 +7926,24 @@
           <a:lstStyle/>
           <a:p>
             <a:r>
-              <a:rPr lang="en-US" dirty="0"/>
+              <a:rPr lang="en-US" dirty="0">
+                <a:solidFill>
+                  <a:srgbClr val="000000"/>
+                </a:solidFill>
+                <a:latin typeface="Times New Roman"/>
+                <a:ea typeface="Times New Roman"/>
+                <a:cs typeface="Times New Roman"/>
+              </a:rPr>
               <a:t>II–Year PBL Project Final Review</a:t>
             </a:r>
-            <a:endParaRPr lang="en-IN" dirty="0"/>
+            <a:endParaRPr lang="en-IN" dirty="0">
+              <a:solidFill>
+                <a:srgbClr val="000000"/>
+              </a:solidFill>
+              <a:latin typeface="Times New Roman"/>
+              <a:ea typeface="Times New Roman"/>
+              <a:cs typeface="Times New Roman"/>
+            </a:endParaRPr>
           </a:p>
         </p:txBody>
       </p:sp>
@@ -7455,11 +7992,11 @@
               <a:buChar char="•"/>
               <a:defRPr sz="2800" kern="1200">
                 <a:solidFill>
-                  <a:schemeClr val="tx1"/>
-                </a:solidFill>
-                <a:latin typeface="+mn-lt"/>
-                <a:ea typeface="+mn-ea"/>
-                <a:cs typeface="+mn-cs"/>
+                  <a:srgbClr val="000000"/>
+                </a:solidFill>
+                <a:latin typeface="Times New Roman"/>
+                <a:ea typeface="Times New Roman"/>
+                <a:cs typeface="Times New Roman"/>
               </a:defRPr>
             </a:lvl1pPr>
             <a:lvl2pPr marL="685800" indent="-228600" algn="l" defTabSz="914400" rtl="0" eaLnBrk="1" latinLnBrk="0" hangingPunct="1">
@@ -7473,11 +8010,11 @@
               <a:buChar char="•"/>
               <a:defRPr sz="2400" kern="1200">
                 <a:solidFill>
-                  <a:schemeClr val="tx1"/>
-                </a:solidFill>
-                <a:latin typeface="+mn-lt"/>
-                <a:ea typeface="+mn-ea"/>
-                <a:cs typeface="+mn-cs"/>
+                  <a:srgbClr val="000000"/>
+                </a:solidFill>
+                <a:latin typeface="Times New Roman"/>
+                <a:ea typeface="Times New Roman"/>
+                <a:cs typeface="Times New Roman"/>
               </a:defRPr>
             </a:lvl2pPr>
             <a:lvl3pPr marL="1143000" indent="-228600" algn="l" defTabSz="914400" rtl="0" eaLnBrk="1" latinLnBrk="0" hangingPunct="1">
@@ -7491,11 +8028,11 @@
               <a:buChar char="•"/>
               <a:defRPr sz="2000" kern="1200">
                 <a:solidFill>
-                  <a:schemeClr val="tx1"/>
-                </a:solidFill>
-                <a:latin typeface="+mn-lt"/>
-                <a:ea typeface="+mn-ea"/>
-                <a:cs typeface="+mn-cs"/>
+                  <a:srgbClr val="000000"/>
+                </a:solidFill>
+                <a:latin typeface="Times New Roman"/>
+                <a:ea typeface="Times New Roman"/>
+                <a:cs typeface="Times New Roman"/>
               </a:defRPr>
             </a:lvl3pPr>
             <a:lvl4pPr marL="1600200" indent="-228600" algn="l" defTabSz="914400" rtl="0" eaLnBrk="1" latinLnBrk="0" hangingPunct="1">
@@ -7509,11 +8046,11 @@
               <a:buChar char="•"/>
               <a:defRPr sz="1800" kern="1200">
                 <a:solidFill>
-                  <a:schemeClr val="tx1"/>
-                </a:solidFill>
-                <a:latin typeface="+mn-lt"/>
-                <a:ea typeface="+mn-ea"/>
-                <a:cs typeface="+mn-cs"/>
+                  <a:srgbClr val="000000"/>
+                </a:solidFill>
+                <a:latin typeface="Times New Roman"/>
+                <a:ea typeface="Times New Roman"/>
+                <a:cs typeface="Times New Roman"/>
               </a:defRPr>
             </a:lvl4pPr>
             <a:lvl5pPr marL="2057400" indent="-228600" algn="l" defTabSz="914400" rtl="0" eaLnBrk="1" latinLnBrk="0" hangingPunct="1">
@@ -7527,11 +8064,11 @@
               <a:buChar char="•"/>
               <a:defRPr sz="1800" kern="1200">
                 <a:solidFill>
-                  <a:schemeClr val="tx1"/>
-                </a:solidFill>
-                <a:latin typeface="+mn-lt"/>
-                <a:ea typeface="+mn-ea"/>
-                <a:cs typeface="+mn-cs"/>
+                  <a:srgbClr val="000000"/>
+                </a:solidFill>
+                <a:latin typeface="Times New Roman"/>
+                <a:ea typeface="Times New Roman"/>
+                <a:cs typeface="Times New Roman"/>
               </a:defRPr>
             </a:lvl5pPr>
             <a:lvl6pPr marL="2514600" indent="-228600" algn="l" defTabSz="914400" rtl="0" eaLnBrk="1" latinLnBrk="0" hangingPunct="1">
@@ -7545,11 +8082,11 @@
               <a:buChar char="•"/>
               <a:defRPr sz="1800" kern="1200">
                 <a:solidFill>
-                  <a:schemeClr val="tx1"/>
-                </a:solidFill>
-                <a:latin typeface="+mn-lt"/>
-                <a:ea typeface="+mn-ea"/>
-                <a:cs typeface="+mn-cs"/>
+                  <a:srgbClr val="000000"/>
+                </a:solidFill>
+                <a:latin typeface="Times New Roman"/>
+                <a:ea typeface="Times New Roman"/>
+                <a:cs typeface="Times New Roman"/>
               </a:defRPr>
             </a:lvl6pPr>
             <a:lvl7pPr marL="2971800" indent="-228600" algn="l" defTabSz="914400" rtl="0" eaLnBrk="1" latinLnBrk="0" hangingPunct="1">
@@ -7563,11 +8100,11 @@
               <a:buChar char="•"/>
               <a:defRPr sz="1800" kern="1200">
                 <a:solidFill>
-                  <a:schemeClr val="tx1"/>
-                </a:solidFill>
-                <a:latin typeface="+mn-lt"/>
-                <a:ea typeface="+mn-ea"/>
-                <a:cs typeface="+mn-cs"/>
+                  <a:srgbClr val="000000"/>
+                </a:solidFill>
+                <a:latin typeface="Times New Roman"/>
+                <a:ea typeface="Times New Roman"/>
+                <a:cs typeface="Times New Roman"/>
               </a:defRPr>
             </a:lvl7pPr>
             <a:lvl8pPr marL="3429000" indent="-228600" algn="l" defTabSz="914400" rtl="0" eaLnBrk="1" latinLnBrk="0" hangingPunct="1">
@@ -7581,11 +8118,11 @@
               <a:buChar char="•"/>
               <a:defRPr sz="1800" kern="1200">
                 <a:solidFill>
-                  <a:schemeClr val="tx1"/>
-                </a:solidFill>
-                <a:latin typeface="+mn-lt"/>
-                <a:ea typeface="+mn-ea"/>
-                <a:cs typeface="+mn-cs"/>
+                  <a:srgbClr val="000000"/>
+                </a:solidFill>
+                <a:latin typeface="Times New Roman"/>
+                <a:ea typeface="Times New Roman"/>
+                <a:cs typeface="Times New Roman"/>
               </a:defRPr>
             </a:lvl8pPr>
             <a:lvl9pPr marL="3886200" indent="-228600" algn="l" defTabSz="914400" rtl="0" eaLnBrk="1" latinLnBrk="0" hangingPunct="1">
@@ -7599,11 +8136,11 @@
               <a:buChar char="•"/>
               <a:defRPr sz="1800" kern="1200">
                 <a:solidFill>
-                  <a:schemeClr val="tx1"/>
-                </a:solidFill>
-                <a:latin typeface="+mn-lt"/>
-                <a:ea typeface="+mn-ea"/>
-                <a:cs typeface="+mn-cs"/>
+                  <a:srgbClr val="000000"/>
+                </a:solidFill>
+                <a:latin typeface="Times New Roman"/>
+                <a:ea typeface="Times New Roman"/>
+                <a:cs typeface="Times New Roman"/>
               </a:defRPr>
             </a:lvl9pPr>
           </a:lstStyle>
@@ -7621,10 +8158,13 @@
               <a:buNone/>
             </a:pPr>
             <a:r>
-              <a:rPr sz="1700" b="1" i="0">
-                <a:solidFill>
-                  <a:srgbClr val="1F3864"/>
-                </a:solidFill>
+              <a:rPr sz="1870" b="1" i="0">
+                <a:solidFill>
+                  <a:srgbClr val="000000"/>
+                </a:solidFill>
+                <a:latin typeface="Times New Roman"/>
+                <a:ea typeface="Times New Roman"/>
+                <a:cs typeface="Times New Roman"/>
               </a:rPr>
               <a:t>Architecture</a:t>
             </a:r>
@@ -7643,10 +8183,13 @@
               <a:buNone/>
             </a:pPr>
             <a:r>
-              <a:rPr sz="1200" b="0" i="0">
-                <a:solidFill>
-                  <a:srgbClr val="262626"/>
-                </a:solidFill>
+              <a:rPr sz="1320" b="0" i="0">
+                <a:solidFill>
+                  <a:srgbClr val="000000"/>
+                </a:solidFill>
+                <a:latin typeface="Times New Roman"/>
+                <a:ea typeface="Times New Roman"/>
+                <a:cs typeface="Times New Roman"/>
               </a:rPr>
               <a:t>Five stages, end to end:</a:t>
             </a:r>
@@ -7665,26 +8208,35 @@
               <a:buNone/>
             </a:pPr>
             <a:r>
-              <a:rPr sz="1150" b="1">
-                <a:solidFill>
-                  <a:srgbClr val="4472C4"/>
-                </a:solidFill>
+              <a:rPr sz="1270" b="1">
+                <a:solidFill>
+                  <a:srgbClr val="000000"/>
+                </a:solidFill>
+                <a:latin typeface="Times New Roman"/>
+                <a:ea typeface="Times New Roman"/>
+                <a:cs typeface="Times New Roman"/>
               </a:rPr>
               <a:t>1.  </a:t>
             </a:r>
             <a:r>
-              <a:rPr sz="1150" b="1" i="0">
-                <a:solidFill>
-                  <a:srgbClr val="262626"/>
-                </a:solidFill>
+              <a:rPr sz="1270" b="1" i="0">
+                <a:solidFill>
+                  <a:srgbClr val="000000"/>
+                </a:solidFill>
+                <a:latin typeface="Times New Roman"/>
+                <a:ea typeface="Times New Roman"/>
+                <a:cs typeface="Times New Roman"/>
               </a:rPr>
               <a:t>Ingest &amp; validate</a:t>
             </a:r>
             <a:r>
-              <a:rPr sz="1150" b="0" i="0">
-                <a:solidFill>
-                  <a:srgbClr val="262626"/>
-                </a:solidFill>
+              <a:rPr sz="1270" b="0" i="0">
+                <a:solidFill>
+                  <a:srgbClr val="000000"/>
+                </a:solidFill>
+                <a:latin typeface="Times New Roman"/>
+                <a:ea typeface="Times New Roman"/>
+                <a:cs typeface="Times New Roman"/>
               </a:rPr>
               <a:t> — SWAN-SF archives, timestamp and QUALITY-flag checks.</a:t>
             </a:r>
@@ -7703,26 +8255,35 @@
               <a:buNone/>
             </a:pPr>
             <a:r>
-              <a:rPr sz="1150" b="1">
-                <a:solidFill>
-                  <a:srgbClr val="4472C4"/>
-                </a:solidFill>
+              <a:rPr sz="1270" b="1">
+                <a:solidFill>
+                  <a:srgbClr val="000000"/>
+                </a:solidFill>
+                <a:latin typeface="Times New Roman"/>
+                <a:ea typeface="Times New Roman"/>
+                <a:cs typeface="Times New Roman"/>
               </a:rPr>
               <a:t>2.  </a:t>
             </a:r>
             <a:r>
-              <a:rPr sz="1150" b="1" i="0">
-                <a:solidFill>
-                  <a:srgbClr val="262626"/>
-                </a:solidFill>
+              <a:rPr sz="1270" b="1" i="0">
+                <a:solidFill>
+                  <a:srgbClr val="000000"/>
+                </a:solidFill>
+                <a:latin typeface="Times New Roman"/>
+                <a:ea typeface="Times New Roman"/>
+                <a:cs typeface="Times New Roman"/>
               </a:rPr>
               <a:t>Window &amp; label</a:t>
             </a:r>
             <a:r>
-              <a:rPr sz="1150" b="0" i="0">
-                <a:solidFill>
-                  <a:srgbClr val="262626"/>
-                </a:solidFill>
+              <a:rPr sz="1270" b="0" i="0">
+                <a:solidFill>
+                  <a:srgbClr val="000000"/>
+                </a:solidFill>
+                <a:latin typeface="Times New Roman"/>
+                <a:ea typeface="Times New Roman"/>
+                <a:cs typeface="Times New Roman"/>
               </a:rPr>
               <a:t> — 12 h observation → 24 h prediction horizon, past data only.</a:t>
             </a:r>
@@ -7741,26 +8302,35 @@
               <a:buNone/>
             </a:pPr>
             <a:r>
-              <a:rPr sz="1150" b="1">
-                <a:solidFill>
-                  <a:srgbClr val="4472C4"/>
-                </a:solidFill>
+              <a:rPr sz="1270" b="1">
+                <a:solidFill>
+                  <a:srgbClr val="000000"/>
+                </a:solidFill>
+                <a:latin typeface="Times New Roman"/>
+                <a:ea typeface="Times New Roman"/>
+                <a:cs typeface="Times New Roman"/>
               </a:rPr>
               <a:t>3.  </a:t>
             </a:r>
             <a:r>
-              <a:rPr sz="1150" b="1" i="0">
-                <a:solidFill>
-                  <a:srgbClr val="262626"/>
-                </a:solidFill>
+              <a:rPr sz="1270" b="1" i="0">
+                <a:solidFill>
+                  <a:srgbClr val="000000"/>
+                </a:solidFill>
+                <a:latin typeface="Times New Roman"/>
+                <a:ea typeface="Times New Roman"/>
+                <a:cs typeface="Times New Roman"/>
               </a:rPr>
               <a:t>Feature construction</a:t>
             </a:r>
             <a:r>
-              <a:rPr sz="1150" b="0" i="0">
-                <a:solidFill>
-                  <a:srgbClr val="262626"/>
-                </a:solidFill>
+              <a:rPr sz="1270" b="0" i="0">
+                <a:solidFill>
+                  <a:srgbClr val="000000"/>
+                </a:solidFill>
+                <a:latin typeface="Times New Roman"/>
+                <a:ea typeface="Times New Roman"/>
+                <a:cs typeface="Times New Roman"/>
               </a:rPr>
               <a:t> — 144 leakage-safe summary statistics.</a:t>
             </a:r>
@@ -7779,26 +8349,35 @@
               <a:buNone/>
             </a:pPr>
             <a:r>
-              <a:rPr sz="1150" b="1">
-                <a:solidFill>
-                  <a:srgbClr val="4472C4"/>
-                </a:solidFill>
+              <a:rPr sz="1270" b="1">
+                <a:solidFill>
+                  <a:srgbClr val="000000"/>
+                </a:solidFill>
+                <a:latin typeface="Times New Roman"/>
+                <a:ea typeface="Times New Roman"/>
+                <a:cs typeface="Times New Roman"/>
               </a:rPr>
               <a:t>4.  </a:t>
             </a:r>
             <a:r>
-              <a:rPr sz="1150" b="1" i="0">
-                <a:solidFill>
-                  <a:srgbClr val="262626"/>
-                </a:solidFill>
+              <a:rPr sz="1270" b="1" i="0">
+                <a:solidFill>
+                  <a:srgbClr val="000000"/>
+                </a:solidFill>
+                <a:latin typeface="Times New Roman"/>
+                <a:ea typeface="Times New Roman"/>
+                <a:cs typeface="Times New Roman"/>
               </a:rPr>
               <a:t>Train &amp; select</a:t>
             </a:r>
             <a:r>
-              <a:rPr sz="1150" b="0" i="0">
-                <a:solidFill>
-                  <a:srgbClr val="262626"/>
-                </a:solidFill>
+              <a:rPr sz="1270" b="0" i="0">
+                <a:solidFill>
+                  <a:srgbClr val="000000"/>
+                </a:solidFill>
+                <a:latin typeface="Times New Roman"/>
+                <a:ea typeface="Times New Roman"/>
+                <a:cs typeface="Times New Roman"/>
               </a:rPr>
               <a:t> — fit on P1–P3, choose on P4 by maximum TSS.</a:t>
             </a:r>
@@ -7817,26 +8396,35 @@
               <a:buNone/>
             </a:pPr>
             <a:r>
-              <a:rPr sz="1150" b="1">
-                <a:solidFill>
-                  <a:srgbClr val="4472C4"/>
-                </a:solidFill>
+              <a:rPr sz="1270" b="1">
+                <a:solidFill>
+                  <a:srgbClr val="000000"/>
+                </a:solidFill>
+                <a:latin typeface="Times New Roman"/>
+                <a:ea typeface="Times New Roman"/>
+                <a:cs typeface="Times New Roman"/>
               </a:rPr>
               <a:t>5.  </a:t>
             </a:r>
             <a:r>
-              <a:rPr sz="1150" b="1" i="0">
-                <a:solidFill>
-                  <a:srgbClr val="262626"/>
-                </a:solidFill>
+              <a:rPr sz="1270" b="1" i="0">
+                <a:solidFill>
+                  <a:srgbClr val="000000"/>
+                </a:solidFill>
+                <a:latin typeface="Times New Roman"/>
+                <a:ea typeface="Times New Roman"/>
+                <a:cs typeface="Times New Roman"/>
               </a:rPr>
               <a:t>Serve</a:t>
             </a:r>
             <a:r>
-              <a:rPr sz="1150" b="0" i="0">
-                <a:solidFill>
-                  <a:srgbClr val="262626"/>
-                </a:solidFill>
+              <a:rPr sz="1270" b="0" i="0">
+                <a:solidFill>
+                  <a:srgbClr val="000000"/>
+                </a:solidFill>
+                <a:latin typeface="Times New Roman"/>
+                <a:ea typeface="Times New Roman"/>
+                <a:cs typeface="Times New Roman"/>
               </a:rPr>
               <a:t> — locked P5 evaluation → risk banding → web dashboard.</a:t>
             </a:r>
@@ -7888,11 +8476,11 @@
               <a:buChar char="•"/>
               <a:defRPr sz="2800" kern="1200">
                 <a:solidFill>
-                  <a:schemeClr val="tx1"/>
-                </a:solidFill>
-                <a:latin typeface="+mn-lt"/>
-                <a:ea typeface="+mn-ea"/>
-                <a:cs typeface="+mn-cs"/>
+                  <a:srgbClr val="000000"/>
+                </a:solidFill>
+                <a:latin typeface="Times New Roman"/>
+                <a:ea typeface="Times New Roman"/>
+                <a:cs typeface="Times New Roman"/>
               </a:defRPr>
             </a:lvl1pPr>
             <a:lvl2pPr marL="685800" indent="-228600" algn="l" defTabSz="914400" rtl="0" eaLnBrk="1" latinLnBrk="0" hangingPunct="1">
@@ -7906,11 +8494,11 @@
               <a:buChar char="•"/>
               <a:defRPr sz="2400" kern="1200">
                 <a:solidFill>
-                  <a:schemeClr val="tx1"/>
-                </a:solidFill>
-                <a:latin typeface="+mn-lt"/>
-                <a:ea typeface="+mn-ea"/>
-                <a:cs typeface="+mn-cs"/>
+                  <a:srgbClr val="000000"/>
+                </a:solidFill>
+                <a:latin typeface="Times New Roman"/>
+                <a:ea typeface="Times New Roman"/>
+                <a:cs typeface="Times New Roman"/>
               </a:defRPr>
             </a:lvl2pPr>
             <a:lvl3pPr marL="1143000" indent="-228600" algn="l" defTabSz="914400" rtl="0" eaLnBrk="1" latinLnBrk="0" hangingPunct="1">
@@ -7924,11 +8512,11 @@
               <a:buChar char="•"/>
               <a:defRPr sz="2000" kern="1200">
                 <a:solidFill>
-                  <a:schemeClr val="tx1"/>
-                </a:solidFill>
-                <a:latin typeface="+mn-lt"/>
-                <a:ea typeface="+mn-ea"/>
-                <a:cs typeface="+mn-cs"/>
+                  <a:srgbClr val="000000"/>
+                </a:solidFill>
+                <a:latin typeface="Times New Roman"/>
+                <a:ea typeface="Times New Roman"/>
+                <a:cs typeface="Times New Roman"/>
               </a:defRPr>
             </a:lvl3pPr>
             <a:lvl4pPr marL="1600200" indent="-228600" algn="l" defTabSz="914400" rtl="0" eaLnBrk="1" latinLnBrk="0" hangingPunct="1">
@@ -7942,11 +8530,11 @@
               <a:buChar char="•"/>
               <a:defRPr sz="1800" kern="1200">
                 <a:solidFill>
-                  <a:schemeClr val="tx1"/>
-                </a:solidFill>
-                <a:latin typeface="+mn-lt"/>
-                <a:ea typeface="+mn-ea"/>
-                <a:cs typeface="+mn-cs"/>
+                  <a:srgbClr val="000000"/>
+                </a:solidFill>
+                <a:latin typeface="Times New Roman"/>
+                <a:ea typeface="Times New Roman"/>
+                <a:cs typeface="Times New Roman"/>
               </a:defRPr>
             </a:lvl4pPr>
             <a:lvl5pPr marL="2057400" indent="-228600" algn="l" defTabSz="914400" rtl="0" eaLnBrk="1" latinLnBrk="0" hangingPunct="1">
@@ -7960,11 +8548,11 @@
               <a:buChar char="•"/>
               <a:defRPr sz="1800" kern="1200">
                 <a:solidFill>
-                  <a:schemeClr val="tx1"/>
-                </a:solidFill>
-                <a:latin typeface="+mn-lt"/>
-                <a:ea typeface="+mn-ea"/>
-                <a:cs typeface="+mn-cs"/>
+                  <a:srgbClr val="000000"/>
+                </a:solidFill>
+                <a:latin typeface="Times New Roman"/>
+                <a:ea typeface="Times New Roman"/>
+                <a:cs typeface="Times New Roman"/>
               </a:defRPr>
             </a:lvl5pPr>
             <a:lvl6pPr marL="2514600" indent="-228600" algn="l" defTabSz="914400" rtl="0" eaLnBrk="1" latinLnBrk="0" hangingPunct="1">
@@ -7978,11 +8566,11 @@
               <a:buChar char="•"/>
               <a:defRPr sz="1800" kern="1200">
                 <a:solidFill>
-                  <a:schemeClr val="tx1"/>
-                </a:solidFill>
-                <a:latin typeface="+mn-lt"/>
-                <a:ea typeface="+mn-ea"/>
-                <a:cs typeface="+mn-cs"/>
+                  <a:srgbClr val="000000"/>
+                </a:solidFill>
+                <a:latin typeface="Times New Roman"/>
+                <a:ea typeface="Times New Roman"/>
+                <a:cs typeface="Times New Roman"/>
               </a:defRPr>
             </a:lvl6pPr>
             <a:lvl7pPr marL="2971800" indent="-228600" algn="l" defTabSz="914400" rtl="0" eaLnBrk="1" latinLnBrk="0" hangingPunct="1">
@@ -7996,11 +8584,11 @@
               <a:buChar char="•"/>
               <a:defRPr sz="1800" kern="1200">
                 <a:solidFill>
-                  <a:schemeClr val="tx1"/>
-                </a:solidFill>
-                <a:latin typeface="+mn-lt"/>
-                <a:ea typeface="+mn-ea"/>
-                <a:cs typeface="+mn-cs"/>
+                  <a:srgbClr val="000000"/>
+                </a:solidFill>
+                <a:latin typeface="Times New Roman"/>
+                <a:ea typeface="Times New Roman"/>
+                <a:cs typeface="Times New Roman"/>
               </a:defRPr>
             </a:lvl7pPr>
             <a:lvl8pPr marL="3429000" indent="-228600" algn="l" defTabSz="914400" rtl="0" eaLnBrk="1" latinLnBrk="0" hangingPunct="1">
@@ -8014,11 +8602,11 @@
               <a:buChar char="•"/>
               <a:defRPr sz="1800" kern="1200">
                 <a:solidFill>
-                  <a:schemeClr val="tx1"/>
-                </a:solidFill>
-                <a:latin typeface="+mn-lt"/>
-                <a:ea typeface="+mn-ea"/>
-                <a:cs typeface="+mn-cs"/>
+                  <a:srgbClr val="000000"/>
+                </a:solidFill>
+                <a:latin typeface="Times New Roman"/>
+                <a:ea typeface="Times New Roman"/>
+                <a:cs typeface="Times New Roman"/>
               </a:defRPr>
             </a:lvl8pPr>
             <a:lvl9pPr marL="3886200" indent="-228600" algn="l" defTabSz="914400" rtl="0" eaLnBrk="1" latinLnBrk="0" hangingPunct="1">
@@ -8032,11 +8620,11 @@
               <a:buChar char="•"/>
               <a:defRPr sz="1800" kern="1200">
                 <a:solidFill>
-                  <a:schemeClr val="tx1"/>
-                </a:solidFill>
-                <a:latin typeface="+mn-lt"/>
-                <a:ea typeface="+mn-ea"/>
-                <a:cs typeface="+mn-cs"/>
+                  <a:srgbClr val="000000"/>
+                </a:solidFill>
+                <a:latin typeface="Times New Roman"/>
+                <a:ea typeface="Times New Roman"/>
+                <a:cs typeface="Times New Roman"/>
               </a:defRPr>
             </a:lvl9pPr>
           </a:lstStyle>
@@ -8054,10 +8642,13 @@
               <a:buNone/>
             </a:pPr>
             <a:r>
-              <a:rPr sz="1700" b="1" i="0">
-                <a:solidFill>
-                  <a:srgbClr val="1F3864"/>
-                </a:solidFill>
+              <a:rPr sz="1870" b="1" i="0">
+                <a:solidFill>
+                  <a:srgbClr val="000000"/>
+                </a:solidFill>
+                <a:latin typeface="Times New Roman"/>
+                <a:ea typeface="Times New Roman"/>
+                <a:cs typeface="Times New Roman"/>
               </a:rPr>
               <a:t>ML Methodology and Implementation Process</a:t>
             </a:r>
@@ -8109,11 +8700,11 @@
               <a:buChar char="•"/>
               <a:defRPr sz="2800" kern="1200">
                 <a:solidFill>
-                  <a:schemeClr val="tx1"/>
-                </a:solidFill>
-                <a:latin typeface="+mn-lt"/>
-                <a:ea typeface="+mn-ea"/>
-                <a:cs typeface="+mn-cs"/>
+                  <a:srgbClr val="000000"/>
+                </a:solidFill>
+                <a:latin typeface="Times New Roman"/>
+                <a:ea typeface="Times New Roman"/>
+                <a:cs typeface="Times New Roman"/>
               </a:defRPr>
             </a:lvl1pPr>
             <a:lvl2pPr marL="685800" indent="-228600" algn="l" defTabSz="914400" rtl="0" eaLnBrk="1" latinLnBrk="0" hangingPunct="1">
@@ -8127,11 +8718,11 @@
               <a:buChar char="•"/>
               <a:defRPr sz="2400" kern="1200">
                 <a:solidFill>
-                  <a:schemeClr val="tx1"/>
-                </a:solidFill>
-                <a:latin typeface="+mn-lt"/>
-                <a:ea typeface="+mn-ea"/>
-                <a:cs typeface="+mn-cs"/>
+                  <a:srgbClr val="000000"/>
+                </a:solidFill>
+                <a:latin typeface="Times New Roman"/>
+                <a:ea typeface="Times New Roman"/>
+                <a:cs typeface="Times New Roman"/>
               </a:defRPr>
             </a:lvl2pPr>
             <a:lvl3pPr marL="1143000" indent="-228600" algn="l" defTabSz="914400" rtl="0" eaLnBrk="1" latinLnBrk="0" hangingPunct="1">
@@ -8145,11 +8736,11 @@
               <a:buChar char="•"/>
               <a:defRPr sz="2000" kern="1200">
                 <a:solidFill>
-                  <a:schemeClr val="tx1"/>
-                </a:solidFill>
-                <a:latin typeface="+mn-lt"/>
-                <a:ea typeface="+mn-ea"/>
-                <a:cs typeface="+mn-cs"/>
+                  <a:srgbClr val="000000"/>
+                </a:solidFill>
+                <a:latin typeface="Times New Roman"/>
+                <a:ea typeface="Times New Roman"/>
+                <a:cs typeface="Times New Roman"/>
               </a:defRPr>
             </a:lvl3pPr>
             <a:lvl4pPr marL="1600200" indent="-228600" algn="l" defTabSz="914400" rtl="0" eaLnBrk="1" latinLnBrk="0" hangingPunct="1">
@@ -8163,11 +8754,11 @@
               <a:buChar char="•"/>
               <a:defRPr sz="1800" kern="1200">
                 <a:solidFill>
-                  <a:schemeClr val="tx1"/>
-                </a:solidFill>
-                <a:latin typeface="+mn-lt"/>
-                <a:ea typeface="+mn-ea"/>
-                <a:cs typeface="+mn-cs"/>
+                  <a:srgbClr val="000000"/>
+                </a:solidFill>
+                <a:latin typeface="Times New Roman"/>
+                <a:ea typeface="Times New Roman"/>
+                <a:cs typeface="Times New Roman"/>
               </a:defRPr>
             </a:lvl4pPr>
             <a:lvl5pPr marL="2057400" indent="-228600" algn="l" defTabSz="914400" rtl="0" eaLnBrk="1" latinLnBrk="0" hangingPunct="1">
@@ -8181,11 +8772,11 @@
               <a:buChar char="•"/>
               <a:defRPr sz="1800" kern="1200">
                 <a:solidFill>
-                  <a:schemeClr val="tx1"/>
-                </a:solidFill>
-                <a:latin typeface="+mn-lt"/>
-                <a:ea typeface="+mn-ea"/>
-                <a:cs typeface="+mn-cs"/>
+                  <a:srgbClr val="000000"/>
+                </a:solidFill>
+                <a:latin typeface="Times New Roman"/>
+                <a:ea typeface="Times New Roman"/>
+                <a:cs typeface="Times New Roman"/>
               </a:defRPr>
             </a:lvl5pPr>
             <a:lvl6pPr marL="2514600" indent="-228600" algn="l" defTabSz="914400" rtl="0" eaLnBrk="1" latinLnBrk="0" hangingPunct="1">
@@ -8199,11 +8790,11 @@
               <a:buChar char="•"/>
               <a:defRPr sz="1800" kern="1200">
                 <a:solidFill>
-                  <a:schemeClr val="tx1"/>
-                </a:solidFill>
-                <a:latin typeface="+mn-lt"/>
-                <a:ea typeface="+mn-ea"/>
-                <a:cs typeface="+mn-cs"/>
+                  <a:srgbClr val="000000"/>
+                </a:solidFill>
+                <a:latin typeface="Times New Roman"/>
+                <a:ea typeface="Times New Roman"/>
+                <a:cs typeface="Times New Roman"/>
               </a:defRPr>
             </a:lvl6pPr>
             <a:lvl7pPr marL="2971800" indent="-228600" algn="l" defTabSz="914400" rtl="0" eaLnBrk="1" latinLnBrk="0" hangingPunct="1">
@@ -8217,11 +8808,11 @@
               <a:buChar char="•"/>
               <a:defRPr sz="1800" kern="1200">
                 <a:solidFill>
-                  <a:schemeClr val="tx1"/>
-                </a:solidFill>
-                <a:latin typeface="+mn-lt"/>
-                <a:ea typeface="+mn-ea"/>
-                <a:cs typeface="+mn-cs"/>
+                  <a:srgbClr val="000000"/>
+                </a:solidFill>
+                <a:latin typeface="Times New Roman"/>
+                <a:ea typeface="Times New Roman"/>
+                <a:cs typeface="Times New Roman"/>
               </a:defRPr>
             </a:lvl7pPr>
             <a:lvl8pPr marL="3429000" indent="-228600" algn="l" defTabSz="914400" rtl="0" eaLnBrk="1" latinLnBrk="0" hangingPunct="1">
@@ -8235,11 +8826,11 @@
               <a:buChar char="•"/>
               <a:defRPr sz="1800" kern="1200">
                 <a:solidFill>
-                  <a:schemeClr val="tx1"/>
-                </a:solidFill>
-                <a:latin typeface="+mn-lt"/>
-                <a:ea typeface="+mn-ea"/>
-                <a:cs typeface="+mn-cs"/>
+                  <a:srgbClr val="000000"/>
+                </a:solidFill>
+                <a:latin typeface="Times New Roman"/>
+                <a:ea typeface="Times New Roman"/>
+                <a:cs typeface="Times New Roman"/>
               </a:defRPr>
             </a:lvl8pPr>
             <a:lvl9pPr marL="3886200" indent="-228600" algn="l" defTabSz="914400" rtl="0" eaLnBrk="1" latinLnBrk="0" hangingPunct="1">
@@ -8253,11 +8844,11 @@
               <a:buChar char="•"/>
               <a:defRPr sz="1800" kern="1200">
                 <a:solidFill>
-                  <a:schemeClr val="tx1"/>
-                </a:solidFill>
-                <a:latin typeface="+mn-lt"/>
-                <a:ea typeface="+mn-ea"/>
-                <a:cs typeface="+mn-cs"/>
+                  <a:srgbClr val="000000"/>
+                </a:solidFill>
+                <a:latin typeface="Times New Roman"/>
+                <a:ea typeface="Times New Roman"/>
+                <a:cs typeface="Times New Roman"/>
               </a:defRPr>
             </a:lvl9pPr>
           </a:lstStyle>
@@ -8275,10 +8866,13 @@
               <a:buNone/>
             </a:pPr>
             <a:r>
-              <a:rPr sz="1700" b="1" i="0">
-                <a:solidFill>
-                  <a:srgbClr val="1F3864"/>
-                </a:solidFill>
+              <a:rPr sz="1870" b="1" i="0">
+                <a:solidFill>
+                  <a:srgbClr val="000000"/>
+                </a:solidFill>
+                <a:latin typeface="Times New Roman"/>
+                <a:ea typeface="Times New Roman"/>
+                <a:cs typeface="Times New Roman"/>
               </a:rPr>
               <a:t>Technology Stack</a:t>
             </a:r>
@@ -8297,42 +8891,57 @@
               <a:buNone/>
             </a:pPr>
             <a:r>
-              <a:rPr sz="1150" b="1">
-                <a:solidFill>
-                  <a:srgbClr val="4472C4"/>
-                </a:solidFill>
-              </a:rPr>
-              <a:t>▪  </a:t>
-            </a:r>
-            <a:r>
-              <a:rPr sz="1150" b="1" i="0">
-                <a:solidFill>
-                  <a:srgbClr val="262626"/>
-                </a:solidFill>
+              <a:rPr sz="1270" b="1">
+                <a:solidFill>
+                  <a:srgbClr val="000000"/>
+                </a:solidFill>
+                <a:latin typeface="Times New Roman"/>
+                <a:ea typeface="Times New Roman"/>
+                <a:cs typeface="Times New Roman"/>
+              </a:rPr>
+              <a:t>•  </a:t>
+            </a:r>
+            <a:r>
+              <a:rPr sz="1270" b="1" i="0">
+                <a:solidFill>
+                  <a:srgbClr val="000000"/>
+                </a:solidFill>
+                <a:latin typeface="Times New Roman"/>
+                <a:ea typeface="Times New Roman"/>
+                <a:cs typeface="Times New Roman"/>
               </a:rPr>
               <a:t>Python 3.12</a:t>
             </a:r>
             <a:r>
-              <a:rPr sz="1150" b="0" i="0">
-                <a:solidFill>
-                  <a:srgbClr val="262626"/>
-                </a:solidFill>
+              <a:rPr sz="1270" b="0" i="0">
+                <a:solidFill>
+                  <a:srgbClr val="000000"/>
+                </a:solidFill>
+                <a:latin typeface="Times New Roman"/>
+                <a:ea typeface="Times New Roman"/>
+                <a:cs typeface="Times New Roman"/>
               </a:rPr>
               <a:t> · scikit-learn </a:t>
             </a:r>
             <a:r>
-              <a:rPr sz="1150" b="1" i="0">
-                <a:solidFill>
-                  <a:srgbClr val="262626"/>
-                </a:solidFill>
+              <a:rPr sz="1270" b="1" i="0">
+                <a:solidFill>
+                  <a:srgbClr val="000000"/>
+                </a:solidFill>
+                <a:latin typeface="Times New Roman"/>
+                <a:ea typeface="Times New Roman"/>
+                <a:cs typeface="Times New Roman"/>
               </a:rPr>
               <a:t>1.8.0</a:t>
             </a:r>
             <a:r>
-              <a:rPr sz="1150" b="0" i="0">
-                <a:solidFill>
-                  <a:srgbClr val="262626"/>
-                </a:solidFill>
+              <a:rPr sz="1270" b="0" i="0">
+                <a:solidFill>
+                  <a:srgbClr val="000000"/>
+                </a:solidFill>
+                <a:latin typeface="Times New Roman"/>
+                <a:ea typeface="Times New Roman"/>
+                <a:cs typeface="Times New Roman"/>
               </a:rPr>
               <a:t> · NumPy · pandas · SciPy · joblib · matplotlib</a:t>
             </a:r>
@@ -8351,26 +8960,35 @@
               <a:buNone/>
             </a:pPr>
             <a:r>
-              <a:rPr sz="1150" b="1">
-                <a:solidFill>
-                  <a:srgbClr val="4472C4"/>
-                </a:solidFill>
-              </a:rPr>
-              <a:t>▪  </a:t>
-            </a:r>
-            <a:r>
-              <a:rPr sz="1150" b="1" i="0">
-                <a:solidFill>
-                  <a:srgbClr val="262626"/>
-                </a:solidFill>
+              <a:rPr sz="1270" b="1">
+                <a:solidFill>
+                  <a:srgbClr val="000000"/>
+                </a:solidFill>
+                <a:latin typeface="Times New Roman"/>
+                <a:ea typeface="Times New Roman"/>
+                <a:cs typeface="Times New Roman"/>
+              </a:rPr>
+              <a:t>•  </a:t>
+            </a:r>
+            <a:r>
+              <a:rPr sz="1270" b="1" i="0">
+                <a:solidFill>
+                  <a:srgbClr val="000000"/>
+                </a:solidFill>
+                <a:latin typeface="Times New Roman"/>
+                <a:ea typeface="Times New Roman"/>
+                <a:cs typeface="Times New Roman"/>
               </a:rPr>
               <a:t>Pipeline:</a:t>
             </a:r>
             <a:r>
-              <a:rPr sz="1150" b="0" i="0">
-                <a:solidFill>
-                  <a:srgbClr val="262626"/>
-                </a:solidFill>
+              <a:rPr sz="1270" b="0" i="0">
+                <a:solidFill>
+                  <a:srgbClr val="000000"/>
+                </a:solidFill>
+                <a:latin typeface="Times New Roman"/>
+                <a:ea typeface="Times New Roman"/>
+                <a:cs typeface="Times New Roman"/>
               </a:rPr>
               <a:t> signed-log → median imputer → StandardScaler → Logistic Regression (L2, class-balanced)</a:t>
             </a:r>
@@ -8389,26 +9007,35 @@
               <a:buNone/>
             </a:pPr>
             <a:r>
-              <a:rPr sz="1150" b="1">
-                <a:solidFill>
-                  <a:srgbClr val="4472C4"/>
-                </a:solidFill>
-              </a:rPr>
-              <a:t>▪  </a:t>
-            </a:r>
-            <a:r>
-              <a:rPr sz="1150" b="1" i="0">
-                <a:solidFill>
-                  <a:srgbClr val="262626"/>
-                </a:solidFill>
+              <a:rPr sz="1270" b="1">
+                <a:solidFill>
+                  <a:srgbClr val="000000"/>
+                </a:solidFill>
+                <a:latin typeface="Times New Roman"/>
+                <a:ea typeface="Times New Roman"/>
+                <a:cs typeface="Times New Roman"/>
+              </a:rPr>
+              <a:t>•  </a:t>
+            </a:r>
+            <a:r>
+              <a:rPr sz="1270" b="1" i="0">
+                <a:solidFill>
+                  <a:srgbClr val="000000"/>
+                </a:solidFill>
+                <a:latin typeface="Times New Roman"/>
+                <a:ea typeface="Times New Roman"/>
+                <a:cs typeface="Times New Roman"/>
               </a:rPr>
               <a:t>Dashboard:</a:t>
             </a:r>
             <a:r>
-              <a:rPr sz="1150" b="0" i="0">
-                <a:solidFill>
-                  <a:srgbClr val="262626"/>
-                </a:solidFill>
+              <a:rPr sz="1270" b="0" i="0">
+                <a:solidFill>
+                  <a:srgbClr val="000000"/>
+                </a:solidFill>
+                <a:latin typeface="Times New Roman"/>
+                <a:ea typeface="Times New Roman"/>
+                <a:cs typeface="Times New Roman"/>
               </a:rPr>
               <a:t> HTML / CSS / vanilla JavaScript — the fitted model is re-run in the browser and agrees with scikit-learn to 1e-6</a:t>
             </a:r>
@@ -8427,26 +9054,35 @@
               <a:buNone/>
             </a:pPr>
             <a:r>
-              <a:rPr sz="1150" b="1">
-                <a:solidFill>
-                  <a:srgbClr val="4472C4"/>
-                </a:solidFill>
-              </a:rPr>
-              <a:t>▪  </a:t>
-            </a:r>
-            <a:r>
-              <a:rPr sz="1150" b="1" i="0">
-                <a:solidFill>
-                  <a:srgbClr val="262626"/>
-                </a:solidFill>
+              <a:rPr sz="1270" b="1">
+                <a:solidFill>
+                  <a:srgbClr val="000000"/>
+                </a:solidFill>
+                <a:latin typeface="Times New Roman"/>
+                <a:ea typeface="Times New Roman"/>
+                <a:cs typeface="Times New Roman"/>
+              </a:rPr>
+              <a:t>•  </a:t>
+            </a:r>
+            <a:r>
+              <a:rPr sz="1270" b="1" i="0">
+                <a:solidFill>
+                  <a:srgbClr val="000000"/>
+                </a:solidFill>
+                <a:latin typeface="Times New Roman"/>
+                <a:ea typeface="Times New Roman"/>
+                <a:cs typeface="Times New Roman"/>
               </a:rPr>
               <a:t>Testing:</a:t>
             </a:r>
             <a:r>
-              <a:rPr sz="1150" b="0" i="0">
-                <a:solidFill>
-                  <a:srgbClr val="262626"/>
-                </a:solidFill>
+              <a:rPr sz="1270" b="0" i="0">
+                <a:solidFill>
+                  <a:srgbClr val="000000"/>
+                </a:solidFill>
+                <a:latin typeface="Times New Roman"/>
+                <a:ea typeface="Times New Roman"/>
+                <a:cs typeface="Times New Roman"/>
               </a:rPr>
               <a:t> pytest (202 tests), Playwright headless browser, Ruff + Black</a:t>
             </a:r>
@@ -8465,26 +9101,35 @@
               <a:buNone/>
             </a:pPr>
             <a:r>
-              <a:rPr sz="1150" b="1">
-                <a:solidFill>
-                  <a:srgbClr val="4472C4"/>
-                </a:solidFill>
-              </a:rPr>
-              <a:t>▪  </a:t>
-            </a:r>
-            <a:r>
-              <a:rPr sz="1150" b="1" i="0">
-                <a:solidFill>
-                  <a:srgbClr val="262626"/>
-                </a:solidFill>
+              <a:rPr sz="1270" b="1">
+                <a:solidFill>
+                  <a:srgbClr val="000000"/>
+                </a:solidFill>
+                <a:latin typeface="Times New Roman"/>
+                <a:ea typeface="Times New Roman"/>
+                <a:cs typeface="Times New Roman"/>
+              </a:rPr>
+              <a:t>•  </a:t>
+            </a:r>
+            <a:r>
+              <a:rPr sz="1270" b="1" i="0">
+                <a:solidFill>
+                  <a:srgbClr val="000000"/>
+                </a:solidFill>
+                <a:latin typeface="Times New Roman"/>
+                <a:ea typeface="Times New Roman"/>
+                <a:cs typeface="Times New Roman"/>
               </a:rPr>
               <a:t>Reproducibility:</a:t>
             </a:r>
             <a:r>
-              <a:rPr sz="1150" b="0" i="0">
-                <a:solidFill>
-                  <a:srgbClr val="262626"/>
-                </a:solidFill>
+              <a:rPr sz="1270" b="0" i="0">
+                <a:solidFill>
+                  <a:srgbClr val="000000"/>
+                </a:solidFill>
+                <a:latin typeface="Times New Roman"/>
+                <a:ea typeface="Times New Roman"/>
+                <a:cs typeface="Times New Roman"/>
               </a:rPr>
               <a:t> one command — python -m solarflare all — running 375 metric checks and 397 consistency checks</a:t>
             </a:r>
@@ -8493,7 +9138,7 @@
       </p:sp>
       <p:pic>
         <p:nvPicPr>
-          <p:cNvPr id="18" name="Picture 17" descr="fig4_1_architecture.png"/>
+          <p:cNvPr id="18" name="Picture 17" descr="architecture_flow.png"/>
           <p:cNvPicPr>
             <a:picLocks noChangeAspect="1"/>
           </p:cNvPicPr>
@@ -8507,8 +9152,8 @@
         </p:blipFill>
         <p:spPr>
           <a:xfrm>
-            <a:off x="6355080" y="1609344"/>
-            <a:ext cx="5193792" cy="4253962"/>
+            <a:off x="6949440" y="1554480"/>
+            <a:ext cx="4005072" cy="4443983"/>
           </a:xfrm>
           <a:prstGeom prst="rect">
             <a:avLst/>
@@ -8523,7 +9168,7 @@
         </p:nvSpPr>
         <p:spPr>
           <a:xfrm>
-            <a:off x="6327648" y="5943600"/>
+            <a:off x="6327648" y="5998464"/>
             <a:ext cx="5248656" cy="237744"/>
           </a:xfrm>
           <a:prstGeom prst="rect">
@@ -8541,10 +9186,13 @@
               <a:buNone/>
             </a:pPr>
             <a:r>
-              <a:rPr sz="900" b="0" i="1">
-                <a:solidFill>
-                  <a:srgbClr val="595959"/>
-                </a:solidFill>
+              <a:rPr sz="990" b="0" i="1">
+                <a:solidFill>
+                  <a:srgbClr val="000000"/>
+                </a:solidFill>
+                <a:latin typeface="Times New Roman"/>
+                <a:ea typeface="Times New Roman"/>
+                <a:cs typeface="Times New Roman"/>
               </a:rPr>
               <a:t>Figure 4.1 — implemented end-to-end forecasting architecture.</a:t>
             </a:r>
@@ -8621,15 +9269,23 @@
             <a:pPr algn="ctr"/>
             <a:r>
               <a:rPr lang="en-IN" sz="3200" dirty="0">
+                <a:solidFill>
+                  <a:srgbClr val="000000"/>
+                </a:solidFill>
                 <a:latin typeface="Times New Roman" panose="02020603050405020304" pitchFamily="18" charset="0"/>
-                <a:cs typeface="Times New Roman" panose="02020603050405020304" pitchFamily="18" charset="0"/>
+                <a:ea typeface="Times New Roman"/>
+                <a:cs typeface="Times New Roman"/>
               </a:rPr>
               <a:t> </a:t>
             </a:r>
             <a:r>
               <a:rPr lang="en-IN" sz="3200" b="1" dirty="0">
+                <a:solidFill>
+                  <a:srgbClr val="000000"/>
+                </a:solidFill>
                 <a:latin typeface="Times New Roman" panose="02020603050405020304" pitchFamily="18" charset="0"/>
-                <a:cs typeface="Times New Roman" panose="02020603050405020304" pitchFamily="18" charset="0"/>
+                <a:ea typeface="Times New Roman"/>
+                <a:cs typeface="Times New Roman"/>
               </a:rPr>
               <a:t>Feasibility, Risk and Challenges</a:t>
             </a:r>
@@ -8658,10 +9314,24 @@
           <a:lstStyle/>
           <a:p>
             <a:fld id="{B4EE2AE5-9218-4A07-842F-E84162EAAD55}" type="slidenum">
-              <a:rPr lang="en-IN" smtClean="0"/>
+              <a:rPr lang="en-IN" smtClean="0">
+                <a:solidFill>
+                  <a:srgbClr val="000000"/>
+                </a:solidFill>
+                <a:latin typeface="Times New Roman"/>
+                <a:ea typeface="Times New Roman"/>
+                <a:cs typeface="Times New Roman"/>
+              </a:rPr>
               <a:t>5</a:t>
             </a:fld>
-            <a:endParaRPr lang="en-IN" dirty="0"/>
+            <a:endParaRPr lang="en-IN" dirty="0">
+              <a:solidFill>
+                <a:srgbClr val="000000"/>
+              </a:solidFill>
+              <a:latin typeface="Times New Roman"/>
+              <a:ea typeface="Times New Roman"/>
+              <a:cs typeface="Times New Roman"/>
+            </a:endParaRPr>
           </a:p>
         </p:txBody>
       </p:sp>
@@ -8687,10 +9357,24 @@
           <a:lstStyle/>
           <a:p>
             <a:r>
-              <a:rPr lang="en-US"/>
+              <a:rPr lang="en-US">
+                <a:solidFill>
+                  <a:srgbClr val="000000"/>
+                </a:solidFill>
+                <a:latin typeface="Times New Roman"/>
+                <a:ea typeface="Times New Roman"/>
+                <a:cs typeface="Times New Roman"/>
+              </a:rPr>
               <a:t>Date: 07/10/2026</a:t>
             </a:r>
-            <a:endParaRPr lang="en-IN" dirty="0"/>
+            <a:endParaRPr lang="en-IN" dirty="0">
+              <a:solidFill>
+                <a:srgbClr val="000000"/>
+              </a:solidFill>
+              <a:latin typeface="Times New Roman"/>
+              <a:ea typeface="Times New Roman"/>
+              <a:cs typeface="Times New Roman"/>
+            </a:endParaRPr>
           </a:p>
         </p:txBody>
       </p:sp>
@@ -8752,10 +9436,24 @@
           <a:lstStyle/>
           <a:p>
             <a:r>
-              <a:rPr lang="en-US" dirty="0"/>
+              <a:rPr lang="en-US" dirty="0">
+                <a:solidFill>
+                  <a:srgbClr val="000000"/>
+                </a:solidFill>
+                <a:latin typeface="Times New Roman"/>
+                <a:ea typeface="Times New Roman"/>
+                <a:cs typeface="Times New Roman"/>
+              </a:rPr>
               <a:t>II–Year PBL Project Final Review</a:t>
             </a:r>
-            <a:endParaRPr lang="en-IN" dirty="0"/>
+            <a:endParaRPr lang="en-IN" dirty="0">
+              <a:solidFill>
+                <a:srgbClr val="000000"/>
+              </a:solidFill>
+              <a:latin typeface="Times New Roman"/>
+              <a:ea typeface="Times New Roman"/>
+              <a:cs typeface="Times New Roman"/>
+            </a:endParaRPr>
           </a:p>
         </p:txBody>
       </p:sp>
@@ -8804,11 +9502,11 @@
               <a:buChar char="•"/>
               <a:defRPr sz="2800" kern="1200">
                 <a:solidFill>
-                  <a:schemeClr val="tx1"/>
-                </a:solidFill>
-                <a:latin typeface="+mn-lt"/>
-                <a:ea typeface="+mn-ea"/>
-                <a:cs typeface="+mn-cs"/>
+                  <a:srgbClr val="000000"/>
+                </a:solidFill>
+                <a:latin typeface="Times New Roman"/>
+                <a:ea typeface="Times New Roman"/>
+                <a:cs typeface="Times New Roman"/>
               </a:defRPr>
             </a:lvl1pPr>
             <a:lvl2pPr marL="685800" indent="-228600" algn="l" defTabSz="914400" rtl="0" eaLnBrk="1" latinLnBrk="0" hangingPunct="1">
@@ -8822,11 +9520,11 @@
               <a:buChar char="•"/>
               <a:defRPr sz="2400" kern="1200">
                 <a:solidFill>
-                  <a:schemeClr val="tx1"/>
-                </a:solidFill>
-                <a:latin typeface="+mn-lt"/>
-                <a:ea typeface="+mn-ea"/>
-                <a:cs typeface="+mn-cs"/>
+                  <a:srgbClr val="000000"/>
+                </a:solidFill>
+                <a:latin typeface="Times New Roman"/>
+                <a:ea typeface="Times New Roman"/>
+                <a:cs typeface="Times New Roman"/>
               </a:defRPr>
             </a:lvl2pPr>
             <a:lvl3pPr marL="1143000" indent="-228600" algn="l" defTabSz="914400" rtl="0" eaLnBrk="1" latinLnBrk="0" hangingPunct="1">
@@ -8840,11 +9538,11 @@
               <a:buChar char="•"/>
               <a:defRPr sz="2000" kern="1200">
                 <a:solidFill>
-                  <a:schemeClr val="tx1"/>
-                </a:solidFill>
-                <a:latin typeface="+mn-lt"/>
-                <a:ea typeface="+mn-ea"/>
-                <a:cs typeface="+mn-cs"/>
+                  <a:srgbClr val="000000"/>
+                </a:solidFill>
+                <a:latin typeface="Times New Roman"/>
+                <a:ea typeface="Times New Roman"/>
+                <a:cs typeface="Times New Roman"/>
               </a:defRPr>
             </a:lvl3pPr>
             <a:lvl4pPr marL="1600200" indent="-228600" algn="l" defTabSz="914400" rtl="0" eaLnBrk="1" latinLnBrk="0" hangingPunct="1">
@@ -8858,11 +9556,11 @@
               <a:buChar char="•"/>
               <a:defRPr sz="1800" kern="1200">
                 <a:solidFill>
-                  <a:schemeClr val="tx1"/>
-                </a:solidFill>
-                <a:latin typeface="+mn-lt"/>
-                <a:ea typeface="+mn-ea"/>
-                <a:cs typeface="+mn-cs"/>
+                  <a:srgbClr val="000000"/>
+                </a:solidFill>
+                <a:latin typeface="Times New Roman"/>
+                <a:ea typeface="Times New Roman"/>
+                <a:cs typeface="Times New Roman"/>
               </a:defRPr>
             </a:lvl4pPr>
             <a:lvl5pPr marL="2057400" indent="-228600" algn="l" defTabSz="914400" rtl="0" eaLnBrk="1" latinLnBrk="0" hangingPunct="1">
@@ -8876,11 +9574,11 @@
               <a:buChar char="•"/>
               <a:defRPr sz="1800" kern="1200">
                 <a:solidFill>
-                  <a:schemeClr val="tx1"/>
-                </a:solidFill>
-                <a:latin typeface="+mn-lt"/>
-                <a:ea typeface="+mn-ea"/>
-                <a:cs typeface="+mn-cs"/>
+                  <a:srgbClr val="000000"/>
+                </a:solidFill>
+                <a:latin typeface="Times New Roman"/>
+                <a:ea typeface="Times New Roman"/>
+                <a:cs typeface="Times New Roman"/>
               </a:defRPr>
             </a:lvl5pPr>
             <a:lvl6pPr marL="2514600" indent="-228600" algn="l" defTabSz="914400" rtl="0" eaLnBrk="1" latinLnBrk="0" hangingPunct="1">
@@ -8894,11 +9592,11 @@
               <a:buChar char="•"/>
               <a:defRPr sz="1800" kern="1200">
                 <a:solidFill>
-                  <a:schemeClr val="tx1"/>
-                </a:solidFill>
-                <a:latin typeface="+mn-lt"/>
-                <a:ea typeface="+mn-ea"/>
-                <a:cs typeface="+mn-cs"/>
+                  <a:srgbClr val="000000"/>
+                </a:solidFill>
+                <a:latin typeface="Times New Roman"/>
+                <a:ea typeface="Times New Roman"/>
+                <a:cs typeface="Times New Roman"/>
               </a:defRPr>
             </a:lvl6pPr>
             <a:lvl7pPr marL="2971800" indent="-228600" algn="l" defTabSz="914400" rtl="0" eaLnBrk="1" latinLnBrk="0" hangingPunct="1">
@@ -8912,11 +9610,11 @@
               <a:buChar char="•"/>
               <a:defRPr sz="1800" kern="1200">
                 <a:solidFill>
-                  <a:schemeClr val="tx1"/>
-                </a:solidFill>
-                <a:latin typeface="+mn-lt"/>
-                <a:ea typeface="+mn-ea"/>
-                <a:cs typeface="+mn-cs"/>
+                  <a:srgbClr val="000000"/>
+                </a:solidFill>
+                <a:latin typeface="Times New Roman"/>
+                <a:ea typeface="Times New Roman"/>
+                <a:cs typeface="Times New Roman"/>
               </a:defRPr>
             </a:lvl7pPr>
             <a:lvl8pPr marL="3429000" indent="-228600" algn="l" defTabSz="914400" rtl="0" eaLnBrk="1" latinLnBrk="0" hangingPunct="1">
@@ -8930,11 +9628,11 @@
               <a:buChar char="•"/>
               <a:defRPr sz="1800" kern="1200">
                 <a:solidFill>
-                  <a:schemeClr val="tx1"/>
-                </a:solidFill>
-                <a:latin typeface="+mn-lt"/>
-                <a:ea typeface="+mn-ea"/>
-                <a:cs typeface="+mn-cs"/>
+                  <a:srgbClr val="000000"/>
+                </a:solidFill>
+                <a:latin typeface="Times New Roman"/>
+                <a:ea typeface="Times New Roman"/>
+                <a:cs typeface="Times New Roman"/>
               </a:defRPr>
             </a:lvl8pPr>
             <a:lvl9pPr marL="3886200" indent="-228600" algn="l" defTabSz="914400" rtl="0" eaLnBrk="1" latinLnBrk="0" hangingPunct="1">
@@ -8948,11 +9646,11 @@
               <a:buChar char="•"/>
               <a:defRPr sz="1800" kern="1200">
                 <a:solidFill>
-                  <a:schemeClr val="tx1"/>
-                </a:solidFill>
-                <a:latin typeface="+mn-lt"/>
-                <a:ea typeface="+mn-ea"/>
-                <a:cs typeface="+mn-cs"/>
+                  <a:srgbClr val="000000"/>
+                </a:solidFill>
+                <a:latin typeface="Times New Roman"/>
+                <a:ea typeface="Times New Roman"/>
+                <a:cs typeface="Times New Roman"/>
               </a:defRPr>
             </a:lvl9pPr>
           </a:lstStyle>
@@ -8970,10 +9668,13 @@
               <a:buNone/>
             </a:pPr>
             <a:r>
-              <a:rPr sz="1700" b="1" i="0">
-                <a:solidFill>
-                  <a:srgbClr val="1F3864"/>
-                </a:solidFill>
+              <a:rPr sz="1870" b="1" i="0">
+                <a:solidFill>
+                  <a:srgbClr val="000000"/>
+                </a:solidFill>
+                <a:latin typeface="Times New Roman"/>
+                <a:ea typeface="Times New Roman"/>
+                <a:cs typeface="Times New Roman"/>
               </a:rPr>
               <a:t>Feasibility</a:t>
             </a:r>
@@ -8992,26 +9693,35 @@
               <a:buNone/>
             </a:pPr>
             <a:r>
-              <a:rPr sz="1200" b="1">
-                <a:solidFill>
-                  <a:srgbClr val="4472C4"/>
-                </a:solidFill>
-              </a:rPr>
-              <a:t>▪  </a:t>
-            </a:r>
-            <a:r>
-              <a:rPr sz="1200" b="1" i="0">
-                <a:solidFill>
-                  <a:srgbClr val="262626"/>
-                </a:solidFill>
+              <a:rPr sz="1320" b="1">
+                <a:solidFill>
+                  <a:srgbClr val="000000"/>
+                </a:solidFill>
+                <a:latin typeface="Times New Roman"/>
+                <a:ea typeface="Times New Roman"/>
+                <a:cs typeface="Times New Roman"/>
+              </a:rPr>
+              <a:t>•  </a:t>
+            </a:r>
+            <a:r>
+              <a:rPr sz="1320" b="1" i="0">
+                <a:solidFill>
+                  <a:srgbClr val="000000"/>
+                </a:solidFill>
+                <a:latin typeface="Times New Roman"/>
+                <a:ea typeface="Times New Roman"/>
+                <a:cs typeface="Times New Roman"/>
               </a:rPr>
               <a:t>Data</a:t>
             </a:r>
             <a:r>
-              <a:rPr sz="1200" b="0" i="0">
-                <a:solidFill>
-                  <a:srgbClr val="262626"/>
-                </a:solidFill>
+              <a:rPr sz="1320" b="0" i="0">
+                <a:solidFill>
+                  <a:srgbClr val="000000"/>
+                </a:solidFill>
+                <a:latin typeface="Times New Roman"/>
+                <a:ea typeface="Times New Roman"/>
+                <a:cs typeface="Times New Roman"/>
               </a:rPr>
               <a:t> — a public, curated benchmark; no licence barrier and no collection cost.</a:t>
             </a:r>
@@ -9030,26 +9740,35 @@
               <a:buNone/>
             </a:pPr>
             <a:r>
-              <a:rPr sz="1200" b="1">
-                <a:solidFill>
-                  <a:srgbClr val="4472C4"/>
-                </a:solidFill>
-              </a:rPr>
-              <a:t>▪  </a:t>
-            </a:r>
-            <a:r>
-              <a:rPr sz="1200" b="1" i="0">
-                <a:solidFill>
-                  <a:srgbClr val="262626"/>
-                </a:solidFill>
+              <a:rPr sz="1320" b="1">
+                <a:solidFill>
+                  <a:srgbClr val="000000"/>
+                </a:solidFill>
+                <a:latin typeface="Times New Roman"/>
+                <a:ea typeface="Times New Roman"/>
+                <a:cs typeface="Times New Roman"/>
+              </a:rPr>
+              <a:t>•  </a:t>
+            </a:r>
+            <a:r>
+              <a:rPr sz="1320" b="1" i="0">
+                <a:solidFill>
+                  <a:srgbClr val="000000"/>
+                </a:solidFill>
+                <a:latin typeface="Times New Roman"/>
+                <a:ea typeface="Times New Roman"/>
+                <a:cs typeface="Times New Roman"/>
               </a:rPr>
               <a:t>Compute</a:t>
             </a:r>
             <a:r>
-              <a:rPr sz="1200" b="0" i="0">
-                <a:solidFill>
-                  <a:srgbClr val="262626"/>
-                </a:solidFill>
+              <a:rPr sz="1320" b="0" i="0">
+                <a:solidFill>
+                  <a:srgbClr val="000000"/>
+                </a:solidFill>
+                <a:latin typeface="Times New Roman"/>
+                <a:ea typeface="Times New Roman"/>
+                <a:cs typeface="Times New Roman"/>
               </a:rPr>
               <a:t> — the full pipeline trains in about 15 minutes on a 4-core laptop. No GPU is required.</a:t>
             </a:r>
@@ -9068,26 +9787,35 @@
               <a:buNone/>
             </a:pPr>
             <a:r>
-              <a:rPr sz="1200" b="1">
-                <a:solidFill>
-                  <a:srgbClr val="4472C4"/>
-                </a:solidFill>
-              </a:rPr>
-              <a:t>▪  </a:t>
-            </a:r>
-            <a:r>
-              <a:rPr sz="1200" b="1" i="0">
-                <a:solidFill>
-                  <a:srgbClr val="262626"/>
-                </a:solidFill>
+              <a:rPr sz="1320" b="1">
+                <a:solidFill>
+                  <a:srgbClr val="000000"/>
+                </a:solidFill>
+                <a:latin typeface="Times New Roman"/>
+                <a:ea typeface="Times New Roman"/>
+                <a:cs typeface="Times New Roman"/>
+              </a:rPr>
+              <a:t>•  </a:t>
+            </a:r>
+            <a:r>
+              <a:rPr sz="1320" b="1" i="0">
+                <a:solidFill>
+                  <a:srgbClr val="000000"/>
+                </a:solidFill>
+                <a:latin typeface="Times New Roman"/>
+                <a:ea typeface="Times New Roman"/>
+                <a:cs typeface="Times New Roman"/>
               </a:rPr>
               <a:t>Deployment</a:t>
             </a:r>
             <a:r>
-              <a:rPr sz="1200" b="0" i="0">
-                <a:solidFill>
-                  <a:srgbClr val="262626"/>
-                </a:solidFill>
+              <a:rPr sz="1320" b="0" i="0">
+                <a:solidFill>
+                  <a:srgbClr val="000000"/>
+                </a:solidFill>
+                <a:latin typeface="Times New Roman"/>
+                <a:ea typeface="Times New Roman"/>
+                <a:cs typeface="Times New Roman"/>
               </a:rPr>
               <a:t> — the model is 144 coefficients, so it runs inside a browser tab with the network switched off.</a:t>
             </a:r>
@@ -9106,26 +9834,35 @@
               <a:buNone/>
             </a:pPr>
             <a:r>
-              <a:rPr sz="1200" b="1">
-                <a:solidFill>
-                  <a:srgbClr val="4472C4"/>
-                </a:solidFill>
-              </a:rPr>
-              <a:t>▪  </a:t>
-            </a:r>
-            <a:r>
-              <a:rPr sz="1200" b="1" i="0">
-                <a:solidFill>
-                  <a:srgbClr val="262626"/>
-                </a:solidFill>
+              <a:rPr sz="1320" b="1">
+                <a:solidFill>
+                  <a:srgbClr val="000000"/>
+                </a:solidFill>
+                <a:latin typeface="Times New Roman"/>
+                <a:ea typeface="Times New Roman"/>
+                <a:cs typeface="Times New Roman"/>
+              </a:rPr>
+              <a:t>•  </a:t>
+            </a:r>
+            <a:r>
+              <a:rPr sz="1320" b="1" i="0">
+                <a:solidFill>
+                  <a:srgbClr val="000000"/>
+                </a:solidFill>
+                <a:latin typeface="Times New Roman"/>
+                <a:ea typeface="Times New Roman"/>
+                <a:cs typeface="Times New Roman"/>
               </a:rPr>
               <a:t>Verification</a:t>
             </a:r>
             <a:r>
-              <a:rPr sz="1200" b="0" i="0">
-                <a:solidFill>
-                  <a:srgbClr val="262626"/>
-                </a:solidFill>
+              <a:rPr sz="1320" b="0" i="0">
+                <a:solidFill>
+                  <a:srgbClr val="000000"/>
+                </a:solidFill>
+                <a:latin typeface="Times New Roman"/>
+                <a:ea typeface="Times New Roman"/>
+                <a:cs typeface="Times New Roman"/>
               </a:rPr>
               <a:t> — every published number recomputes from the repository in about two minutes.</a:t>
             </a:r>
@@ -9177,11 +9914,11 @@
               <a:buChar char="•"/>
               <a:defRPr sz="2800" kern="1200">
                 <a:solidFill>
-                  <a:schemeClr val="tx1"/>
-                </a:solidFill>
-                <a:latin typeface="+mn-lt"/>
-                <a:ea typeface="+mn-ea"/>
-                <a:cs typeface="+mn-cs"/>
+                  <a:srgbClr val="000000"/>
+                </a:solidFill>
+                <a:latin typeface="Times New Roman"/>
+                <a:ea typeface="Times New Roman"/>
+                <a:cs typeface="Times New Roman"/>
               </a:defRPr>
             </a:lvl1pPr>
             <a:lvl2pPr marL="685800" indent="-228600" algn="l" defTabSz="914400" rtl="0" eaLnBrk="1" latinLnBrk="0" hangingPunct="1">
@@ -9195,11 +9932,11 @@
               <a:buChar char="•"/>
               <a:defRPr sz="2400" kern="1200">
                 <a:solidFill>
-                  <a:schemeClr val="tx1"/>
-                </a:solidFill>
-                <a:latin typeface="+mn-lt"/>
-                <a:ea typeface="+mn-ea"/>
-                <a:cs typeface="+mn-cs"/>
+                  <a:srgbClr val="000000"/>
+                </a:solidFill>
+                <a:latin typeface="Times New Roman"/>
+                <a:ea typeface="Times New Roman"/>
+                <a:cs typeface="Times New Roman"/>
               </a:defRPr>
             </a:lvl2pPr>
             <a:lvl3pPr marL="1143000" indent="-228600" algn="l" defTabSz="914400" rtl="0" eaLnBrk="1" latinLnBrk="0" hangingPunct="1">
@@ -9213,11 +9950,11 @@
               <a:buChar char="•"/>
               <a:defRPr sz="2000" kern="1200">
                 <a:solidFill>
-                  <a:schemeClr val="tx1"/>
-                </a:solidFill>
-                <a:latin typeface="+mn-lt"/>
-                <a:ea typeface="+mn-ea"/>
-                <a:cs typeface="+mn-cs"/>
+                  <a:srgbClr val="000000"/>
+                </a:solidFill>
+                <a:latin typeface="Times New Roman"/>
+                <a:ea typeface="Times New Roman"/>
+                <a:cs typeface="Times New Roman"/>
               </a:defRPr>
             </a:lvl3pPr>
             <a:lvl4pPr marL="1600200" indent="-228600" algn="l" defTabSz="914400" rtl="0" eaLnBrk="1" latinLnBrk="0" hangingPunct="1">
@@ -9231,11 +9968,11 @@
               <a:buChar char="•"/>
               <a:defRPr sz="1800" kern="1200">
                 <a:solidFill>
-                  <a:schemeClr val="tx1"/>
-                </a:solidFill>
-                <a:latin typeface="+mn-lt"/>
-                <a:ea typeface="+mn-ea"/>
-                <a:cs typeface="+mn-cs"/>
+                  <a:srgbClr val="000000"/>
+                </a:solidFill>
+                <a:latin typeface="Times New Roman"/>
+                <a:ea typeface="Times New Roman"/>
+                <a:cs typeface="Times New Roman"/>
               </a:defRPr>
             </a:lvl4pPr>
             <a:lvl5pPr marL="2057400" indent="-228600" algn="l" defTabSz="914400" rtl="0" eaLnBrk="1" latinLnBrk="0" hangingPunct="1">
@@ -9249,11 +9986,11 @@
               <a:buChar char="•"/>
               <a:defRPr sz="1800" kern="1200">
                 <a:solidFill>
-                  <a:schemeClr val="tx1"/>
-                </a:solidFill>
-                <a:latin typeface="+mn-lt"/>
-                <a:ea typeface="+mn-ea"/>
-                <a:cs typeface="+mn-cs"/>
+                  <a:srgbClr val="000000"/>
+                </a:solidFill>
+                <a:latin typeface="Times New Roman"/>
+                <a:ea typeface="Times New Roman"/>
+                <a:cs typeface="Times New Roman"/>
               </a:defRPr>
             </a:lvl5pPr>
             <a:lvl6pPr marL="2514600" indent="-228600" algn="l" defTabSz="914400" rtl="0" eaLnBrk="1" latinLnBrk="0" hangingPunct="1">
@@ -9267,11 +10004,11 @@
               <a:buChar char="•"/>
               <a:defRPr sz="1800" kern="1200">
                 <a:solidFill>
-                  <a:schemeClr val="tx1"/>
-                </a:solidFill>
-                <a:latin typeface="+mn-lt"/>
-                <a:ea typeface="+mn-ea"/>
-                <a:cs typeface="+mn-cs"/>
+                  <a:srgbClr val="000000"/>
+                </a:solidFill>
+                <a:latin typeface="Times New Roman"/>
+                <a:ea typeface="Times New Roman"/>
+                <a:cs typeface="Times New Roman"/>
               </a:defRPr>
             </a:lvl6pPr>
             <a:lvl7pPr marL="2971800" indent="-228600" algn="l" defTabSz="914400" rtl="0" eaLnBrk="1" latinLnBrk="0" hangingPunct="1">
@@ -9285,11 +10022,11 @@
               <a:buChar char="•"/>
               <a:defRPr sz="1800" kern="1200">
                 <a:solidFill>
-                  <a:schemeClr val="tx1"/>
-                </a:solidFill>
-                <a:latin typeface="+mn-lt"/>
-                <a:ea typeface="+mn-ea"/>
-                <a:cs typeface="+mn-cs"/>
+                  <a:srgbClr val="000000"/>
+                </a:solidFill>
+                <a:latin typeface="Times New Roman"/>
+                <a:ea typeface="Times New Roman"/>
+                <a:cs typeface="Times New Roman"/>
               </a:defRPr>
             </a:lvl7pPr>
             <a:lvl8pPr marL="3429000" indent="-228600" algn="l" defTabSz="914400" rtl="0" eaLnBrk="1" latinLnBrk="0" hangingPunct="1">
@@ -9303,11 +10040,11 @@
               <a:buChar char="•"/>
               <a:defRPr sz="1800" kern="1200">
                 <a:solidFill>
-                  <a:schemeClr val="tx1"/>
-                </a:solidFill>
-                <a:latin typeface="+mn-lt"/>
-                <a:ea typeface="+mn-ea"/>
-                <a:cs typeface="+mn-cs"/>
+                  <a:srgbClr val="000000"/>
+                </a:solidFill>
+                <a:latin typeface="Times New Roman"/>
+                <a:ea typeface="Times New Roman"/>
+                <a:cs typeface="Times New Roman"/>
               </a:defRPr>
             </a:lvl8pPr>
             <a:lvl9pPr marL="3886200" indent="-228600" algn="l" defTabSz="914400" rtl="0" eaLnBrk="1" latinLnBrk="0" hangingPunct="1">
@@ -9321,11 +10058,11 @@
               <a:buChar char="•"/>
               <a:defRPr sz="1800" kern="1200">
                 <a:solidFill>
-                  <a:schemeClr val="tx1"/>
-                </a:solidFill>
-                <a:latin typeface="+mn-lt"/>
-                <a:ea typeface="+mn-ea"/>
-                <a:cs typeface="+mn-cs"/>
+                  <a:srgbClr val="000000"/>
+                </a:solidFill>
+                <a:latin typeface="Times New Roman"/>
+                <a:ea typeface="Times New Roman"/>
+                <a:cs typeface="Times New Roman"/>
               </a:defRPr>
             </a:lvl9pPr>
           </a:lstStyle>
@@ -9343,10 +10080,13 @@
               <a:buNone/>
             </a:pPr>
             <a:r>
-              <a:rPr sz="1700" b="1" i="0">
-                <a:solidFill>
-                  <a:srgbClr val="1F3864"/>
-                </a:solidFill>
+              <a:rPr sz="1870" b="1" i="0">
+                <a:solidFill>
+                  <a:srgbClr val="000000"/>
+                </a:solidFill>
+                <a:latin typeface="Times New Roman"/>
+                <a:ea typeface="Times New Roman"/>
+                <a:cs typeface="Times New Roman"/>
               </a:rPr>
               <a:t>Risk and Challenges</a:t>
             </a:r>
@@ -9365,26 +10105,35 @@
               <a:buNone/>
             </a:pPr>
             <a:r>
-              <a:rPr sz="1150" b="1">
-                <a:solidFill>
-                  <a:srgbClr val="C0500D"/>
-                </a:solidFill>
-              </a:rPr>
-              <a:t>▪  </a:t>
-            </a:r>
-            <a:r>
-              <a:rPr sz="1150" b="1" i="0">
-                <a:solidFill>
-                  <a:srgbClr val="262626"/>
-                </a:solidFill>
+              <a:rPr sz="1210" b="1">
+                <a:solidFill>
+                  <a:srgbClr val="000000"/>
+                </a:solidFill>
+                <a:latin typeface="Times New Roman"/>
+                <a:ea typeface="Times New Roman"/>
+                <a:cs typeface="Times New Roman"/>
+              </a:rPr>
+              <a:t>•  </a:t>
+            </a:r>
+            <a:r>
+              <a:rPr sz="1210" b="1" i="0">
+                <a:solidFill>
+                  <a:srgbClr val="000000"/>
+                </a:solidFill>
+                <a:latin typeface="Times New Roman"/>
+                <a:ea typeface="Times New Roman"/>
+                <a:cs typeface="Times New Roman"/>
               </a:rPr>
               <a:t>Severe class imbalance.</a:t>
             </a:r>
             <a:r>
-              <a:rPr sz="1150" b="0" i="0">
-                <a:solidFill>
-                  <a:srgbClr val="262626"/>
-                </a:solidFill>
+              <a:rPr sz="1210" b="0" i="0">
+                <a:solidFill>
+                  <a:srgbClr val="000000"/>
+                </a:solidFill>
+                <a:latin typeface="Times New Roman"/>
+                <a:ea typeface="Times New Roman"/>
+                <a:cs typeface="Times New Roman"/>
               </a:rPr>
               <a:t> Positives are 1.3–2.0 % of windows, so accuracy is misleading and naive training learns to answer “no flare” always.</a:t>
             </a:r>
@@ -9403,26 +10152,35 @@
               <a:buNone/>
             </a:pPr>
             <a:r>
-              <a:rPr sz="1150" b="1">
-                <a:solidFill>
-                  <a:srgbClr val="C0500D"/>
-                </a:solidFill>
-              </a:rPr>
-              <a:t>▪  </a:t>
-            </a:r>
-            <a:r>
-              <a:rPr sz="1150" b="1" i="0">
-                <a:solidFill>
-                  <a:srgbClr val="262626"/>
-                </a:solidFill>
+              <a:rPr sz="1210" b="1">
+                <a:solidFill>
+                  <a:srgbClr val="000000"/>
+                </a:solidFill>
+                <a:latin typeface="Times New Roman"/>
+                <a:ea typeface="Times New Roman"/>
+                <a:cs typeface="Times New Roman"/>
+              </a:rPr>
+              <a:t>•  </a:t>
+            </a:r>
+            <a:r>
+              <a:rPr sz="1210" b="1" i="0">
+                <a:solidFill>
+                  <a:srgbClr val="000000"/>
+                </a:solidFill>
+                <a:latin typeface="Times New Roman"/>
+                <a:ea typeface="Times New Roman"/>
+                <a:cs typeface="Times New Roman"/>
               </a:rPr>
               <a:t>Data leakage is the dominant failure mode</a:t>
             </a:r>
             <a:r>
-              <a:rPr sz="1150" b="0" i="0">
-                <a:solidFill>
-                  <a:srgbClr val="262626"/>
-                </a:solidFill>
+              <a:rPr sz="1210" b="0" i="0">
+                <a:solidFill>
+                  <a:srgbClr val="000000"/>
+                </a:solidFill>
+                <a:latin typeface="Times New Roman"/>
+                <a:ea typeface="Times New Roman"/>
+                <a:cs typeface="Times New Roman"/>
               </a:rPr>
               <a:t> in flare forecasting: overlapping windows and shuffled splits inflate published results.</a:t>
             </a:r>
@@ -9441,42 +10199,57 @@
               <a:buNone/>
             </a:pPr>
             <a:r>
-              <a:rPr sz="1150" b="1">
-                <a:solidFill>
-                  <a:srgbClr val="C0500D"/>
-                </a:solidFill>
-              </a:rPr>
-              <a:t>▪  </a:t>
-            </a:r>
-            <a:r>
-              <a:rPr sz="1150" b="1" i="0">
-                <a:solidFill>
-                  <a:srgbClr val="262626"/>
-                </a:solidFill>
+              <a:rPr sz="1210" b="1">
+                <a:solidFill>
+                  <a:srgbClr val="000000"/>
+                </a:solidFill>
+                <a:latin typeface="Times New Roman"/>
+                <a:ea typeface="Times New Roman"/>
+                <a:cs typeface="Times New Roman"/>
+              </a:rPr>
+              <a:t>•  </a:t>
+            </a:r>
+            <a:r>
+              <a:rPr sz="1210" b="1" i="0">
+                <a:solidFill>
+                  <a:srgbClr val="000000"/>
+                </a:solidFill>
+                <a:latin typeface="Times New Roman"/>
+                <a:ea typeface="Times New Roman"/>
+                <a:cs typeface="Times New Roman"/>
               </a:rPr>
               <a:t>Low precision.</a:t>
             </a:r>
             <a:r>
-              <a:rPr sz="1150" b="0" i="0">
-                <a:solidFill>
-                  <a:srgbClr val="262626"/>
-                </a:solidFill>
+              <a:rPr sz="1210" b="0" i="0">
+                <a:solidFill>
+                  <a:srgbClr val="000000"/>
+                </a:solidFill>
+                <a:latin typeface="Times New Roman"/>
+                <a:ea typeface="Times New Roman"/>
+                <a:cs typeface="Times New Roman"/>
               </a:rPr>
               <a:t> At the operating point, </a:t>
             </a:r>
             <a:r>
-              <a:rPr sz="1150" b="1" i="0">
-                <a:solidFill>
-                  <a:srgbClr val="262626"/>
-                </a:solidFill>
+              <a:rPr sz="1210" b="1" i="0">
+                <a:solidFill>
+                  <a:srgbClr val="000000"/>
+                </a:solidFill>
+                <a:latin typeface="Times New Roman"/>
+                <a:ea typeface="Times New Roman"/>
+                <a:cs typeface="Times New Roman"/>
               </a:rPr>
               <a:t>84 %</a:t>
             </a:r>
             <a:r>
-              <a:rPr sz="1150" b="0" i="0">
-                <a:solidFill>
-                  <a:srgbClr val="262626"/>
-                </a:solidFill>
+              <a:rPr sz="1210" b="0" i="0">
+                <a:solidFill>
+                  <a:srgbClr val="000000"/>
+                </a:solidFill>
+                <a:latin typeface="Times New Roman"/>
+                <a:ea typeface="Times New Roman"/>
+                <a:cs typeface="Times New Roman"/>
               </a:rPr>
               <a:t> of alerts are not followed by a major flare.</a:t>
             </a:r>
@@ -9495,26 +10268,35 @@
               <a:buNone/>
             </a:pPr>
             <a:r>
-              <a:rPr sz="1150" b="1">
-                <a:solidFill>
-                  <a:srgbClr val="C0500D"/>
-                </a:solidFill>
-              </a:rPr>
-              <a:t>▪  </a:t>
-            </a:r>
-            <a:r>
-              <a:rPr sz="1150" b="1" i="0">
-                <a:solidFill>
-                  <a:srgbClr val="262626"/>
-                </a:solidFill>
+              <a:rPr sz="1210" b="1">
+                <a:solidFill>
+                  <a:srgbClr val="000000"/>
+                </a:solidFill>
+                <a:latin typeface="Times New Roman"/>
+                <a:ea typeface="Times New Roman"/>
+                <a:cs typeface="Times New Roman"/>
+              </a:rPr>
+              <a:t>•  </a:t>
+            </a:r>
+            <a:r>
+              <a:rPr sz="1210" b="1" i="0">
+                <a:solidFill>
+                  <a:srgbClr val="000000"/>
+                </a:solidFill>
+                <a:latin typeface="Times New Roman"/>
+                <a:ea typeface="Times New Roman"/>
+                <a:cs typeface="Times New Roman"/>
               </a:rPr>
               <a:t>Outputs are not calibrated probabilities</a:t>
             </a:r>
             <a:r>
-              <a:rPr sz="1150" b="0" i="0">
-                <a:solidFill>
-                  <a:srgbClr val="262626"/>
-                </a:solidFill>
+              <a:rPr sz="1210" b="0" i="0">
+                <a:solidFill>
+                  <a:srgbClr val="000000"/>
+                </a:solidFill>
+                <a:latin typeface="Times New Roman"/>
+                <a:ea typeface="Times New Roman"/>
+                <a:cs typeface="Times New Roman"/>
               </a:rPr>
               <a:t> — they rank well but must not be read as literal chances.</a:t>
             </a:r>
@@ -9533,26 +10315,35 @@
               <a:buNone/>
             </a:pPr>
             <a:r>
-              <a:rPr sz="1150" b="1">
-                <a:solidFill>
-                  <a:srgbClr val="C0500D"/>
-                </a:solidFill>
-              </a:rPr>
-              <a:t>▪  </a:t>
-            </a:r>
-            <a:r>
-              <a:rPr sz="1150" b="1" i="0">
-                <a:solidFill>
-                  <a:srgbClr val="262626"/>
-                </a:solidFill>
+              <a:rPr sz="1210" b="1">
+                <a:solidFill>
+                  <a:srgbClr val="000000"/>
+                </a:solidFill>
+                <a:latin typeface="Times New Roman"/>
+                <a:ea typeface="Times New Roman"/>
+                <a:cs typeface="Times New Roman"/>
+              </a:rPr>
+              <a:t>•  </a:t>
+            </a:r>
+            <a:r>
+              <a:rPr sz="1210" b="1" i="0">
+                <a:solidFill>
+                  <a:srgbClr val="000000"/>
+                </a:solidFill>
+                <a:latin typeface="Times New Roman"/>
+                <a:ea typeface="Times New Roman"/>
+                <a:cs typeface="Times New Roman"/>
               </a:rPr>
               <a:t>Two raw partition archives (P2, P5) are corrupt</a:t>
             </a:r>
             <a:r>
-              <a:rPr sz="1150" b="0" i="0">
-                <a:solidFill>
-                  <a:srgbClr val="262626"/>
-                </a:solidFill>
+              <a:rPr sz="1210" b="0" i="0">
+                <a:solidFill>
+                  <a:srgbClr val="000000"/>
+                </a:solidFill>
+                <a:latin typeface="Times New Roman"/>
+                <a:ea typeface="Times New Roman"/>
+                <a:cs typeface="Times New Roman"/>
               </a:rPr>
               <a:t> gzip streams that fail silently mid-stream rather than raising an error.</a:t>
             </a:r>
@@ -9571,28 +10362,37 @@
               <a:buNone/>
             </a:pPr>
             <a:r>
-              <a:rPr sz="1150" b="1">
-                <a:solidFill>
-                  <a:srgbClr val="C0500D"/>
-                </a:solidFill>
-              </a:rPr>
-              <a:t>▪  </a:t>
-            </a:r>
-            <a:r>
-              <a:rPr sz="1150" b="1" i="0">
-                <a:solidFill>
-                  <a:srgbClr val="262626"/>
-                </a:solidFill>
-              </a:rPr>
-              <a:t>Retraining from scratch is not bit-identical</a:t>
-            </a:r>
-            <a:r>
-              <a:rPr sz="1150" b="0" i="0">
-                <a:solidFill>
-                  <a:srgbClr val="262626"/>
-                </a:solidFill>
-              </a:rPr>
-              <a:t> across operating systems and library versions.</a:t>
+              <a:rPr sz="1210" b="1">
+                <a:solidFill>
+                  <a:srgbClr val="000000"/>
+                </a:solidFill>
+                <a:latin typeface="Times New Roman"/>
+                <a:ea typeface="Times New Roman"/>
+                <a:cs typeface="Times New Roman"/>
+              </a:rPr>
+              <a:t>•  </a:t>
+            </a:r>
+            <a:r>
+              <a:rPr sz="1210" b="1" i="0">
+                <a:solidFill>
+                  <a:srgbClr val="000000"/>
+                </a:solidFill>
+                <a:latin typeface="Times New Roman"/>
+                <a:ea typeface="Times New Roman"/>
+                <a:cs typeface="Times New Roman"/>
+              </a:rPr>
+              <a:t>Retraining is not bit-identical</a:t>
+            </a:r>
+            <a:r>
+              <a:rPr sz="1210" b="0" i="0">
+                <a:solidFill>
+                  <a:srgbClr val="000000"/>
+                </a:solidFill>
+                <a:latin typeface="Times New Roman"/>
+                <a:ea typeface="Times New Roman"/>
+                <a:cs typeface="Times New Roman"/>
+              </a:rPr>
+              <a:t> across platforms.</a:t>
             </a:r>
           </a:p>
         </p:txBody>
@@ -9642,11 +10442,11 @@
               <a:buChar char="•"/>
               <a:defRPr sz="2800" kern="1200">
                 <a:solidFill>
-                  <a:schemeClr val="tx1"/>
-                </a:solidFill>
-                <a:latin typeface="+mn-lt"/>
-                <a:ea typeface="+mn-ea"/>
-                <a:cs typeface="+mn-cs"/>
+                  <a:srgbClr val="000000"/>
+                </a:solidFill>
+                <a:latin typeface="Times New Roman"/>
+                <a:ea typeface="Times New Roman"/>
+                <a:cs typeface="Times New Roman"/>
               </a:defRPr>
             </a:lvl1pPr>
             <a:lvl2pPr marL="685800" indent="-228600" algn="l" defTabSz="914400" rtl="0" eaLnBrk="1" latinLnBrk="0" hangingPunct="1">
@@ -9660,11 +10460,11 @@
               <a:buChar char="•"/>
               <a:defRPr sz="2400" kern="1200">
                 <a:solidFill>
-                  <a:schemeClr val="tx1"/>
-                </a:solidFill>
-                <a:latin typeface="+mn-lt"/>
-                <a:ea typeface="+mn-ea"/>
-                <a:cs typeface="+mn-cs"/>
+                  <a:srgbClr val="000000"/>
+                </a:solidFill>
+                <a:latin typeface="Times New Roman"/>
+                <a:ea typeface="Times New Roman"/>
+                <a:cs typeface="Times New Roman"/>
               </a:defRPr>
             </a:lvl2pPr>
             <a:lvl3pPr marL="1143000" indent="-228600" algn="l" defTabSz="914400" rtl="0" eaLnBrk="1" latinLnBrk="0" hangingPunct="1">
@@ -9678,11 +10478,11 @@
               <a:buChar char="•"/>
               <a:defRPr sz="2000" kern="1200">
                 <a:solidFill>
-                  <a:schemeClr val="tx1"/>
-                </a:solidFill>
-                <a:latin typeface="+mn-lt"/>
-                <a:ea typeface="+mn-ea"/>
-                <a:cs typeface="+mn-cs"/>
+                  <a:srgbClr val="000000"/>
+                </a:solidFill>
+                <a:latin typeface="Times New Roman"/>
+                <a:ea typeface="Times New Roman"/>
+                <a:cs typeface="Times New Roman"/>
               </a:defRPr>
             </a:lvl3pPr>
             <a:lvl4pPr marL="1600200" indent="-228600" algn="l" defTabSz="914400" rtl="0" eaLnBrk="1" latinLnBrk="0" hangingPunct="1">
@@ -9696,11 +10496,11 @@
               <a:buChar char="•"/>
               <a:defRPr sz="1800" kern="1200">
                 <a:solidFill>
-                  <a:schemeClr val="tx1"/>
-                </a:solidFill>
-                <a:latin typeface="+mn-lt"/>
-                <a:ea typeface="+mn-ea"/>
-                <a:cs typeface="+mn-cs"/>
+                  <a:srgbClr val="000000"/>
+                </a:solidFill>
+                <a:latin typeface="Times New Roman"/>
+                <a:ea typeface="Times New Roman"/>
+                <a:cs typeface="Times New Roman"/>
               </a:defRPr>
             </a:lvl4pPr>
             <a:lvl5pPr marL="2057400" indent="-228600" algn="l" defTabSz="914400" rtl="0" eaLnBrk="1" latinLnBrk="0" hangingPunct="1">
@@ -9714,11 +10514,11 @@
               <a:buChar char="•"/>
               <a:defRPr sz="1800" kern="1200">
                 <a:solidFill>
-                  <a:schemeClr val="tx1"/>
-                </a:solidFill>
-                <a:latin typeface="+mn-lt"/>
-                <a:ea typeface="+mn-ea"/>
-                <a:cs typeface="+mn-cs"/>
+                  <a:srgbClr val="000000"/>
+                </a:solidFill>
+                <a:latin typeface="Times New Roman"/>
+                <a:ea typeface="Times New Roman"/>
+                <a:cs typeface="Times New Roman"/>
               </a:defRPr>
             </a:lvl5pPr>
             <a:lvl6pPr marL="2514600" indent="-228600" algn="l" defTabSz="914400" rtl="0" eaLnBrk="1" latinLnBrk="0" hangingPunct="1">
@@ -9732,11 +10532,11 @@
               <a:buChar char="•"/>
               <a:defRPr sz="1800" kern="1200">
                 <a:solidFill>
-                  <a:schemeClr val="tx1"/>
-                </a:solidFill>
-                <a:latin typeface="+mn-lt"/>
-                <a:ea typeface="+mn-ea"/>
-                <a:cs typeface="+mn-cs"/>
+                  <a:srgbClr val="000000"/>
+                </a:solidFill>
+                <a:latin typeface="Times New Roman"/>
+                <a:ea typeface="Times New Roman"/>
+                <a:cs typeface="Times New Roman"/>
               </a:defRPr>
             </a:lvl6pPr>
             <a:lvl7pPr marL="2971800" indent="-228600" algn="l" defTabSz="914400" rtl="0" eaLnBrk="1" latinLnBrk="0" hangingPunct="1">
@@ -9750,11 +10550,11 @@
               <a:buChar char="•"/>
               <a:defRPr sz="1800" kern="1200">
                 <a:solidFill>
-                  <a:schemeClr val="tx1"/>
-                </a:solidFill>
-                <a:latin typeface="+mn-lt"/>
-                <a:ea typeface="+mn-ea"/>
-                <a:cs typeface="+mn-cs"/>
+                  <a:srgbClr val="000000"/>
+                </a:solidFill>
+                <a:latin typeface="Times New Roman"/>
+                <a:ea typeface="Times New Roman"/>
+                <a:cs typeface="Times New Roman"/>
               </a:defRPr>
             </a:lvl7pPr>
             <a:lvl8pPr marL="3429000" indent="-228600" algn="l" defTabSz="914400" rtl="0" eaLnBrk="1" latinLnBrk="0" hangingPunct="1">
@@ -9768,11 +10568,11 @@
               <a:buChar char="•"/>
               <a:defRPr sz="1800" kern="1200">
                 <a:solidFill>
-                  <a:schemeClr val="tx1"/>
-                </a:solidFill>
-                <a:latin typeface="+mn-lt"/>
-                <a:ea typeface="+mn-ea"/>
-                <a:cs typeface="+mn-cs"/>
+                  <a:srgbClr val="000000"/>
+                </a:solidFill>
+                <a:latin typeface="Times New Roman"/>
+                <a:ea typeface="Times New Roman"/>
+                <a:cs typeface="Times New Roman"/>
               </a:defRPr>
             </a:lvl8pPr>
             <a:lvl9pPr marL="3886200" indent="-228600" algn="l" defTabSz="914400" rtl="0" eaLnBrk="1" latinLnBrk="0" hangingPunct="1">
@@ -9786,11 +10586,11 @@
               <a:buChar char="•"/>
               <a:defRPr sz="1800" kern="1200">
                 <a:solidFill>
-                  <a:schemeClr val="tx1"/>
-                </a:solidFill>
-                <a:latin typeface="+mn-lt"/>
-                <a:ea typeface="+mn-ea"/>
-                <a:cs typeface="+mn-cs"/>
+                  <a:srgbClr val="000000"/>
+                </a:solidFill>
+                <a:latin typeface="Times New Roman"/>
+                <a:ea typeface="Times New Roman"/>
+                <a:cs typeface="Times New Roman"/>
               </a:defRPr>
             </a:lvl9pPr>
           </a:lstStyle>
@@ -9808,10 +10608,13 @@
               <a:buNone/>
             </a:pPr>
             <a:r>
-              <a:rPr sz="1700" b="1" i="0">
-                <a:solidFill>
-                  <a:srgbClr val="1F3864"/>
-                </a:solidFill>
+              <a:rPr sz="1870" b="1" i="0">
+                <a:solidFill>
+                  <a:srgbClr val="000000"/>
+                </a:solidFill>
+                <a:latin typeface="Times New Roman"/>
+                <a:ea typeface="Times New Roman"/>
+                <a:cs typeface="Times New Roman"/>
               </a:rPr>
               <a:t>Mitigation</a:t>
             </a:r>
@@ -9830,34 +10633,46 @@
               <a:buNone/>
             </a:pPr>
             <a:r>
-              <a:rPr sz="1150" b="1">
-                <a:solidFill>
-                  <a:srgbClr val="1E6B3A"/>
-                </a:solidFill>
-              </a:rPr>
-              <a:t>▪  </a:t>
-            </a:r>
-            <a:r>
-              <a:rPr sz="1150" b="0" i="0">
-                <a:solidFill>
-                  <a:srgbClr val="262626"/>
-                </a:solidFill>
+              <a:rPr sz="1270" b="1">
+                <a:solidFill>
+                  <a:srgbClr val="000000"/>
+                </a:solidFill>
+                <a:latin typeface="Times New Roman"/>
+                <a:ea typeface="Times New Roman"/>
+                <a:cs typeface="Times New Roman"/>
+              </a:rPr>
+              <a:t>•  </a:t>
+            </a:r>
+            <a:r>
+              <a:rPr sz="1270" b="0" i="0">
+                <a:solidFill>
+                  <a:srgbClr val="000000"/>
+                </a:solidFill>
+                <a:latin typeface="Times New Roman"/>
+                <a:ea typeface="Times New Roman"/>
+                <a:cs typeface="Times New Roman"/>
               </a:rPr>
               <a:t>Class weighting plus </a:t>
             </a:r>
             <a:r>
-              <a:rPr sz="1150" b="1" i="0">
-                <a:solidFill>
-                  <a:srgbClr val="262626"/>
-                </a:solidFill>
+              <a:rPr sz="1270" b="1" i="0">
+                <a:solidFill>
+                  <a:srgbClr val="000000"/>
+                </a:solidFill>
+                <a:latin typeface="Times New Roman"/>
+                <a:ea typeface="Times New Roman"/>
+                <a:cs typeface="Times New Roman"/>
               </a:rPr>
               <a:t>TSS / PR-AUC / HSS2</a:t>
             </a:r>
             <a:r>
-              <a:rPr sz="1150" b="0" i="0">
-                <a:solidFill>
-                  <a:srgbClr val="262626"/>
-                </a:solidFill>
+              <a:rPr sz="1270" b="0" i="0">
+                <a:solidFill>
+                  <a:srgbClr val="000000"/>
+                </a:solidFill>
+                <a:latin typeface="Times New Roman"/>
+                <a:ea typeface="Times New Roman"/>
+                <a:cs typeface="Times New Roman"/>
               </a:rPr>
               <a:t> reporting, with a climatology baseline for context, instead of accuracy.</a:t>
             </a:r>
@@ -9876,26 +10691,35 @@
               <a:buNone/>
             </a:pPr>
             <a:r>
-              <a:rPr sz="1150" b="1">
-                <a:solidFill>
-                  <a:srgbClr val="1E6B3A"/>
-                </a:solidFill>
-              </a:rPr>
-              <a:t>▪  </a:t>
-            </a:r>
-            <a:r>
-              <a:rPr sz="1150" b="0" i="0">
-                <a:solidFill>
-                  <a:srgbClr val="262626"/>
-                </a:solidFill>
+              <a:rPr sz="1270" b="1">
+                <a:solidFill>
+                  <a:srgbClr val="000000"/>
+                </a:solidFill>
+                <a:latin typeface="Times New Roman"/>
+                <a:ea typeface="Times New Roman"/>
+                <a:cs typeface="Times New Roman"/>
+              </a:rPr>
+              <a:t>•  </a:t>
+            </a:r>
+            <a:r>
+              <a:rPr sz="1270" b="0" i="0">
+                <a:solidFill>
+                  <a:srgbClr val="000000"/>
+                </a:solidFill>
+                <a:latin typeface="Times New Roman"/>
+                <a:ea typeface="Times New Roman"/>
+                <a:cs typeface="Times New Roman"/>
               </a:rPr>
               <a:t>Region-disjoint chronological splits, preprocessing fitted on train only, thresholds from validation only — enforced by </a:t>
             </a:r>
             <a:r>
-              <a:rPr sz="1150" b="1" i="0">
-                <a:solidFill>
-                  <a:srgbClr val="262626"/>
-                </a:solidFill>
+              <a:rPr sz="1270" b="1" i="0">
+                <a:solidFill>
+                  <a:srgbClr val="000000"/>
+                </a:solidFill>
+                <a:latin typeface="Times New Roman"/>
+                <a:ea typeface="Times New Roman"/>
+                <a:cs typeface="Times New Roman"/>
               </a:rPr>
               <a:t>21 automated leakage tests.</a:t>
             </a:r>
@@ -9914,34 +10738,46 @@
               <a:buNone/>
             </a:pPr>
             <a:r>
-              <a:rPr sz="1150" b="1">
-                <a:solidFill>
-                  <a:srgbClr val="1E6B3A"/>
-                </a:solidFill>
-              </a:rPr>
-              <a:t>▪  </a:t>
-            </a:r>
-            <a:r>
-              <a:rPr sz="1150" b="0" i="0">
-                <a:solidFill>
-                  <a:srgbClr val="262626"/>
-                </a:solidFill>
+              <a:rPr sz="1270" b="1">
+                <a:solidFill>
+                  <a:srgbClr val="000000"/>
+                </a:solidFill>
+                <a:latin typeface="Times New Roman"/>
+                <a:ea typeface="Times New Roman"/>
+                <a:cs typeface="Times New Roman"/>
+              </a:rPr>
+              <a:t>•  </a:t>
+            </a:r>
+            <a:r>
+              <a:rPr sz="1270" b="0" i="0">
+                <a:solidFill>
+                  <a:srgbClr val="000000"/>
+                </a:solidFill>
+                <a:latin typeface="Times New Roman"/>
+                <a:ea typeface="Times New Roman"/>
+                <a:cs typeface="Times New Roman"/>
               </a:rPr>
               <a:t>Precision is published rather than hidden, and an operating-point view exposes the trade-off. </a:t>
             </a:r>
             <a:r>
-              <a:rPr sz="1150" b="1" i="0">
-                <a:solidFill>
-                  <a:srgbClr val="262626"/>
-                </a:solidFill>
+              <a:rPr sz="1270" b="1" i="0">
+                <a:solidFill>
+                  <a:srgbClr val="000000"/>
+                </a:solidFill>
+                <a:latin typeface="Times New Roman"/>
+                <a:ea typeface="Times New Roman"/>
+                <a:cs typeface="Times New Roman"/>
               </a:rPr>
               <a:t>78 %</a:t>
             </a:r>
             <a:r>
-              <a:rPr sz="1150" b="0" i="0">
-                <a:solidFill>
-                  <a:srgbClr val="262626"/>
-                </a:solidFill>
+              <a:rPr sz="1270" b="0" i="0">
+                <a:solidFill>
+                  <a:srgbClr val="000000"/>
+                </a:solidFill>
+                <a:latin typeface="Times New Roman"/>
+                <a:ea typeface="Times New Roman"/>
+                <a:cs typeface="Times New Roman"/>
               </a:rPr>
               <a:t> of the false alarms did precede a real B- or C-class flare.</a:t>
             </a:r>
@@ -9960,18 +10796,24 @@
               <a:buNone/>
             </a:pPr>
             <a:r>
-              <a:rPr sz="1150" b="1">
-                <a:solidFill>
-                  <a:srgbClr val="1E6B3A"/>
-                </a:solidFill>
-              </a:rPr>
-              <a:t>▪  </a:t>
-            </a:r>
-            <a:r>
-              <a:rPr sz="1150" b="0" i="0">
-                <a:solidFill>
-                  <a:srgbClr val="262626"/>
-                </a:solidFill>
+              <a:rPr sz="1270" b="1">
+                <a:solidFill>
+                  <a:srgbClr val="000000"/>
+                </a:solidFill>
+                <a:latin typeface="Times New Roman"/>
+                <a:ea typeface="Times New Roman"/>
+                <a:cs typeface="Times New Roman"/>
+              </a:rPr>
+              <a:t>•  </a:t>
+            </a:r>
+            <a:r>
+              <a:rPr sz="1270" b="0" i="0">
+                <a:solidFill>
+                  <a:srgbClr val="000000"/>
+                </a:solidFill>
+                <a:latin typeface="Times New Roman"/>
+                <a:ea typeface="Times New Roman"/>
+                <a:cs typeface="Times New Roman"/>
               </a:rPr>
               <a:t>Archive integrity is verified before extraction; frozen artefacts are committed and write-protected in code.</a:t>
             </a:r>
@@ -9994,15 +10836,15 @@
         </p:blipFill>
         <p:spPr>
           <a:xfrm>
-            <a:off x="6355080" y="3657600"/>
-            <a:ext cx="5193792" cy="982267"/>
+            <a:off x="6483096" y="3877056"/>
+            <a:ext cx="4937760" cy="933845"/>
           </a:xfrm>
           <a:prstGeom prst="rect">
             <a:avLst/>
           </a:prstGeom>
           <a:ln w="9525">
             <a:solidFill>
-              <a:srgbClr val="BFBFBF"/>
+              <a:srgbClr val="000000"/>
             </a:solidFill>
           </a:ln>
         </p:spPr>
@@ -10015,8 +10857,8 @@
         </p:nvSpPr>
         <p:spPr>
           <a:xfrm>
-            <a:off x="6355080" y="4663440"/>
-            <a:ext cx="5193792" cy="237744"/>
+            <a:off x="6483096" y="4828032"/>
+            <a:ext cx="4937760" cy="237744"/>
           </a:xfrm>
           <a:prstGeom prst="rect">
             <a:avLst/>
@@ -10033,10 +10875,13 @@
               <a:buNone/>
             </a:pPr>
             <a:r>
-              <a:rPr sz="950" b="0" i="1">
-                <a:solidFill>
-                  <a:srgbClr val="595959"/>
-                </a:solidFill>
+              <a:rPr sz="1050" b="0" i="1">
+                <a:solidFill>
+                  <a:srgbClr val="000000"/>
+                </a:solidFill>
+                <a:latin typeface="Times New Roman"/>
+                <a:ea typeface="Times New Roman"/>
+                <a:cs typeface="Times New Roman"/>
               </a:rPr>
               <a:t>Moving the threshold shows what each choice costs.</a:t>
             </a:r>
@@ -10059,15 +10904,15 @@
         </p:blipFill>
         <p:spPr>
           <a:xfrm>
-            <a:off x="6355080" y="5029200"/>
-            <a:ext cx="5193792" cy="1053935"/>
+            <a:off x="6483096" y="5084064"/>
+            <a:ext cx="4937760" cy="1001980"/>
           </a:xfrm>
           <a:prstGeom prst="rect">
             <a:avLst/>
           </a:prstGeom>
           <a:ln w="9525">
             <a:solidFill>
-              <a:srgbClr val="BFBFBF"/>
+              <a:srgbClr val="000000"/>
             </a:solidFill>
           </a:ln>
         </p:spPr>
@@ -10080,8 +10925,8 @@
         </p:nvSpPr>
         <p:spPr>
           <a:xfrm>
-            <a:off x="6355080" y="6108192"/>
-            <a:ext cx="5193792" cy="237744"/>
+            <a:off x="6483096" y="6099048"/>
+            <a:ext cx="4937760" cy="237744"/>
           </a:xfrm>
           <a:prstGeom prst="rect">
             <a:avLst/>
@@ -10098,10 +10943,13 @@
               <a:buNone/>
             </a:pPr>
             <a:r>
-              <a:rPr sz="950" b="0" i="1">
-                <a:solidFill>
-                  <a:srgbClr val="595959"/>
-                </a:solidFill>
+              <a:rPr sz="1050" b="0" i="1">
+                <a:solidFill>
+                  <a:srgbClr val="000000"/>
+                </a:solidFill>
+                <a:latin typeface="Times New Roman"/>
+                <a:ea typeface="Times New Roman"/>
+                <a:cs typeface="Times New Roman"/>
               </a:rPr>
               <a:t>An uncalibrated probability is delivered as a three-level band.</a:t>
             </a:r>
@@ -10178,15 +11026,23 @@
             <a:pPr algn="ctr"/>
             <a:r>
               <a:rPr lang="en-IN" sz="3200" dirty="0">
+                <a:solidFill>
+                  <a:srgbClr val="000000"/>
+                </a:solidFill>
                 <a:latin typeface="Times New Roman" panose="02020603050405020304" pitchFamily="18" charset="0"/>
-                <a:cs typeface="Times New Roman" panose="02020603050405020304" pitchFamily="18" charset="0"/>
+                <a:ea typeface="Times New Roman"/>
+                <a:cs typeface="Times New Roman"/>
               </a:rPr>
               <a:t> </a:t>
             </a:r>
             <a:r>
               <a:rPr lang="en-IN" sz="3200" b="1" dirty="0">
+                <a:solidFill>
+                  <a:srgbClr val="000000"/>
+                </a:solidFill>
                 <a:latin typeface="Times New Roman" panose="02020603050405020304" pitchFamily="18" charset="0"/>
-                <a:cs typeface="Times New Roman" panose="02020603050405020304" pitchFamily="18" charset="0"/>
+                <a:ea typeface="Times New Roman"/>
+                <a:cs typeface="Times New Roman"/>
               </a:rPr>
               <a:t>Result and Applications </a:t>
             </a:r>
@@ -10215,10 +11071,24 @@
           <a:lstStyle/>
           <a:p>
             <a:fld id="{B4EE2AE5-9218-4A07-842F-E84162EAAD55}" type="slidenum">
-              <a:rPr lang="en-IN" smtClean="0"/>
+              <a:rPr lang="en-IN" smtClean="0">
+                <a:solidFill>
+                  <a:srgbClr val="000000"/>
+                </a:solidFill>
+                <a:latin typeface="Times New Roman"/>
+                <a:ea typeface="Times New Roman"/>
+                <a:cs typeface="Times New Roman"/>
+              </a:rPr>
               <a:t>6</a:t>
             </a:fld>
-            <a:endParaRPr lang="en-IN" dirty="0"/>
+            <a:endParaRPr lang="en-IN" dirty="0">
+              <a:solidFill>
+                <a:srgbClr val="000000"/>
+              </a:solidFill>
+              <a:latin typeface="Times New Roman"/>
+              <a:ea typeface="Times New Roman"/>
+              <a:cs typeface="Times New Roman"/>
+            </a:endParaRPr>
           </a:p>
         </p:txBody>
       </p:sp>
@@ -10244,10 +11114,24 @@
           <a:lstStyle/>
           <a:p>
             <a:r>
-              <a:rPr lang="en-US"/>
+              <a:rPr lang="en-US">
+                <a:solidFill>
+                  <a:srgbClr val="000000"/>
+                </a:solidFill>
+                <a:latin typeface="Times New Roman"/>
+                <a:ea typeface="Times New Roman"/>
+                <a:cs typeface="Times New Roman"/>
+              </a:rPr>
               <a:t>Date: 07/10/2026</a:t>
             </a:r>
-            <a:endParaRPr lang="en-IN" dirty="0"/>
+            <a:endParaRPr lang="en-IN" dirty="0">
+              <a:solidFill>
+                <a:srgbClr val="000000"/>
+              </a:solidFill>
+              <a:latin typeface="Times New Roman"/>
+              <a:ea typeface="Times New Roman"/>
+              <a:cs typeface="Times New Roman"/>
+            </a:endParaRPr>
           </a:p>
         </p:txBody>
       </p:sp>
@@ -10309,10 +11193,24 @@
           <a:lstStyle/>
           <a:p>
             <a:r>
-              <a:rPr lang="en-US" dirty="0"/>
+              <a:rPr lang="en-US" dirty="0">
+                <a:solidFill>
+                  <a:srgbClr val="000000"/>
+                </a:solidFill>
+                <a:latin typeface="Times New Roman"/>
+                <a:ea typeface="Times New Roman"/>
+                <a:cs typeface="Times New Roman"/>
+              </a:rPr>
               <a:t>II–Year PBL Project Final Review</a:t>
             </a:r>
-            <a:endParaRPr lang="en-IN" dirty="0"/>
+            <a:endParaRPr lang="en-IN" dirty="0">
+              <a:solidFill>
+                <a:srgbClr val="000000"/>
+              </a:solidFill>
+              <a:latin typeface="Times New Roman"/>
+              <a:ea typeface="Times New Roman"/>
+              <a:cs typeface="Times New Roman"/>
+            </a:endParaRPr>
           </a:p>
         </p:txBody>
       </p:sp>
@@ -10361,11 +11259,11 @@
               <a:buChar char="•"/>
               <a:defRPr sz="2800" kern="1200">
                 <a:solidFill>
-                  <a:schemeClr val="tx1"/>
-                </a:solidFill>
-                <a:latin typeface="+mn-lt"/>
-                <a:ea typeface="+mn-ea"/>
-                <a:cs typeface="+mn-cs"/>
+                  <a:srgbClr val="000000"/>
+                </a:solidFill>
+                <a:latin typeface="Times New Roman"/>
+                <a:ea typeface="Times New Roman"/>
+                <a:cs typeface="Times New Roman"/>
               </a:defRPr>
             </a:lvl1pPr>
             <a:lvl2pPr marL="685800" indent="-228600" algn="l" defTabSz="914400" rtl="0" eaLnBrk="1" latinLnBrk="0" hangingPunct="1">
@@ -10379,11 +11277,11 @@
               <a:buChar char="•"/>
               <a:defRPr sz="2400" kern="1200">
                 <a:solidFill>
-                  <a:schemeClr val="tx1"/>
-                </a:solidFill>
-                <a:latin typeface="+mn-lt"/>
-                <a:ea typeface="+mn-ea"/>
-                <a:cs typeface="+mn-cs"/>
+                  <a:srgbClr val="000000"/>
+                </a:solidFill>
+                <a:latin typeface="Times New Roman"/>
+                <a:ea typeface="Times New Roman"/>
+                <a:cs typeface="Times New Roman"/>
               </a:defRPr>
             </a:lvl2pPr>
             <a:lvl3pPr marL="1143000" indent="-228600" algn="l" defTabSz="914400" rtl="0" eaLnBrk="1" latinLnBrk="0" hangingPunct="1">
@@ -10397,11 +11295,11 @@
               <a:buChar char="•"/>
               <a:defRPr sz="2000" kern="1200">
                 <a:solidFill>
-                  <a:schemeClr val="tx1"/>
-                </a:solidFill>
-                <a:latin typeface="+mn-lt"/>
-                <a:ea typeface="+mn-ea"/>
-                <a:cs typeface="+mn-cs"/>
+                  <a:srgbClr val="000000"/>
+                </a:solidFill>
+                <a:latin typeface="Times New Roman"/>
+                <a:ea typeface="Times New Roman"/>
+                <a:cs typeface="Times New Roman"/>
               </a:defRPr>
             </a:lvl3pPr>
             <a:lvl4pPr marL="1600200" indent="-228600" algn="l" defTabSz="914400" rtl="0" eaLnBrk="1" latinLnBrk="0" hangingPunct="1">
@@ -10415,11 +11313,11 @@
               <a:buChar char="•"/>
               <a:defRPr sz="1800" kern="1200">
                 <a:solidFill>
-                  <a:schemeClr val="tx1"/>
-                </a:solidFill>
-                <a:latin typeface="+mn-lt"/>
-                <a:ea typeface="+mn-ea"/>
-                <a:cs typeface="+mn-cs"/>
+                  <a:srgbClr val="000000"/>
+                </a:solidFill>
+                <a:latin typeface="Times New Roman"/>
+                <a:ea typeface="Times New Roman"/>
+                <a:cs typeface="Times New Roman"/>
               </a:defRPr>
             </a:lvl4pPr>
             <a:lvl5pPr marL="2057400" indent="-228600" algn="l" defTabSz="914400" rtl="0" eaLnBrk="1" latinLnBrk="0" hangingPunct="1">
@@ -10433,11 +11331,11 @@
               <a:buChar char="•"/>
               <a:defRPr sz="1800" kern="1200">
                 <a:solidFill>
-                  <a:schemeClr val="tx1"/>
-                </a:solidFill>
-                <a:latin typeface="+mn-lt"/>
-                <a:ea typeface="+mn-ea"/>
-                <a:cs typeface="+mn-cs"/>
+                  <a:srgbClr val="000000"/>
+                </a:solidFill>
+                <a:latin typeface="Times New Roman"/>
+                <a:ea typeface="Times New Roman"/>
+                <a:cs typeface="Times New Roman"/>
               </a:defRPr>
             </a:lvl5pPr>
             <a:lvl6pPr marL="2514600" indent="-228600" algn="l" defTabSz="914400" rtl="0" eaLnBrk="1" latinLnBrk="0" hangingPunct="1">
@@ -10451,11 +11349,11 @@
               <a:buChar char="•"/>
               <a:defRPr sz="1800" kern="1200">
                 <a:solidFill>
-                  <a:schemeClr val="tx1"/>
-                </a:solidFill>
-                <a:latin typeface="+mn-lt"/>
-                <a:ea typeface="+mn-ea"/>
-                <a:cs typeface="+mn-cs"/>
+                  <a:srgbClr val="000000"/>
+                </a:solidFill>
+                <a:latin typeface="Times New Roman"/>
+                <a:ea typeface="Times New Roman"/>
+                <a:cs typeface="Times New Roman"/>
               </a:defRPr>
             </a:lvl6pPr>
             <a:lvl7pPr marL="2971800" indent="-228600" algn="l" defTabSz="914400" rtl="0" eaLnBrk="1" latinLnBrk="0" hangingPunct="1">
@@ -10469,11 +11367,11 @@
               <a:buChar char="•"/>
               <a:defRPr sz="1800" kern="1200">
                 <a:solidFill>
-                  <a:schemeClr val="tx1"/>
-                </a:solidFill>
-                <a:latin typeface="+mn-lt"/>
-                <a:ea typeface="+mn-ea"/>
-                <a:cs typeface="+mn-cs"/>
+                  <a:srgbClr val="000000"/>
+                </a:solidFill>
+                <a:latin typeface="Times New Roman"/>
+                <a:ea typeface="Times New Roman"/>
+                <a:cs typeface="Times New Roman"/>
               </a:defRPr>
             </a:lvl7pPr>
             <a:lvl8pPr marL="3429000" indent="-228600" algn="l" defTabSz="914400" rtl="0" eaLnBrk="1" latinLnBrk="0" hangingPunct="1">
@@ -10487,11 +11385,11 @@
               <a:buChar char="•"/>
               <a:defRPr sz="1800" kern="1200">
                 <a:solidFill>
-                  <a:schemeClr val="tx1"/>
-                </a:solidFill>
-                <a:latin typeface="+mn-lt"/>
-                <a:ea typeface="+mn-ea"/>
-                <a:cs typeface="+mn-cs"/>
+                  <a:srgbClr val="000000"/>
+                </a:solidFill>
+                <a:latin typeface="Times New Roman"/>
+                <a:ea typeface="Times New Roman"/>
+                <a:cs typeface="Times New Roman"/>
               </a:defRPr>
             </a:lvl8pPr>
             <a:lvl9pPr marL="3886200" indent="-228600" algn="l" defTabSz="914400" rtl="0" eaLnBrk="1" latinLnBrk="0" hangingPunct="1">
@@ -10505,11 +11403,11 @@
               <a:buChar char="•"/>
               <a:defRPr sz="1800" kern="1200">
                 <a:solidFill>
-                  <a:schemeClr val="tx1"/>
-                </a:solidFill>
-                <a:latin typeface="+mn-lt"/>
-                <a:ea typeface="+mn-ea"/>
-                <a:cs typeface="+mn-cs"/>
+                  <a:srgbClr val="000000"/>
+                </a:solidFill>
+                <a:latin typeface="Times New Roman"/>
+                <a:ea typeface="Times New Roman"/>
+                <a:cs typeface="Times New Roman"/>
               </a:defRPr>
             </a:lvl9pPr>
           </a:lstStyle>
@@ -10527,10 +11425,13 @@
               <a:buNone/>
             </a:pPr>
             <a:r>
-              <a:rPr sz="1700" b="1" i="0">
-                <a:solidFill>
-                  <a:srgbClr val="1F3864"/>
-                </a:solidFill>
+              <a:rPr sz="1870" b="1" i="0">
+                <a:solidFill>
+                  <a:srgbClr val="000000"/>
+                </a:solidFill>
+                <a:latin typeface="Times New Roman"/>
+                <a:ea typeface="Times New Roman"/>
+                <a:cs typeface="Times New Roman"/>
               </a:rPr>
               <a:t>Project Output  —  interactive dashboard, evaluated on 75,365 unseen windows</a:t>
             </a:r>
@@ -10582,11 +11483,11 @@
               <a:buChar char="•"/>
               <a:defRPr sz="2800" kern="1200">
                 <a:solidFill>
-                  <a:schemeClr val="tx1"/>
-                </a:solidFill>
-                <a:latin typeface="+mn-lt"/>
-                <a:ea typeface="+mn-ea"/>
-                <a:cs typeface="+mn-cs"/>
+                  <a:srgbClr val="000000"/>
+                </a:solidFill>
+                <a:latin typeface="Times New Roman"/>
+                <a:ea typeface="Times New Roman"/>
+                <a:cs typeface="Times New Roman"/>
               </a:defRPr>
             </a:lvl1pPr>
             <a:lvl2pPr marL="685800" indent="-228600" algn="l" defTabSz="914400" rtl="0" eaLnBrk="1" latinLnBrk="0" hangingPunct="1">
@@ -10600,11 +11501,11 @@
               <a:buChar char="•"/>
               <a:defRPr sz="2400" kern="1200">
                 <a:solidFill>
-                  <a:schemeClr val="tx1"/>
-                </a:solidFill>
-                <a:latin typeface="+mn-lt"/>
-                <a:ea typeface="+mn-ea"/>
-                <a:cs typeface="+mn-cs"/>
+                  <a:srgbClr val="000000"/>
+                </a:solidFill>
+                <a:latin typeface="Times New Roman"/>
+                <a:ea typeface="Times New Roman"/>
+                <a:cs typeface="Times New Roman"/>
               </a:defRPr>
             </a:lvl2pPr>
             <a:lvl3pPr marL="1143000" indent="-228600" algn="l" defTabSz="914400" rtl="0" eaLnBrk="1" latinLnBrk="0" hangingPunct="1">
@@ -10618,11 +11519,11 @@
               <a:buChar char="•"/>
               <a:defRPr sz="2000" kern="1200">
                 <a:solidFill>
-                  <a:schemeClr val="tx1"/>
-                </a:solidFill>
-                <a:latin typeface="+mn-lt"/>
-                <a:ea typeface="+mn-ea"/>
-                <a:cs typeface="+mn-cs"/>
+                  <a:srgbClr val="000000"/>
+                </a:solidFill>
+                <a:latin typeface="Times New Roman"/>
+                <a:ea typeface="Times New Roman"/>
+                <a:cs typeface="Times New Roman"/>
               </a:defRPr>
             </a:lvl3pPr>
             <a:lvl4pPr marL="1600200" indent="-228600" algn="l" defTabSz="914400" rtl="0" eaLnBrk="1" latinLnBrk="0" hangingPunct="1">
@@ -10636,11 +11537,11 @@
               <a:buChar char="•"/>
               <a:defRPr sz="1800" kern="1200">
                 <a:solidFill>
-                  <a:schemeClr val="tx1"/>
-                </a:solidFill>
-                <a:latin typeface="+mn-lt"/>
-                <a:ea typeface="+mn-ea"/>
-                <a:cs typeface="+mn-cs"/>
+                  <a:srgbClr val="000000"/>
+                </a:solidFill>
+                <a:latin typeface="Times New Roman"/>
+                <a:ea typeface="Times New Roman"/>
+                <a:cs typeface="Times New Roman"/>
               </a:defRPr>
             </a:lvl4pPr>
             <a:lvl5pPr marL="2057400" indent="-228600" algn="l" defTabSz="914400" rtl="0" eaLnBrk="1" latinLnBrk="0" hangingPunct="1">
@@ -10654,11 +11555,11 @@
               <a:buChar char="•"/>
               <a:defRPr sz="1800" kern="1200">
                 <a:solidFill>
-                  <a:schemeClr val="tx1"/>
-                </a:solidFill>
-                <a:latin typeface="+mn-lt"/>
-                <a:ea typeface="+mn-ea"/>
-                <a:cs typeface="+mn-cs"/>
+                  <a:srgbClr val="000000"/>
+                </a:solidFill>
+                <a:latin typeface="Times New Roman"/>
+                <a:ea typeface="Times New Roman"/>
+                <a:cs typeface="Times New Roman"/>
               </a:defRPr>
             </a:lvl5pPr>
             <a:lvl6pPr marL="2514600" indent="-228600" algn="l" defTabSz="914400" rtl="0" eaLnBrk="1" latinLnBrk="0" hangingPunct="1">
@@ -10672,11 +11573,11 @@
               <a:buChar char="•"/>
               <a:defRPr sz="1800" kern="1200">
                 <a:solidFill>
-                  <a:schemeClr val="tx1"/>
-                </a:solidFill>
-                <a:latin typeface="+mn-lt"/>
-                <a:ea typeface="+mn-ea"/>
-                <a:cs typeface="+mn-cs"/>
+                  <a:srgbClr val="000000"/>
+                </a:solidFill>
+                <a:latin typeface="Times New Roman"/>
+                <a:ea typeface="Times New Roman"/>
+                <a:cs typeface="Times New Roman"/>
               </a:defRPr>
             </a:lvl6pPr>
             <a:lvl7pPr marL="2971800" indent="-228600" algn="l" defTabSz="914400" rtl="0" eaLnBrk="1" latinLnBrk="0" hangingPunct="1">
@@ -10690,11 +11591,11 @@
               <a:buChar char="•"/>
               <a:defRPr sz="1800" kern="1200">
                 <a:solidFill>
-                  <a:schemeClr val="tx1"/>
-                </a:solidFill>
-                <a:latin typeface="+mn-lt"/>
-                <a:ea typeface="+mn-ea"/>
-                <a:cs typeface="+mn-cs"/>
+                  <a:srgbClr val="000000"/>
+                </a:solidFill>
+                <a:latin typeface="Times New Roman"/>
+                <a:ea typeface="Times New Roman"/>
+                <a:cs typeface="Times New Roman"/>
               </a:defRPr>
             </a:lvl7pPr>
             <a:lvl8pPr marL="3429000" indent="-228600" algn="l" defTabSz="914400" rtl="0" eaLnBrk="1" latinLnBrk="0" hangingPunct="1">
@@ -10708,11 +11609,11 @@
               <a:buChar char="•"/>
               <a:defRPr sz="1800" kern="1200">
                 <a:solidFill>
-                  <a:schemeClr val="tx1"/>
-                </a:solidFill>
-                <a:latin typeface="+mn-lt"/>
-                <a:ea typeface="+mn-ea"/>
-                <a:cs typeface="+mn-cs"/>
+                  <a:srgbClr val="000000"/>
+                </a:solidFill>
+                <a:latin typeface="Times New Roman"/>
+                <a:ea typeface="Times New Roman"/>
+                <a:cs typeface="Times New Roman"/>
               </a:defRPr>
             </a:lvl8pPr>
             <a:lvl9pPr marL="3886200" indent="-228600" algn="l" defTabSz="914400" rtl="0" eaLnBrk="1" latinLnBrk="0" hangingPunct="1">
@@ -10726,11 +11627,11 @@
               <a:buChar char="•"/>
               <a:defRPr sz="1800" kern="1200">
                 <a:solidFill>
-                  <a:schemeClr val="tx1"/>
-                </a:solidFill>
-                <a:latin typeface="+mn-lt"/>
-                <a:ea typeface="+mn-ea"/>
-                <a:cs typeface="+mn-cs"/>
+                  <a:srgbClr val="000000"/>
+                </a:solidFill>
+                <a:latin typeface="Times New Roman"/>
+                <a:ea typeface="Times New Roman"/>
+                <a:cs typeface="Times New Roman"/>
               </a:defRPr>
             </a:lvl9pPr>
           </a:lstStyle>
@@ -10748,10 +11649,13 @@
               <a:buNone/>
             </a:pPr>
             <a:r>
-              <a:rPr sz="1600" b="1" i="0">
-                <a:solidFill>
-                  <a:srgbClr val="1F3864"/>
-                </a:solidFill>
+              <a:rPr sz="1760" b="1" i="0">
+                <a:solidFill>
+                  <a:srgbClr val="000000"/>
+                </a:solidFill>
+                <a:latin typeface="Times New Roman"/>
+                <a:ea typeface="Times New Roman"/>
+                <a:cs typeface="Times New Roman"/>
               </a:rPr>
               <a:t>Applications</a:t>
             </a:r>
@@ -10770,10 +11674,13 @@
               <a:buNone/>
             </a:pPr>
             <a:r>
-              <a:rPr sz="1200" b="0" i="0">
-                <a:solidFill>
-                  <a:srgbClr val="262626"/>
-                </a:solidFill>
+              <a:rPr sz="1320" b="0" i="0">
+                <a:solidFill>
+                  <a:srgbClr val="000000"/>
+                </a:solidFill>
+                <a:latin typeface="Times New Roman"/>
+                <a:ea typeface="Times New Roman"/>
+                <a:cs typeface="Times New Roman"/>
               </a:rPr>
               <a:t>Satellite operations (safe-mode and manoeuvre scheduling) · Polar-route aviation (HF-radio and radiation planning) · Power-grid readiness against geomagnetically induced currents · Launch and spacewalk scheduling · Space-agency situational awareness · A teaching benchmark for severely imbalanced time-series forecasting.</a:t>
             </a:r>
@@ -10828,7 +11735,7 @@
           </a:prstGeom>
           <a:ln w="9525">
             <a:solidFill>
-              <a:srgbClr val="BFBFBF"/>
+              <a:srgbClr val="000000"/>
             </a:solidFill>
           </a:ln>
         </p:spPr>
@@ -10857,7 +11764,7 @@
           </a:prstGeom>
           <a:ln w="9525">
             <a:solidFill>
-              <a:srgbClr val="BFBFBF"/>
+              <a:srgbClr val="000000"/>
             </a:solidFill>
           </a:ln>
         </p:spPr>
@@ -10888,10 +11795,13 @@
               <a:buNone/>
             </a:pPr>
             <a:r>
-              <a:rPr sz="900" b="0" i="1">
-                <a:solidFill>
-                  <a:srgbClr val="595959"/>
-                </a:solidFill>
+              <a:rPr sz="990" b="0" i="1">
+                <a:solidFill>
+                  <a:srgbClr val="000000"/>
+                </a:solidFill>
+                <a:latin typeface="Times New Roman"/>
+                <a:ea typeface="Times New Roman"/>
+                <a:cs typeface="Times New Roman"/>
               </a:rPr>
               <a:t>Replay of a real active region (HARP 7115, September 2017): the forecast crosses the alert threshold and stays high through the X1.3 flare.</a:t>
             </a:r>
@@ -10924,10 +11834,13 @@
               <a:buNone/>
             </a:pPr>
             <a:r>
-              <a:rPr sz="900" b="0" i="1">
-                <a:solidFill>
-                  <a:srgbClr val="595959"/>
-                </a:solidFill>
+              <a:rPr sz="990" b="0" i="1">
+                <a:solidFill>
+                  <a:srgbClr val="000000"/>
+                </a:solidFill>
+                <a:latin typeface="Times New Roman"/>
+                <a:ea typeface="Times New Roman"/>
+                <a:cs typeface="Times New Roman"/>
               </a:rPr>
               <a:t>Confusion matrix on the locked test partition.</a:t>
             </a:r>
@@ -10960,82 +11873,112 @@
               <a:buNone/>
             </a:pPr>
             <a:r>
-              <a:rPr sz="1200" b="1" i="0">
-                <a:solidFill>
-                  <a:srgbClr val="262626"/>
-                </a:solidFill>
+              <a:rPr sz="1320" b="1" i="0">
+                <a:solidFill>
+                  <a:srgbClr val="000000"/>
+                </a:solidFill>
+                <a:latin typeface="Times New Roman"/>
+                <a:ea typeface="Times New Roman"/>
+                <a:cs typeface="Times New Roman"/>
               </a:rPr>
               <a:t>907 of 990</a:t>
             </a:r>
             <a:r>
-              <a:rPr sz="1200" b="0" i="0">
-                <a:solidFill>
-                  <a:srgbClr val="262626"/>
-                </a:solidFill>
+              <a:rPr sz="1320" b="0" i="0">
+                <a:solidFill>
+                  <a:srgbClr val="000000"/>
+                </a:solidFill>
+                <a:latin typeface="Times New Roman"/>
+                <a:ea typeface="Times New Roman"/>
+                <a:cs typeface="Times New Roman"/>
               </a:rPr>
               <a:t> flare-producing windows were caught (</a:t>
             </a:r>
             <a:r>
-              <a:rPr sz="1200" b="1" i="0">
-                <a:solidFill>
-                  <a:srgbClr val="262626"/>
-                </a:solidFill>
+              <a:rPr sz="1320" b="1" i="0">
+                <a:solidFill>
+                  <a:srgbClr val="000000"/>
+                </a:solidFill>
+                <a:latin typeface="Times New Roman"/>
+                <a:ea typeface="Times New Roman"/>
+                <a:cs typeface="Times New Roman"/>
               </a:rPr>
               <a:t>recall 0.916</a:t>
             </a:r>
             <a:r>
-              <a:rPr sz="1200" b="0" i="0">
-                <a:solidFill>
-                  <a:srgbClr val="262626"/>
-                </a:solidFill>
+              <a:rPr sz="1320" b="0" i="0">
+                <a:solidFill>
+                  <a:srgbClr val="000000"/>
+                </a:solidFill>
+                <a:latin typeface="Times New Roman"/>
+                <a:ea typeface="Times New Roman"/>
+                <a:cs typeface="Times New Roman"/>
               </a:rPr>
               <a:t>, 95 % CI 0.812–0.976), including </a:t>
             </a:r>
             <a:r>
-              <a:rPr sz="1200" b="1" i="0">
-                <a:solidFill>
-                  <a:srgbClr val="262626"/>
-                </a:solidFill>
+              <a:rPr sz="1320" b="1" i="0">
+                <a:solidFill>
+                  <a:srgbClr val="000000"/>
+                </a:solidFill>
+                <a:latin typeface="Times New Roman"/>
+                <a:ea typeface="Times New Roman"/>
+                <a:cs typeface="Times New Roman"/>
               </a:rPr>
               <a:t>19 of 19 X-class windows</a:t>
             </a:r>
             <a:r>
-              <a:rPr sz="1200" b="0" i="0">
-                <a:solidFill>
-                  <a:srgbClr val="262626"/>
-                </a:solidFill>
+              <a:rPr sz="1320" b="0" i="0">
+                <a:solidFill>
+                  <a:srgbClr val="000000"/>
+                </a:solidFill>
+                <a:latin typeface="Times New Roman"/>
+                <a:ea typeface="Times New Roman"/>
+                <a:cs typeface="Times New Roman"/>
               </a:rPr>
               <a:t>, at a false-alarm rate of </a:t>
             </a:r>
             <a:r>
-              <a:rPr sz="1200" b="1" i="0">
-                <a:solidFill>
-                  <a:srgbClr val="262626"/>
-                </a:solidFill>
+              <a:rPr sz="1320" b="1" i="0">
+                <a:solidFill>
+                  <a:srgbClr val="000000"/>
+                </a:solidFill>
+                <a:latin typeface="Times New Roman"/>
+                <a:ea typeface="Times New Roman"/>
+                <a:cs typeface="Times New Roman"/>
               </a:rPr>
               <a:t>0.063</a:t>
             </a:r>
             <a:r>
-              <a:rPr sz="1200" b="0" i="0">
-                <a:solidFill>
-                  <a:srgbClr val="262626"/>
-                </a:solidFill>
+              <a:rPr sz="1320" b="0" i="0">
+                <a:solidFill>
+                  <a:srgbClr val="000000"/>
+                </a:solidFill>
+                <a:latin typeface="Times New Roman"/>
+                <a:ea typeface="Times New Roman"/>
+                <a:cs typeface="Times New Roman"/>
               </a:rPr>
               <a:t>. Precision is </a:t>
             </a:r>
             <a:r>
-              <a:rPr sz="1200" b="1" i="0">
-                <a:solidFill>
-                  <a:srgbClr val="262626"/>
-                </a:solidFill>
+              <a:rPr sz="1320" b="1" i="0">
+                <a:solidFill>
+                  <a:srgbClr val="000000"/>
+                </a:solidFill>
+                <a:latin typeface="Times New Roman"/>
+                <a:ea typeface="Times New Roman"/>
+                <a:cs typeface="Times New Roman"/>
               </a:rPr>
               <a:t>0.162</a:t>
             </a:r>
             <a:r>
-              <a:rPr sz="1200" b="0" i="0">
-                <a:solidFill>
-                  <a:srgbClr val="262626"/>
-                </a:solidFill>
+              <a:rPr sz="1320" b="0" i="0">
+                <a:solidFill>
+                  <a:srgbClr val="000000"/>
+                </a:solidFill>
+                <a:latin typeface="Times New Roman"/>
+                <a:ea typeface="Times New Roman"/>
+                <a:cs typeface="Times New Roman"/>
               </a:rPr>
               <a:t> — shown, not hidden.</a:t>
             </a:r>
@@ -11112,8 +12055,12 @@
             <a:pPr algn="ctr"/>
             <a:r>
               <a:rPr lang="en-IN" sz="3200" b="1" dirty="0">
+                <a:solidFill>
+                  <a:srgbClr val="000000"/>
+                </a:solidFill>
                 <a:latin typeface="Times New Roman" panose="02020603050405020304" pitchFamily="18" charset="0"/>
-                <a:cs typeface="Times New Roman" panose="02020603050405020304" pitchFamily="18" charset="0"/>
+                <a:ea typeface="Times New Roman"/>
+                <a:cs typeface="Times New Roman"/>
               </a:rPr>
               <a:t>Conclusion, Limitations &amp; Future Scope</a:t>
             </a:r>
@@ -11142,10 +12089,24 @@
           <a:lstStyle/>
           <a:p>
             <a:fld id="{B4EE2AE5-9218-4A07-842F-E84162EAAD55}" type="slidenum">
-              <a:rPr lang="en-IN" smtClean="0"/>
+              <a:rPr lang="en-IN" smtClean="0">
+                <a:solidFill>
+                  <a:srgbClr val="000000"/>
+                </a:solidFill>
+                <a:latin typeface="Times New Roman"/>
+                <a:ea typeface="Times New Roman"/>
+                <a:cs typeface="Times New Roman"/>
+              </a:rPr>
               <a:t>7</a:t>
             </a:fld>
-            <a:endParaRPr lang="en-IN" dirty="0"/>
+            <a:endParaRPr lang="en-IN" dirty="0">
+              <a:solidFill>
+                <a:srgbClr val="000000"/>
+              </a:solidFill>
+              <a:latin typeface="Times New Roman"/>
+              <a:ea typeface="Times New Roman"/>
+              <a:cs typeface="Times New Roman"/>
+            </a:endParaRPr>
           </a:p>
         </p:txBody>
       </p:sp>
@@ -11171,10 +12132,24 @@
           <a:lstStyle/>
           <a:p>
             <a:r>
-              <a:rPr lang="en-US"/>
+              <a:rPr lang="en-US">
+                <a:solidFill>
+                  <a:srgbClr val="000000"/>
+                </a:solidFill>
+                <a:latin typeface="Times New Roman"/>
+                <a:ea typeface="Times New Roman"/>
+                <a:cs typeface="Times New Roman"/>
+              </a:rPr>
               <a:t>Date: 07/10/2026</a:t>
             </a:r>
-            <a:endParaRPr lang="en-IN" dirty="0"/>
+            <a:endParaRPr lang="en-IN" dirty="0">
+              <a:solidFill>
+                <a:srgbClr val="000000"/>
+              </a:solidFill>
+              <a:latin typeface="Times New Roman"/>
+              <a:ea typeface="Times New Roman"/>
+              <a:cs typeface="Times New Roman"/>
+            </a:endParaRPr>
           </a:p>
         </p:txBody>
       </p:sp>
@@ -11236,10 +12211,24 @@
           <a:lstStyle/>
           <a:p>
             <a:r>
-              <a:rPr lang="en-US" dirty="0"/>
+              <a:rPr lang="en-US" dirty="0">
+                <a:solidFill>
+                  <a:srgbClr val="000000"/>
+                </a:solidFill>
+                <a:latin typeface="Times New Roman"/>
+                <a:ea typeface="Times New Roman"/>
+                <a:cs typeface="Times New Roman"/>
+              </a:rPr>
               <a:t>II–Year PBL Project Final Review</a:t>
             </a:r>
-            <a:endParaRPr lang="en-IN" dirty="0"/>
+            <a:endParaRPr lang="en-IN" dirty="0">
+              <a:solidFill>
+                <a:srgbClr val="000000"/>
+              </a:solidFill>
+              <a:latin typeface="Times New Roman"/>
+              <a:ea typeface="Times New Roman"/>
+              <a:cs typeface="Times New Roman"/>
+            </a:endParaRPr>
           </a:p>
         </p:txBody>
       </p:sp>
@@ -11288,11 +12277,11 @@
               <a:buChar char="•"/>
               <a:defRPr sz="2800" kern="1200">
                 <a:solidFill>
-                  <a:schemeClr val="tx1"/>
-                </a:solidFill>
-                <a:latin typeface="+mn-lt"/>
-                <a:ea typeface="+mn-ea"/>
-                <a:cs typeface="+mn-cs"/>
+                  <a:srgbClr val="000000"/>
+                </a:solidFill>
+                <a:latin typeface="Times New Roman"/>
+                <a:ea typeface="Times New Roman"/>
+                <a:cs typeface="Times New Roman"/>
               </a:defRPr>
             </a:lvl1pPr>
             <a:lvl2pPr marL="685800" indent="-228600" algn="l" defTabSz="914400" rtl="0" eaLnBrk="1" latinLnBrk="0" hangingPunct="1">
@@ -11306,11 +12295,11 @@
               <a:buChar char="•"/>
               <a:defRPr sz="2400" kern="1200">
                 <a:solidFill>
-                  <a:schemeClr val="tx1"/>
-                </a:solidFill>
-                <a:latin typeface="+mn-lt"/>
-                <a:ea typeface="+mn-ea"/>
-                <a:cs typeface="+mn-cs"/>
+                  <a:srgbClr val="000000"/>
+                </a:solidFill>
+                <a:latin typeface="Times New Roman"/>
+                <a:ea typeface="Times New Roman"/>
+                <a:cs typeface="Times New Roman"/>
               </a:defRPr>
             </a:lvl2pPr>
             <a:lvl3pPr marL="1143000" indent="-228600" algn="l" defTabSz="914400" rtl="0" eaLnBrk="1" latinLnBrk="0" hangingPunct="1">
@@ -11324,11 +12313,11 @@
               <a:buChar char="•"/>
               <a:defRPr sz="2000" kern="1200">
                 <a:solidFill>
-                  <a:schemeClr val="tx1"/>
-                </a:solidFill>
-                <a:latin typeface="+mn-lt"/>
-                <a:ea typeface="+mn-ea"/>
-                <a:cs typeface="+mn-cs"/>
+                  <a:srgbClr val="000000"/>
+                </a:solidFill>
+                <a:latin typeface="Times New Roman"/>
+                <a:ea typeface="Times New Roman"/>
+                <a:cs typeface="Times New Roman"/>
               </a:defRPr>
             </a:lvl3pPr>
             <a:lvl4pPr marL="1600200" indent="-228600" algn="l" defTabSz="914400" rtl="0" eaLnBrk="1" latinLnBrk="0" hangingPunct="1">
@@ -11342,11 +12331,11 @@
               <a:buChar char="•"/>
               <a:defRPr sz="1800" kern="1200">
                 <a:solidFill>
-                  <a:schemeClr val="tx1"/>
-                </a:solidFill>
-                <a:latin typeface="+mn-lt"/>
-                <a:ea typeface="+mn-ea"/>
-                <a:cs typeface="+mn-cs"/>
+                  <a:srgbClr val="000000"/>
+                </a:solidFill>
+                <a:latin typeface="Times New Roman"/>
+                <a:ea typeface="Times New Roman"/>
+                <a:cs typeface="Times New Roman"/>
               </a:defRPr>
             </a:lvl4pPr>
             <a:lvl5pPr marL="2057400" indent="-228600" algn="l" defTabSz="914400" rtl="0" eaLnBrk="1" latinLnBrk="0" hangingPunct="1">
@@ -11360,11 +12349,11 @@
               <a:buChar char="•"/>
               <a:defRPr sz="1800" kern="1200">
                 <a:solidFill>
-                  <a:schemeClr val="tx1"/>
-                </a:solidFill>
-                <a:latin typeface="+mn-lt"/>
-                <a:ea typeface="+mn-ea"/>
-                <a:cs typeface="+mn-cs"/>
+                  <a:srgbClr val="000000"/>
+                </a:solidFill>
+                <a:latin typeface="Times New Roman"/>
+                <a:ea typeface="Times New Roman"/>
+                <a:cs typeface="Times New Roman"/>
               </a:defRPr>
             </a:lvl5pPr>
             <a:lvl6pPr marL="2514600" indent="-228600" algn="l" defTabSz="914400" rtl="0" eaLnBrk="1" latinLnBrk="0" hangingPunct="1">
@@ -11378,11 +12367,11 @@
               <a:buChar char="•"/>
               <a:defRPr sz="1800" kern="1200">
                 <a:solidFill>
-                  <a:schemeClr val="tx1"/>
-                </a:solidFill>
-                <a:latin typeface="+mn-lt"/>
-                <a:ea typeface="+mn-ea"/>
-                <a:cs typeface="+mn-cs"/>
+                  <a:srgbClr val="000000"/>
+                </a:solidFill>
+                <a:latin typeface="Times New Roman"/>
+                <a:ea typeface="Times New Roman"/>
+                <a:cs typeface="Times New Roman"/>
               </a:defRPr>
             </a:lvl6pPr>
             <a:lvl7pPr marL="2971800" indent="-228600" algn="l" defTabSz="914400" rtl="0" eaLnBrk="1" latinLnBrk="0" hangingPunct="1">
@@ -11396,11 +12385,11 @@
               <a:buChar char="•"/>
               <a:defRPr sz="1800" kern="1200">
                 <a:solidFill>
-                  <a:schemeClr val="tx1"/>
-                </a:solidFill>
-                <a:latin typeface="+mn-lt"/>
-                <a:ea typeface="+mn-ea"/>
-                <a:cs typeface="+mn-cs"/>
+                  <a:srgbClr val="000000"/>
+                </a:solidFill>
+                <a:latin typeface="Times New Roman"/>
+                <a:ea typeface="Times New Roman"/>
+                <a:cs typeface="Times New Roman"/>
               </a:defRPr>
             </a:lvl7pPr>
             <a:lvl8pPr marL="3429000" indent="-228600" algn="l" defTabSz="914400" rtl="0" eaLnBrk="1" latinLnBrk="0" hangingPunct="1">
@@ -11414,11 +12403,11 @@
               <a:buChar char="•"/>
               <a:defRPr sz="1800" kern="1200">
                 <a:solidFill>
-                  <a:schemeClr val="tx1"/>
-                </a:solidFill>
-                <a:latin typeface="+mn-lt"/>
-                <a:ea typeface="+mn-ea"/>
-                <a:cs typeface="+mn-cs"/>
+                  <a:srgbClr val="000000"/>
+                </a:solidFill>
+                <a:latin typeface="Times New Roman"/>
+                <a:ea typeface="Times New Roman"/>
+                <a:cs typeface="Times New Roman"/>
               </a:defRPr>
             </a:lvl8pPr>
             <a:lvl9pPr marL="3886200" indent="-228600" algn="l" defTabSz="914400" rtl="0" eaLnBrk="1" latinLnBrk="0" hangingPunct="1">
@@ -11432,11 +12421,11 @@
               <a:buChar char="•"/>
               <a:defRPr sz="1800" kern="1200">
                 <a:solidFill>
-                  <a:schemeClr val="tx1"/>
-                </a:solidFill>
-                <a:latin typeface="+mn-lt"/>
-                <a:ea typeface="+mn-ea"/>
-                <a:cs typeface="+mn-cs"/>
+                  <a:srgbClr val="000000"/>
+                </a:solidFill>
+                <a:latin typeface="Times New Roman"/>
+                <a:ea typeface="Times New Roman"/>
+                <a:cs typeface="Times New Roman"/>
               </a:defRPr>
             </a:lvl9pPr>
           </a:lstStyle>
@@ -11454,10 +12443,13 @@
               <a:buNone/>
             </a:pPr>
             <a:r>
-              <a:rPr sz="1700" b="1" i="0">
-                <a:solidFill>
-                  <a:srgbClr val="1F3864"/>
-                </a:solidFill>
+              <a:rPr sz="1870" b="1" i="0">
+                <a:solidFill>
+                  <a:srgbClr val="000000"/>
+                </a:solidFill>
+                <a:latin typeface="Times New Roman"/>
+                <a:ea typeface="Times New Roman"/>
+                <a:cs typeface="Times New Roman"/>
               </a:rPr>
               <a:t>Conclusion</a:t>
             </a:r>
@@ -11476,74 +12468,101 @@
               <a:buNone/>
             </a:pPr>
             <a:r>
-              <a:rPr sz="1250" b="0" i="0">
-                <a:solidFill>
-                  <a:srgbClr val="262626"/>
-                </a:solidFill>
+              <a:rPr sz="1380" b="0" i="0">
+                <a:solidFill>
+                  <a:srgbClr val="000000"/>
+                </a:solidFill>
+                <a:latin typeface="Times New Roman"/>
+                <a:ea typeface="Times New Roman"/>
+                <a:cs typeface="Times New Roman"/>
               </a:rPr>
               <a:t>We developed a </a:t>
             </a:r>
             <a:r>
-              <a:rPr sz="1250" b="1" i="0">
-                <a:solidFill>
-                  <a:srgbClr val="262626"/>
-                </a:solidFill>
+              <a:rPr sz="1380" b="1" i="0">
+                <a:solidFill>
+                  <a:srgbClr val="000000"/>
+                </a:solidFill>
+                <a:latin typeface="Times New Roman"/>
+                <a:ea typeface="Times New Roman"/>
+                <a:cs typeface="Times New Roman"/>
               </a:rPr>
               <a:t>leakage-safe machine-learning pipeline</a:t>
             </a:r>
             <a:r>
-              <a:rPr sz="1250" b="0" i="0">
-                <a:solidFill>
-                  <a:srgbClr val="262626"/>
-                </a:solidFill>
+              <a:rPr sz="1380" b="0" i="0">
+                <a:solidFill>
+                  <a:srgbClr val="000000"/>
+                </a:solidFill>
+                <a:latin typeface="Times New Roman"/>
+                <a:ea typeface="Times New Roman"/>
+                <a:cs typeface="Times New Roman"/>
               </a:rPr>
               <a:t> using SWAN-SF SHARP magnetic-field parameters to forecast major (M/X-class) solar flares </a:t>
             </a:r>
             <a:r>
-              <a:rPr sz="1250" b="1" i="0">
-                <a:solidFill>
-                  <a:srgbClr val="262626"/>
-                </a:solidFill>
+              <a:rPr sz="1380" b="1" i="0">
+                <a:solidFill>
+                  <a:srgbClr val="000000"/>
+                </a:solidFill>
+                <a:latin typeface="Times New Roman"/>
+                <a:ea typeface="Times New Roman"/>
+                <a:cs typeface="Times New Roman"/>
               </a:rPr>
               <a:t>24 hours in advance.</a:t>
             </a:r>
             <a:r>
-              <a:rPr sz="1250" b="0" i="0">
-                <a:solidFill>
-                  <a:srgbClr val="262626"/>
-                </a:solidFill>
+              <a:rPr sz="1380" b="0" i="0">
+                <a:solidFill>
+                  <a:srgbClr val="000000"/>
+                </a:solidFill>
+                <a:latin typeface="Times New Roman"/>
+                <a:ea typeface="Times New Roman"/>
+                <a:cs typeface="Times New Roman"/>
               </a:rPr>
               <a:t> Seven candidate models were trained on 204,559 windows and compared on a separate validation partition; the selected model — </a:t>
             </a:r>
             <a:r>
-              <a:rPr sz="1250" b="1" i="0">
-                <a:solidFill>
-                  <a:srgbClr val="262626"/>
-                </a:solidFill>
+              <a:rPr sz="1380" b="1" i="0">
+                <a:solidFill>
+                  <a:srgbClr val="000000"/>
+                </a:solidFill>
+                <a:latin typeface="Times New Roman"/>
+                <a:ea typeface="Times New Roman"/>
+                <a:cs typeface="Times New Roman"/>
               </a:rPr>
               <a:t>L2-regularised Logistic Regression on temporal features</a:t>
             </a:r>
             <a:r>
-              <a:rPr sz="1250" b="0" i="0">
-                <a:solidFill>
-                  <a:srgbClr val="262626"/>
-                </a:solidFill>
+              <a:rPr sz="1380" b="0" i="0">
+                <a:solidFill>
+                  <a:srgbClr val="000000"/>
+                </a:solidFill>
+                <a:latin typeface="Times New Roman"/>
+                <a:ea typeface="Times New Roman"/>
+                <a:cs typeface="Times New Roman"/>
               </a:rPr>
               <a:t> — was then scored </a:t>
             </a:r>
             <a:r>
-              <a:rPr sz="1250" b="1" i="0">
-                <a:solidFill>
-                  <a:srgbClr val="262626"/>
-                </a:solidFill>
+              <a:rPr sz="1380" b="1" i="0">
+                <a:solidFill>
+                  <a:srgbClr val="000000"/>
+                </a:solidFill>
+                <a:latin typeface="Times New Roman"/>
+                <a:ea typeface="Times New Roman"/>
+                <a:cs typeface="Times New Roman"/>
               </a:rPr>
               <a:t>once</a:t>
             </a:r>
             <a:r>
-              <a:rPr sz="1250" b="0" i="0">
-                <a:solidFill>
-                  <a:srgbClr val="262626"/>
-                </a:solidFill>
+              <a:rPr sz="1380" b="0" i="0">
+                <a:solidFill>
+                  <a:srgbClr val="000000"/>
+                </a:solidFill>
+                <a:latin typeface="Times New Roman"/>
+                <a:ea typeface="Times New Roman"/>
+                <a:cs typeface="Times New Roman"/>
               </a:rPr>
               <a:t> on 75,365 windows it had never seen.</a:t>
             </a:r>
@@ -11562,90 +12581,123 @@
               <a:buNone/>
             </a:pPr>
             <a:r>
-              <a:rPr sz="1250" b="0" i="0">
-                <a:solidFill>
-                  <a:srgbClr val="262626"/>
-                </a:solidFill>
+              <a:rPr sz="1380" b="0" i="0">
+                <a:solidFill>
+                  <a:srgbClr val="000000"/>
+                </a:solidFill>
+                <a:latin typeface="Times New Roman"/>
+                <a:ea typeface="Times New Roman"/>
+                <a:cs typeface="Times New Roman"/>
               </a:rPr>
               <a:t>It achieved a </a:t>
             </a:r>
             <a:r>
-              <a:rPr sz="1250" b="1" i="0">
-                <a:solidFill>
-                  <a:srgbClr val="262626"/>
-                </a:solidFill>
+              <a:rPr sz="1380" b="1" i="0">
+                <a:solidFill>
+                  <a:srgbClr val="000000"/>
+                </a:solidFill>
+                <a:latin typeface="Times New Roman"/>
+                <a:ea typeface="Times New Roman"/>
+                <a:cs typeface="Times New Roman"/>
               </a:rPr>
               <a:t>True Skill Statistic of 0.853</a:t>
             </a:r>
             <a:r>
-              <a:rPr sz="1250" b="0" i="0">
-                <a:solidFill>
-                  <a:srgbClr val="262626"/>
-                </a:solidFill>
+              <a:rPr sz="1380" b="0" i="0">
+                <a:solidFill>
+                  <a:srgbClr val="000000"/>
+                </a:solidFill>
+                <a:latin typeface="Times New Roman"/>
+                <a:ea typeface="Times New Roman"/>
+                <a:cs typeface="Times New Roman"/>
               </a:rPr>
               <a:t> (95 % CI 0.751–0.915), detecting </a:t>
             </a:r>
             <a:r>
-              <a:rPr sz="1250" b="1" i="0">
-                <a:solidFill>
-                  <a:srgbClr val="262626"/>
-                </a:solidFill>
+              <a:rPr sz="1380" b="1" i="0">
+                <a:solidFill>
+                  <a:srgbClr val="000000"/>
+                </a:solidFill>
+                <a:latin typeface="Times New Roman"/>
+                <a:ea typeface="Times New Roman"/>
+                <a:cs typeface="Times New Roman"/>
               </a:rPr>
               <a:t>907 of 990</a:t>
             </a:r>
             <a:r>
-              <a:rPr sz="1250" b="0" i="0">
-                <a:solidFill>
-                  <a:srgbClr val="262626"/>
-                </a:solidFill>
+              <a:rPr sz="1380" b="0" i="0">
+                <a:solidFill>
+                  <a:srgbClr val="000000"/>
+                </a:solidFill>
+                <a:latin typeface="Times New Roman"/>
+                <a:ea typeface="Times New Roman"/>
+                <a:cs typeface="Times New Roman"/>
               </a:rPr>
               <a:t> flare-producing windows — </a:t>
             </a:r>
             <a:r>
-              <a:rPr sz="1250" b="1" i="0">
-                <a:solidFill>
-                  <a:srgbClr val="262626"/>
-                </a:solidFill>
+              <a:rPr sz="1380" b="1" i="0">
+                <a:solidFill>
+                  <a:srgbClr val="000000"/>
+                </a:solidFill>
+                <a:latin typeface="Times New Roman"/>
+                <a:ea typeface="Times New Roman"/>
+                <a:cs typeface="Times New Roman"/>
               </a:rPr>
               <a:t>91.6 % recall</a:t>
             </a:r>
             <a:r>
-              <a:rPr sz="1250" b="0" i="0">
-                <a:solidFill>
-                  <a:srgbClr val="262626"/>
-                </a:solidFill>
+              <a:rPr sz="1380" b="0" i="0">
+                <a:solidFill>
+                  <a:srgbClr val="000000"/>
+                </a:solidFill>
+                <a:latin typeface="Times New Roman"/>
+                <a:ea typeface="Times New Roman"/>
+                <a:cs typeface="Times New Roman"/>
               </a:rPr>
               <a:t>, and </a:t>
             </a:r>
             <a:r>
-              <a:rPr sz="1250" b="1" i="0">
-                <a:solidFill>
-                  <a:srgbClr val="262626"/>
-                </a:solidFill>
+              <a:rPr sz="1380" b="1" i="0">
+                <a:solidFill>
+                  <a:srgbClr val="000000"/>
+                </a:solidFill>
+                <a:latin typeface="Times New Roman"/>
+                <a:ea typeface="Times New Roman"/>
+                <a:cs typeface="Times New Roman"/>
               </a:rPr>
               <a:t>all 19 X-class windows</a:t>
             </a:r>
             <a:r>
-              <a:rPr sz="1250" b="0" i="0">
-                <a:solidFill>
-                  <a:srgbClr val="262626"/>
-                </a:solidFill>
+              <a:rPr sz="1380" b="0" i="0">
+                <a:solidFill>
+                  <a:srgbClr val="000000"/>
+                </a:solidFill>
+                <a:latin typeface="Times New Roman"/>
+                <a:ea typeface="Times New Roman"/>
+                <a:cs typeface="Times New Roman"/>
               </a:rPr>
               <a:t> — at a false-alarm rate of 0.063 and </a:t>
             </a:r>
             <a:r>
-              <a:rPr sz="1250" b="1" i="0">
-                <a:solidFill>
-                  <a:srgbClr val="262626"/>
-                </a:solidFill>
+              <a:rPr sz="1380" b="1" i="0">
+                <a:solidFill>
+                  <a:srgbClr val="000000"/>
+                </a:solidFill>
+                <a:latin typeface="Times New Roman"/>
+                <a:ea typeface="Times New Roman"/>
+                <a:cs typeface="Times New Roman"/>
               </a:rPr>
               <a:t>ROC-AUC 0.979</a:t>
             </a:r>
             <a:r>
-              <a:rPr sz="1250" b="0" i="0">
-                <a:solidFill>
-                  <a:srgbClr val="262626"/>
-                </a:solidFill>
+              <a:rPr sz="1380" b="0" i="0">
+                <a:solidFill>
+                  <a:srgbClr val="000000"/>
+                </a:solidFill>
+                <a:latin typeface="Times New Roman"/>
+                <a:ea typeface="Times New Roman"/>
+                <a:cs typeface="Times New Roman"/>
               </a:rPr>
               <a:t>.</a:t>
             </a:r>
@@ -11664,10 +12716,13 @@
               <a:buNone/>
             </a:pPr>
             <a:r>
-              <a:rPr sz="1250" b="0" i="0">
-                <a:solidFill>
-                  <a:srgbClr val="262626"/>
-                </a:solidFill>
+              <a:rPr sz="1380" b="0" i="0">
+                <a:solidFill>
+                  <a:srgbClr val="000000"/>
+                </a:solidFill>
+                <a:latin typeface="Times New Roman"/>
+                <a:ea typeface="Times New Roman"/>
+                <a:cs typeface="Times New Roman"/>
               </a:rPr>
               <a:t>Every published number recomputes from the repository with a single command, and the project ships an interactive dashboard that runs the real trained model in the browser.</a:t>
             </a:r>
@@ -11719,11 +12774,11 @@
               <a:buChar char="•"/>
               <a:defRPr sz="2800" kern="1200">
                 <a:solidFill>
-                  <a:schemeClr val="tx1"/>
-                </a:solidFill>
-                <a:latin typeface="+mn-lt"/>
-                <a:ea typeface="+mn-ea"/>
-                <a:cs typeface="+mn-cs"/>
+                  <a:srgbClr val="000000"/>
+                </a:solidFill>
+                <a:latin typeface="Times New Roman"/>
+                <a:ea typeface="Times New Roman"/>
+                <a:cs typeface="Times New Roman"/>
               </a:defRPr>
             </a:lvl1pPr>
             <a:lvl2pPr marL="685800" indent="-228600" algn="l" defTabSz="914400" rtl="0" eaLnBrk="1" latinLnBrk="0" hangingPunct="1">
@@ -11737,11 +12792,11 @@
               <a:buChar char="•"/>
               <a:defRPr sz="2400" kern="1200">
                 <a:solidFill>
-                  <a:schemeClr val="tx1"/>
-                </a:solidFill>
-                <a:latin typeface="+mn-lt"/>
-                <a:ea typeface="+mn-ea"/>
-                <a:cs typeface="+mn-cs"/>
+                  <a:srgbClr val="000000"/>
+                </a:solidFill>
+                <a:latin typeface="Times New Roman"/>
+                <a:ea typeface="Times New Roman"/>
+                <a:cs typeface="Times New Roman"/>
               </a:defRPr>
             </a:lvl2pPr>
             <a:lvl3pPr marL="1143000" indent="-228600" algn="l" defTabSz="914400" rtl="0" eaLnBrk="1" latinLnBrk="0" hangingPunct="1">
@@ -11755,11 +12810,11 @@
               <a:buChar char="•"/>
               <a:defRPr sz="2000" kern="1200">
                 <a:solidFill>
-                  <a:schemeClr val="tx1"/>
-                </a:solidFill>
-                <a:latin typeface="+mn-lt"/>
-                <a:ea typeface="+mn-ea"/>
-                <a:cs typeface="+mn-cs"/>
+                  <a:srgbClr val="000000"/>
+                </a:solidFill>
+                <a:latin typeface="Times New Roman"/>
+                <a:ea typeface="Times New Roman"/>
+                <a:cs typeface="Times New Roman"/>
               </a:defRPr>
             </a:lvl3pPr>
             <a:lvl4pPr marL="1600200" indent="-228600" algn="l" defTabSz="914400" rtl="0" eaLnBrk="1" latinLnBrk="0" hangingPunct="1">
@@ -11773,11 +12828,11 @@
               <a:buChar char="•"/>
               <a:defRPr sz="1800" kern="1200">
                 <a:solidFill>
-                  <a:schemeClr val="tx1"/>
-                </a:solidFill>
-                <a:latin typeface="+mn-lt"/>
-                <a:ea typeface="+mn-ea"/>
-                <a:cs typeface="+mn-cs"/>
+                  <a:srgbClr val="000000"/>
+                </a:solidFill>
+                <a:latin typeface="Times New Roman"/>
+                <a:ea typeface="Times New Roman"/>
+                <a:cs typeface="Times New Roman"/>
               </a:defRPr>
             </a:lvl4pPr>
             <a:lvl5pPr marL="2057400" indent="-228600" algn="l" defTabSz="914400" rtl="0" eaLnBrk="1" latinLnBrk="0" hangingPunct="1">
@@ -11791,11 +12846,11 @@
               <a:buChar char="•"/>
               <a:defRPr sz="1800" kern="1200">
                 <a:solidFill>
-                  <a:schemeClr val="tx1"/>
-                </a:solidFill>
-                <a:latin typeface="+mn-lt"/>
-                <a:ea typeface="+mn-ea"/>
-                <a:cs typeface="+mn-cs"/>
+                  <a:srgbClr val="000000"/>
+                </a:solidFill>
+                <a:latin typeface="Times New Roman"/>
+                <a:ea typeface="Times New Roman"/>
+                <a:cs typeface="Times New Roman"/>
               </a:defRPr>
             </a:lvl5pPr>
             <a:lvl6pPr marL="2514600" indent="-228600" algn="l" defTabSz="914400" rtl="0" eaLnBrk="1" latinLnBrk="0" hangingPunct="1">
@@ -11809,11 +12864,11 @@
               <a:buChar char="•"/>
               <a:defRPr sz="1800" kern="1200">
                 <a:solidFill>
-                  <a:schemeClr val="tx1"/>
-                </a:solidFill>
-                <a:latin typeface="+mn-lt"/>
-                <a:ea typeface="+mn-ea"/>
-                <a:cs typeface="+mn-cs"/>
+                  <a:srgbClr val="000000"/>
+                </a:solidFill>
+                <a:latin typeface="Times New Roman"/>
+                <a:ea typeface="Times New Roman"/>
+                <a:cs typeface="Times New Roman"/>
               </a:defRPr>
             </a:lvl6pPr>
             <a:lvl7pPr marL="2971800" indent="-228600" algn="l" defTabSz="914400" rtl="0" eaLnBrk="1" latinLnBrk="0" hangingPunct="1">
@@ -11827,11 +12882,11 @@
               <a:buChar char="•"/>
               <a:defRPr sz="1800" kern="1200">
                 <a:solidFill>
-                  <a:schemeClr val="tx1"/>
-                </a:solidFill>
-                <a:latin typeface="+mn-lt"/>
-                <a:ea typeface="+mn-ea"/>
-                <a:cs typeface="+mn-cs"/>
+                  <a:srgbClr val="000000"/>
+                </a:solidFill>
+                <a:latin typeface="Times New Roman"/>
+                <a:ea typeface="Times New Roman"/>
+                <a:cs typeface="Times New Roman"/>
               </a:defRPr>
             </a:lvl7pPr>
             <a:lvl8pPr marL="3429000" indent="-228600" algn="l" defTabSz="914400" rtl="0" eaLnBrk="1" latinLnBrk="0" hangingPunct="1">
@@ -11845,11 +12900,11 @@
               <a:buChar char="•"/>
               <a:defRPr sz="1800" kern="1200">
                 <a:solidFill>
-                  <a:schemeClr val="tx1"/>
-                </a:solidFill>
-                <a:latin typeface="+mn-lt"/>
-                <a:ea typeface="+mn-ea"/>
-                <a:cs typeface="+mn-cs"/>
+                  <a:srgbClr val="000000"/>
+                </a:solidFill>
+                <a:latin typeface="Times New Roman"/>
+                <a:ea typeface="Times New Roman"/>
+                <a:cs typeface="Times New Roman"/>
               </a:defRPr>
             </a:lvl8pPr>
             <a:lvl9pPr marL="3886200" indent="-228600" algn="l" defTabSz="914400" rtl="0" eaLnBrk="1" latinLnBrk="0" hangingPunct="1">
@@ -11863,11 +12918,11 @@
               <a:buChar char="•"/>
               <a:defRPr sz="1800" kern="1200">
                 <a:solidFill>
-                  <a:schemeClr val="tx1"/>
-                </a:solidFill>
-                <a:latin typeface="+mn-lt"/>
-                <a:ea typeface="+mn-ea"/>
-                <a:cs typeface="+mn-cs"/>
+                  <a:srgbClr val="000000"/>
+                </a:solidFill>
+                <a:latin typeface="Times New Roman"/>
+                <a:ea typeface="Times New Roman"/>
+                <a:cs typeface="Times New Roman"/>
               </a:defRPr>
             </a:lvl9pPr>
           </a:lstStyle>
@@ -11885,10 +12940,13 @@
               <a:buNone/>
             </a:pPr>
             <a:r>
-              <a:rPr sz="1700" b="1" i="0">
-                <a:solidFill>
-                  <a:srgbClr val="1F3864"/>
-                </a:solidFill>
+              <a:rPr sz="1870" b="1" i="0">
+                <a:solidFill>
+                  <a:srgbClr val="000000"/>
+                </a:solidFill>
+                <a:latin typeface="Times New Roman"/>
+                <a:ea typeface="Times New Roman"/>
+                <a:cs typeface="Times New Roman"/>
               </a:rPr>
               <a:t>Future Scope</a:t>
             </a:r>
@@ -11907,26 +12965,35 @@
               <a:buNone/>
             </a:pPr>
             <a:r>
-              <a:rPr sz="1150" b="1">
-                <a:solidFill>
-                  <a:srgbClr val="1E6B3A"/>
-                </a:solidFill>
-              </a:rPr>
-              <a:t>▪  </a:t>
-            </a:r>
-            <a:r>
-              <a:rPr sz="1150" b="1" i="0">
-                <a:solidFill>
-                  <a:srgbClr val="262626"/>
-                </a:solidFill>
+              <a:rPr sz="1270" b="1">
+                <a:solidFill>
+                  <a:srgbClr val="000000"/>
+                </a:solidFill>
+                <a:latin typeface="Times New Roman"/>
+                <a:ea typeface="Times New Roman"/>
+                <a:cs typeface="Times New Roman"/>
+              </a:rPr>
+              <a:t>•  </a:t>
+            </a:r>
+            <a:r>
+              <a:rPr sz="1270" b="1" i="0">
+                <a:solidFill>
+                  <a:srgbClr val="000000"/>
+                </a:solidFill>
+                <a:latin typeface="Times New Roman"/>
+                <a:ea typeface="Times New Roman"/>
+                <a:cs typeface="Times New Roman"/>
               </a:rPr>
               <a:t>Probability calibration</a:t>
             </a:r>
             <a:r>
-              <a:rPr sz="1150" b="0" i="0">
-                <a:solidFill>
-                  <a:srgbClr val="262626"/>
-                </a:solidFill>
+              <a:rPr sz="1270" b="0" i="0">
+                <a:solidFill>
+                  <a:srgbClr val="000000"/>
+                </a:solidFill>
+                <a:latin typeface="Times New Roman"/>
+                <a:ea typeface="Times New Roman"/>
+                <a:cs typeface="Times New Roman"/>
               </a:rPr>
               <a:t> on a held-out year, so the output can be read as a genuine chance.</a:t>
             </a:r>
@@ -11945,26 +13012,35 @@
               <a:buNone/>
             </a:pPr>
             <a:r>
-              <a:rPr sz="1150" b="1">
-                <a:solidFill>
-                  <a:srgbClr val="1E6B3A"/>
-                </a:solidFill>
-              </a:rPr>
-              <a:t>▪  </a:t>
-            </a:r>
-            <a:r>
-              <a:rPr sz="1150" b="1" i="0">
-                <a:solidFill>
-                  <a:srgbClr val="262626"/>
-                </a:solidFill>
+              <a:rPr sz="1270" b="1">
+                <a:solidFill>
+                  <a:srgbClr val="000000"/>
+                </a:solidFill>
+                <a:latin typeface="Times New Roman"/>
+                <a:ea typeface="Times New Roman"/>
+                <a:cs typeface="Times New Roman"/>
+              </a:rPr>
+              <a:t>•  </a:t>
+            </a:r>
+            <a:r>
+              <a:rPr sz="1270" b="1" i="0">
+                <a:solidFill>
+                  <a:srgbClr val="000000"/>
+                </a:solidFill>
+                <a:latin typeface="Times New Roman"/>
+                <a:ea typeface="Times New Roman"/>
+                <a:cs typeface="Times New Roman"/>
               </a:rPr>
               <a:t>Sequence models</a:t>
             </a:r>
             <a:r>
-              <a:rPr sz="1150" b="0" i="0">
-                <a:solidFill>
-                  <a:srgbClr val="262626"/>
-                </a:solidFill>
+              <a:rPr sz="1270" b="0" i="0">
+                <a:solidFill>
+                  <a:srgbClr val="000000"/>
+                </a:solidFill>
+                <a:latin typeface="Times New Roman"/>
+                <a:ea typeface="Times New Roman"/>
+                <a:cs typeface="Times New Roman"/>
               </a:rPr>
               <a:t> (LSTM / Transformer) on the raw 60-step series instead of summary statistics.</a:t>
             </a:r>
@@ -11983,34 +13059,46 @@
               <a:buNone/>
             </a:pPr>
             <a:r>
-              <a:rPr sz="1150" b="1">
-                <a:solidFill>
-                  <a:srgbClr val="1E6B3A"/>
-                </a:solidFill>
-              </a:rPr>
-              <a:t>▪  </a:t>
-            </a:r>
-            <a:r>
-              <a:rPr sz="1150" b="0" i="0">
-                <a:solidFill>
-                  <a:srgbClr val="262626"/>
-                </a:solidFill>
+              <a:rPr sz="1270" b="1">
+                <a:solidFill>
+                  <a:srgbClr val="000000"/>
+                </a:solidFill>
+                <a:latin typeface="Times New Roman"/>
+                <a:ea typeface="Times New Roman"/>
+                <a:cs typeface="Times New Roman"/>
+              </a:rPr>
+              <a:t>•  </a:t>
+            </a:r>
+            <a:r>
+              <a:rPr sz="1270" b="0" i="0">
+                <a:solidFill>
+                  <a:srgbClr val="000000"/>
+                </a:solidFill>
+                <a:latin typeface="Times New Roman"/>
+                <a:ea typeface="Times New Roman"/>
+                <a:cs typeface="Times New Roman"/>
               </a:rPr>
               <a:t>Extend to </a:t>
             </a:r>
             <a:r>
-              <a:rPr sz="1150" b="1" i="0">
-                <a:solidFill>
-                  <a:srgbClr val="262626"/>
-                </a:solidFill>
+              <a:rPr sz="1270" b="1" i="0">
+                <a:solidFill>
+                  <a:srgbClr val="000000"/>
+                </a:solidFill>
+                <a:latin typeface="Times New Roman"/>
+                <a:ea typeface="Times New Roman"/>
+                <a:cs typeface="Times New Roman"/>
               </a:rPr>
               <a:t>solar cycle 25</a:t>
             </a:r>
             <a:r>
-              <a:rPr sz="1150" b="0" i="0">
-                <a:solidFill>
-                  <a:srgbClr val="262626"/>
-                </a:solidFill>
+              <a:rPr sz="1270" b="0" i="0">
+                <a:solidFill>
+                  <a:srgbClr val="000000"/>
+                </a:solidFill>
+                <a:latin typeface="Times New Roman"/>
+                <a:ea typeface="Times New Roman"/>
+                <a:cs typeface="Times New Roman"/>
               </a:rPr>
               <a:t> (2019–present) and to other magnetograph instruments.</a:t>
             </a:r>
@@ -12029,34 +13117,46 @@
               <a:buNone/>
             </a:pPr>
             <a:r>
-              <a:rPr sz="1150" b="1">
-                <a:solidFill>
-                  <a:srgbClr val="1E6B3A"/>
-                </a:solidFill>
-              </a:rPr>
-              <a:t>▪  </a:t>
-            </a:r>
-            <a:r>
-              <a:rPr sz="1150" b="0" i="0">
-                <a:solidFill>
-                  <a:srgbClr val="262626"/>
-                </a:solidFill>
+              <a:rPr sz="1270" b="1">
+                <a:solidFill>
+                  <a:srgbClr val="000000"/>
+                </a:solidFill>
+                <a:latin typeface="Times New Roman"/>
+                <a:ea typeface="Times New Roman"/>
+                <a:cs typeface="Times New Roman"/>
+              </a:rPr>
+              <a:t>•  </a:t>
+            </a:r>
+            <a:r>
+              <a:rPr sz="1270" b="0" i="0">
+                <a:solidFill>
+                  <a:srgbClr val="000000"/>
+                </a:solidFill>
+                <a:latin typeface="Times New Roman"/>
+                <a:ea typeface="Times New Roman"/>
+                <a:cs typeface="Times New Roman"/>
               </a:rPr>
               <a:t>Add </a:t>
             </a:r>
             <a:r>
-              <a:rPr sz="1150" b="1" i="0">
-                <a:solidFill>
-                  <a:srgbClr val="262626"/>
-                </a:solidFill>
+              <a:rPr sz="1270" b="1" i="0">
+                <a:solidFill>
+                  <a:srgbClr val="000000"/>
+                </a:solidFill>
+                <a:latin typeface="Times New Roman"/>
+                <a:ea typeface="Times New Roman"/>
+                <a:cs typeface="Times New Roman"/>
               </a:rPr>
               <a:t>magnetogram imagery</a:t>
             </a:r>
             <a:r>
-              <a:rPr sz="1150" b="0" i="0">
-                <a:solidFill>
-                  <a:srgbClr val="262626"/>
-                </a:solidFill>
+              <a:rPr sz="1270" b="0" i="0">
+                <a:solidFill>
+                  <a:srgbClr val="000000"/>
+                </a:solidFill>
+                <a:latin typeface="Times New Roman"/>
+                <a:ea typeface="Times New Roman"/>
+                <a:cs typeface="Times New Roman"/>
               </a:rPr>
               <a:t> alongside the scalar SHARP parameters.</a:t>
             </a:r>
@@ -12075,26 +13175,35 @@
               <a:buNone/>
             </a:pPr>
             <a:r>
-              <a:rPr sz="1150" b="1">
-                <a:solidFill>
-                  <a:srgbClr val="1E6B3A"/>
-                </a:solidFill>
-              </a:rPr>
-              <a:t>▪  </a:t>
-            </a:r>
-            <a:r>
-              <a:rPr sz="1150" b="1" i="0">
-                <a:solidFill>
-                  <a:srgbClr val="262626"/>
-                </a:solidFill>
+              <a:rPr sz="1270" b="1">
+                <a:solidFill>
+                  <a:srgbClr val="000000"/>
+                </a:solidFill>
+                <a:latin typeface="Times New Roman"/>
+                <a:ea typeface="Times New Roman"/>
+                <a:cs typeface="Times New Roman"/>
+              </a:rPr>
+              <a:t>•  </a:t>
+            </a:r>
+            <a:r>
+              <a:rPr sz="1270" b="1" i="0">
+                <a:solidFill>
+                  <a:srgbClr val="000000"/>
+                </a:solidFill>
+                <a:latin typeface="Times New Roman"/>
+                <a:ea typeface="Times New Roman"/>
+                <a:cs typeface="Times New Roman"/>
               </a:rPr>
               <a:t>Cost-sensitive thresholds</a:t>
             </a:r>
             <a:r>
-              <a:rPr sz="1150" b="0" i="0">
-                <a:solidFill>
-                  <a:srgbClr val="262626"/>
-                </a:solidFill>
+              <a:rPr sz="1270" b="0" i="0">
+                <a:solidFill>
+                  <a:srgbClr val="000000"/>
+                </a:solidFill>
+                <a:latin typeface="Times New Roman"/>
+                <a:ea typeface="Times New Roman"/>
+                <a:cs typeface="Times New Roman"/>
               </a:rPr>
               <a:t> per user — a satellite operator and a power utility do not pay the same price for a miss.</a:t>
             </a:r>
@@ -12113,34 +13222,46 @@
               <a:buNone/>
             </a:pPr>
             <a:r>
-              <a:rPr sz="1150" b="1">
-                <a:solidFill>
-                  <a:srgbClr val="1E6B3A"/>
-                </a:solidFill>
-              </a:rPr>
-              <a:t>▪  </a:t>
-            </a:r>
-            <a:r>
-              <a:rPr sz="1150" b="0" i="0">
-                <a:solidFill>
-                  <a:srgbClr val="262626"/>
-                </a:solidFill>
+              <a:rPr sz="1270" b="1">
+                <a:solidFill>
+                  <a:srgbClr val="000000"/>
+                </a:solidFill>
+                <a:latin typeface="Times New Roman"/>
+                <a:ea typeface="Times New Roman"/>
+                <a:cs typeface="Times New Roman"/>
+              </a:rPr>
+              <a:t>•  </a:t>
+            </a:r>
+            <a:r>
+              <a:rPr sz="1270" b="0" i="0">
+                <a:solidFill>
+                  <a:srgbClr val="000000"/>
+                </a:solidFill>
+                <a:latin typeface="Times New Roman"/>
+                <a:ea typeface="Times New Roman"/>
+                <a:cs typeface="Times New Roman"/>
               </a:rPr>
               <a:t>Ingest a </a:t>
             </a:r>
             <a:r>
-              <a:rPr sz="1150" b="1" i="0">
-                <a:solidFill>
-                  <a:srgbClr val="262626"/>
-                </a:solidFill>
+              <a:rPr sz="1270" b="1" i="0">
+                <a:solidFill>
+                  <a:srgbClr val="000000"/>
+                </a:solidFill>
+                <a:latin typeface="Times New Roman"/>
+                <a:ea typeface="Times New Roman"/>
+                <a:cs typeface="Times New Roman"/>
               </a:rPr>
               <a:t>live SHARP feed</a:t>
             </a:r>
             <a:r>
-              <a:rPr sz="1150" b="0" i="0">
-                <a:solidFill>
-                  <a:srgbClr val="262626"/>
-                </a:solidFill>
+              <a:rPr sz="1270" b="0" i="0">
+                <a:solidFill>
+                  <a:srgbClr val="000000"/>
+                </a:solidFill>
+                <a:latin typeface="Times New Roman"/>
+                <a:ea typeface="Times New Roman"/>
+                <a:cs typeface="Times New Roman"/>
               </a:rPr>
               <a:t> to move from prototype toward an operational service.</a:t>
             </a:r>
@@ -12192,11 +13313,11 @@
               <a:buChar char="•"/>
               <a:defRPr sz="2800" kern="1200">
                 <a:solidFill>
-                  <a:schemeClr val="tx1"/>
-                </a:solidFill>
-                <a:latin typeface="+mn-lt"/>
-                <a:ea typeface="+mn-ea"/>
-                <a:cs typeface="+mn-cs"/>
+                  <a:srgbClr val="000000"/>
+                </a:solidFill>
+                <a:latin typeface="Times New Roman"/>
+                <a:ea typeface="Times New Roman"/>
+                <a:cs typeface="Times New Roman"/>
               </a:defRPr>
             </a:lvl1pPr>
             <a:lvl2pPr marL="685800" indent="-228600" algn="l" defTabSz="914400" rtl="0" eaLnBrk="1" latinLnBrk="0" hangingPunct="1">
@@ -12210,11 +13331,11 @@
               <a:buChar char="•"/>
               <a:defRPr sz="2400" kern="1200">
                 <a:solidFill>
-                  <a:schemeClr val="tx1"/>
-                </a:solidFill>
-                <a:latin typeface="+mn-lt"/>
-                <a:ea typeface="+mn-ea"/>
-                <a:cs typeface="+mn-cs"/>
+                  <a:srgbClr val="000000"/>
+                </a:solidFill>
+                <a:latin typeface="Times New Roman"/>
+                <a:ea typeface="Times New Roman"/>
+                <a:cs typeface="Times New Roman"/>
               </a:defRPr>
             </a:lvl2pPr>
             <a:lvl3pPr marL="1143000" indent="-228600" algn="l" defTabSz="914400" rtl="0" eaLnBrk="1" latinLnBrk="0" hangingPunct="1">
@@ -12228,11 +13349,11 @@
               <a:buChar char="•"/>
               <a:defRPr sz="2000" kern="1200">
                 <a:solidFill>
-                  <a:schemeClr val="tx1"/>
-                </a:solidFill>
-                <a:latin typeface="+mn-lt"/>
-                <a:ea typeface="+mn-ea"/>
-                <a:cs typeface="+mn-cs"/>
+                  <a:srgbClr val="000000"/>
+                </a:solidFill>
+                <a:latin typeface="Times New Roman"/>
+                <a:ea typeface="Times New Roman"/>
+                <a:cs typeface="Times New Roman"/>
               </a:defRPr>
             </a:lvl3pPr>
             <a:lvl4pPr marL="1600200" indent="-228600" algn="l" defTabSz="914400" rtl="0" eaLnBrk="1" latinLnBrk="0" hangingPunct="1">
@@ -12246,11 +13367,11 @@
               <a:buChar char="•"/>
               <a:defRPr sz="1800" kern="1200">
                 <a:solidFill>
-                  <a:schemeClr val="tx1"/>
-                </a:solidFill>
-                <a:latin typeface="+mn-lt"/>
-                <a:ea typeface="+mn-ea"/>
-                <a:cs typeface="+mn-cs"/>
+                  <a:srgbClr val="000000"/>
+                </a:solidFill>
+                <a:latin typeface="Times New Roman"/>
+                <a:ea typeface="Times New Roman"/>
+                <a:cs typeface="Times New Roman"/>
               </a:defRPr>
             </a:lvl4pPr>
             <a:lvl5pPr marL="2057400" indent="-228600" algn="l" defTabSz="914400" rtl="0" eaLnBrk="1" latinLnBrk="0" hangingPunct="1">
@@ -12264,11 +13385,11 @@
               <a:buChar char="•"/>
               <a:defRPr sz="1800" kern="1200">
                 <a:solidFill>
-                  <a:schemeClr val="tx1"/>
-                </a:solidFill>
-                <a:latin typeface="+mn-lt"/>
-                <a:ea typeface="+mn-ea"/>
-                <a:cs typeface="+mn-cs"/>
+                  <a:srgbClr val="000000"/>
+                </a:solidFill>
+                <a:latin typeface="Times New Roman"/>
+                <a:ea typeface="Times New Roman"/>
+                <a:cs typeface="Times New Roman"/>
               </a:defRPr>
             </a:lvl5pPr>
             <a:lvl6pPr marL="2514600" indent="-228600" algn="l" defTabSz="914400" rtl="0" eaLnBrk="1" latinLnBrk="0" hangingPunct="1">
@@ -12282,11 +13403,11 @@
               <a:buChar char="•"/>
               <a:defRPr sz="1800" kern="1200">
                 <a:solidFill>
-                  <a:schemeClr val="tx1"/>
-                </a:solidFill>
-                <a:latin typeface="+mn-lt"/>
-                <a:ea typeface="+mn-ea"/>
-                <a:cs typeface="+mn-cs"/>
+                  <a:srgbClr val="000000"/>
+                </a:solidFill>
+                <a:latin typeface="Times New Roman"/>
+                <a:ea typeface="Times New Roman"/>
+                <a:cs typeface="Times New Roman"/>
               </a:defRPr>
             </a:lvl6pPr>
             <a:lvl7pPr marL="2971800" indent="-228600" algn="l" defTabSz="914400" rtl="0" eaLnBrk="1" latinLnBrk="0" hangingPunct="1">
@@ -12300,11 +13421,11 @@
               <a:buChar char="•"/>
               <a:defRPr sz="1800" kern="1200">
                 <a:solidFill>
-                  <a:schemeClr val="tx1"/>
-                </a:solidFill>
-                <a:latin typeface="+mn-lt"/>
-                <a:ea typeface="+mn-ea"/>
-                <a:cs typeface="+mn-cs"/>
+                  <a:srgbClr val="000000"/>
+                </a:solidFill>
+                <a:latin typeface="Times New Roman"/>
+                <a:ea typeface="Times New Roman"/>
+                <a:cs typeface="Times New Roman"/>
               </a:defRPr>
             </a:lvl7pPr>
             <a:lvl8pPr marL="3429000" indent="-228600" algn="l" defTabSz="914400" rtl="0" eaLnBrk="1" latinLnBrk="0" hangingPunct="1">
@@ -12318,11 +13439,11 @@
               <a:buChar char="•"/>
               <a:defRPr sz="1800" kern="1200">
                 <a:solidFill>
-                  <a:schemeClr val="tx1"/>
-                </a:solidFill>
-                <a:latin typeface="+mn-lt"/>
-                <a:ea typeface="+mn-ea"/>
-                <a:cs typeface="+mn-cs"/>
+                  <a:srgbClr val="000000"/>
+                </a:solidFill>
+                <a:latin typeface="Times New Roman"/>
+                <a:ea typeface="Times New Roman"/>
+                <a:cs typeface="Times New Roman"/>
               </a:defRPr>
             </a:lvl8pPr>
             <a:lvl9pPr marL="3886200" indent="-228600" algn="l" defTabSz="914400" rtl="0" eaLnBrk="1" latinLnBrk="0" hangingPunct="1">
@@ -12336,11 +13457,11 @@
               <a:buChar char="•"/>
               <a:defRPr sz="1800" kern="1200">
                 <a:solidFill>
-                  <a:schemeClr val="tx1"/>
-                </a:solidFill>
-                <a:latin typeface="+mn-lt"/>
-                <a:ea typeface="+mn-ea"/>
-                <a:cs typeface="+mn-cs"/>
+                  <a:srgbClr val="000000"/>
+                </a:solidFill>
+                <a:latin typeface="Times New Roman"/>
+                <a:ea typeface="Times New Roman"/>
+                <a:cs typeface="Times New Roman"/>
               </a:defRPr>
             </a:lvl9pPr>
           </a:lstStyle>
@@ -12358,10 +13479,13 @@
               <a:buNone/>
             </a:pPr>
             <a:r>
-              <a:rPr sz="1700" b="1" i="0">
-                <a:solidFill>
-                  <a:srgbClr val="1F3864"/>
-                </a:solidFill>
+              <a:rPr sz="1870" b="1" i="0">
+                <a:solidFill>
+                  <a:srgbClr val="000000"/>
+                </a:solidFill>
+                <a:latin typeface="Times New Roman"/>
+                <a:ea typeface="Times New Roman"/>
+                <a:cs typeface="Times New Roman"/>
               </a:rPr>
               <a:t>Limitations</a:t>
             </a:r>
@@ -12380,26 +13504,35 @@
               <a:buNone/>
             </a:pPr>
             <a:r>
-              <a:rPr sz="1150" b="1">
-                <a:solidFill>
-                  <a:srgbClr val="C0500D"/>
-                </a:solidFill>
-              </a:rPr>
-              <a:t>▪  </a:t>
-            </a:r>
-            <a:r>
-              <a:rPr sz="1150" b="1" i="0">
-                <a:solidFill>
-                  <a:srgbClr val="262626"/>
-                </a:solidFill>
+              <a:rPr sz="1270" b="1">
+                <a:solidFill>
+                  <a:srgbClr val="000000"/>
+                </a:solidFill>
+                <a:latin typeface="Times New Roman"/>
+                <a:ea typeface="Times New Roman"/>
+                <a:cs typeface="Times New Roman"/>
+              </a:rPr>
+              <a:t>•  </a:t>
+            </a:r>
+            <a:r>
+              <a:rPr sz="1270" b="1" i="0">
+                <a:solidFill>
+                  <a:srgbClr val="000000"/>
+                </a:solidFill>
+                <a:latin typeface="Times New Roman"/>
+                <a:ea typeface="Times New Roman"/>
+                <a:cs typeface="Times New Roman"/>
               </a:rPr>
               <a:t>Precision is 0.162</a:t>
             </a:r>
             <a:r>
-              <a:rPr sz="1150" b="0" i="0">
-                <a:solidFill>
-                  <a:srgbClr val="262626"/>
-                </a:solidFill>
+              <a:rPr sz="1270" b="0" i="0">
+                <a:solidFill>
+                  <a:srgbClr val="000000"/>
+                </a:solidFill>
+                <a:latin typeface="Times New Roman"/>
+                <a:ea typeface="Times New Roman"/>
+                <a:cs typeface="Times New Roman"/>
               </a:rPr>
               <a:t> — 84 % of alerts are not followed by an M/X flare (though 78 % do precede a smaller B/C flare).</a:t>
             </a:r>
@@ -12418,34 +13551,46 @@
               <a:buNone/>
             </a:pPr>
             <a:r>
-              <a:rPr sz="1150" b="1">
-                <a:solidFill>
-                  <a:srgbClr val="C0500D"/>
-                </a:solidFill>
-              </a:rPr>
-              <a:t>▪  </a:t>
-            </a:r>
-            <a:r>
-              <a:rPr sz="1150" b="0" i="0">
-                <a:solidFill>
-                  <a:srgbClr val="262626"/>
-                </a:solidFill>
+              <a:rPr sz="1270" b="1">
+                <a:solidFill>
+                  <a:srgbClr val="000000"/>
+                </a:solidFill>
+                <a:latin typeface="Times New Roman"/>
+                <a:ea typeface="Times New Roman"/>
+                <a:cs typeface="Times New Roman"/>
+              </a:rPr>
+              <a:t>•  </a:t>
+            </a:r>
+            <a:r>
+              <a:rPr sz="1270" b="0" i="0">
+                <a:solidFill>
+                  <a:srgbClr val="000000"/>
+                </a:solidFill>
+                <a:latin typeface="Times New Roman"/>
+                <a:ea typeface="Times New Roman"/>
+                <a:cs typeface="Times New Roman"/>
               </a:rPr>
               <a:t>Outputs rank well but are </a:t>
             </a:r>
             <a:r>
-              <a:rPr sz="1150" b="1" i="0">
-                <a:solidFill>
-                  <a:srgbClr val="262626"/>
-                </a:solidFill>
+              <a:rPr sz="1270" b="1" i="0">
+                <a:solidFill>
+                  <a:srgbClr val="000000"/>
+                </a:solidFill>
+                <a:latin typeface="Times New Roman"/>
+                <a:ea typeface="Times New Roman"/>
+                <a:cs typeface="Times New Roman"/>
               </a:rPr>
               <a:t>not calibrated</a:t>
             </a:r>
             <a:r>
-              <a:rPr sz="1150" b="0" i="0">
-                <a:solidFill>
-                  <a:srgbClr val="262626"/>
-                </a:solidFill>
+              <a:rPr sz="1270" b="0" i="0">
+                <a:solidFill>
+                  <a:srgbClr val="000000"/>
+                </a:solidFill>
+                <a:latin typeface="Times New Roman"/>
+                <a:ea typeface="Times New Roman"/>
+                <a:cs typeface="Times New Roman"/>
               </a:rPr>
               <a:t> — they are not literal chances.</a:t>
             </a:r>
@@ -12464,26 +13609,35 @@
               <a:buNone/>
             </a:pPr>
             <a:r>
-              <a:rPr sz="1150" b="1">
-                <a:solidFill>
-                  <a:srgbClr val="C0500D"/>
-                </a:solidFill>
-              </a:rPr>
-              <a:t>▪  </a:t>
-            </a:r>
-            <a:r>
-              <a:rPr sz="1150" b="1" i="0">
-                <a:solidFill>
-                  <a:srgbClr val="262626"/>
-                </a:solidFill>
+              <a:rPr sz="1270" b="1">
+                <a:solidFill>
+                  <a:srgbClr val="000000"/>
+                </a:solidFill>
+                <a:latin typeface="Times New Roman"/>
+                <a:ea typeface="Times New Roman"/>
+                <a:cs typeface="Times New Roman"/>
+              </a:rPr>
+              <a:t>•  </a:t>
+            </a:r>
+            <a:r>
+              <a:rPr sz="1270" b="1" i="0">
+                <a:solidFill>
+                  <a:srgbClr val="000000"/>
+                </a:solidFill>
+                <a:latin typeface="Times New Roman"/>
+                <a:ea typeface="Times New Roman"/>
+                <a:cs typeface="Times New Roman"/>
               </a:rPr>
               <a:t>One instrument, one span:</a:t>
             </a:r>
             <a:r>
-              <a:rPr sz="1150" b="0" i="0">
-                <a:solidFill>
-                  <a:srgbClr val="262626"/>
-                </a:solidFill>
+              <a:rPr sz="1270" b="0" i="0">
+                <a:solidFill>
+                  <a:srgbClr val="000000"/>
+                </a:solidFill>
+                <a:latin typeface="Times New Roman"/>
+                <a:ea typeface="Times New Roman"/>
+                <a:cs typeface="Times New Roman"/>
               </a:rPr>
               <a:t> SDO/HMI, 2010–2018. No validation beyond 2018 or on other instruments.</a:t>
             </a:r>
@@ -12502,34 +13656,46 @@
               <a:buNone/>
             </a:pPr>
             <a:r>
-              <a:rPr sz="1150" b="1">
-                <a:solidFill>
-                  <a:srgbClr val="C0500D"/>
-                </a:solidFill>
-              </a:rPr>
-              <a:t>▪  </a:t>
-            </a:r>
-            <a:r>
-              <a:rPr sz="1150" b="0" i="0">
-                <a:solidFill>
-                  <a:srgbClr val="262626"/>
-                </a:solidFill>
+              <a:rPr sz="1270" b="1">
+                <a:solidFill>
+                  <a:srgbClr val="000000"/>
+                </a:solidFill>
+                <a:latin typeface="Times New Roman"/>
+                <a:ea typeface="Times New Roman"/>
+                <a:cs typeface="Times New Roman"/>
+              </a:rPr>
+              <a:t>•  </a:t>
+            </a:r>
+            <a:r>
+              <a:rPr sz="1270" b="0" i="0">
+                <a:solidFill>
+                  <a:srgbClr val="000000"/>
+                </a:solidFill>
+                <a:latin typeface="Times New Roman"/>
+                <a:ea typeface="Times New Roman"/>
+                <a:cs typeface="Times New Roman"/>
               </a:rPr>
               <a:t>Only </a:t>
             </a:r>
             <a:r>
-              <a:rPr sz="1150" b="1" i="0">
-                <a:solidFill>
-                  <a:srgbClr val="262626"/>
-                </a:solidFill>
+              <a:rPr sz="1270" b="1" i="0">
+                <a:solidFill>
+                  <a:srgbClr val="000000"/>
+                </a:solidFill>
+                <a:latin typeface="Times New Roman"/>
+                <a:ea typeface="Times New Roman"/>
+                <a:cs typeface="Times New Roman"/>
               </a:rPr>
               <a:t>19 X-class windows</a:t>
             </a:r>
             <a:r>
-              <a:rPr sz="1150" b="0" i="0">
-                <a:solidFill>
-                  <a:srgbClr val="262626"/>
-                </a:solidFill>
+              <a:rPr sz="1270" b="0" i="0">
+                <a:solidFill>
+                  <a:srgbClr val="000000"/>
+                </a:solidFill>
+                <a:latin typeface="Times New Roman"/>
+                <a:ea typeface="Times New Roman"/>
+                <a:cs typeface="Times New Roman"/>
               </a:rPr>
               <a:t> in the test set, so that recall carries a wide interval.</a:t>
             </a:r>
@@ -12548,18 +13714,24 @@
               <a:buNone/>
             </a:pPr>
             <a:r>
-              <a:rPr sz="1150" b="1">
-                <a:solidFill>
-                  <a:srgbClr val="C0500D"/>
-                </a:solidFill>
-              </a:rPr>
-              <a:t>▪  </a:t>
-            </a:r>
-            <a:r>
-              <a:rPr sz="1150" b="0" i="0">
-                <a:solidFill>
-                  <a:srgbClr val="262626"/>
-                </a:solidFill>
+              <a:rPr sz="1270" b="1">
+                <a:solidFill>
+                  <a:srgbClr val="000000"/>
+                </a:solidFill>
+                <a:latin typeface="Times New Roman"/>
+                <a:ea typeface="Times New Roman"/>
+                <a:cs typeface="Times New Roman"/>
+              </a:rPr>
+              <a:t>•  </a:t>
+            </a:r>
+            <a:r>
+              <a:rPr sz="1270" b="0" i="0">
+                <a:solidFill>
+                  <a:srgbClr val="000000"/>
+                </a:solidFill>
+                <a:latin typeface="Times New Roman"/>
+                <a:ea typeface="Times New Roman"/>
+                <a:cs typeface="Times New Roman"/>
               </a:rPr>
               <a:t>Two raw archives are corrupt; results rest on the previously extracted features.</a:t>
             </a:r>
@@ -12578,34 +13750,46 @@
               <a:buNone/>
             </a:pPr>
             <a:r>
-              <a:rPr sz="1150" b="1">
-                <a:solidFill>
-                  <a:srgbClr val="C0500D"/>
-                </a:solidFill>
-              </a:rPr>
-              <a:t>▪  </a:t>
-            </a:r>
-            <a:r>
-              <a:rPr sz="1150" b="0" i="0">
-                <a:solidFill>
-                  <a:srgbClr val="262626"/>
-                </a:solidFill>
+              <a:rPr sz="1270" b="1">
+                <a:solidFill>
+                  <a:srgbClr val="000000"/>
+                </a:solidFill>
+                <a:latin typeface="Times New Roman"/>
+                <a:ea typeface="Times New Roman"/>
+                <a:cs typeface="Times New Roman"/>
+              </a:rPr>
+              <a:t>•  </a:t>
+            </a:r>
+            <a:r>
+              <a:rPr sz="1270" b="0" i="0">
+                <a:solidFill>
+                  <a:srgbClr val="000000"/>
+                </a:solidFill>
+                <a:latin typeface="Times New Roman"/>
+                <a:ea typeface="Times New Roman"/>
+                <a:cs typeface="Times New Roman"/>
               </a:rPr>
               <a:t>From-scratch retraining is </a:t>
             </a:r>
             <a:r>
-              <a:rPr sz="1150" b="1" i="0">
-                <a:solidFill>
-                  <a:srgbClr val="262626"/>
-                </a:solidFill>
+              <a:rPr sz="1270" b="1" i="0">
+                <a:solidFill>
+                  <a:srgbClr val="000000"/>
+                </a:solidFill>
+                <a:latin typeface="Times New Roman"/>
+                <a:ea typeface="Times New Roman"/>
+                <a:cs typeface="Times New Roman"/>
               </a:rPr>
               <a:t>not bit-reproducible</a:t>
             </a:r>
             <a:r>
-              <a:rPr sz="1150" b="0" i="0">
-                <a:solidFill>
-                  <a:srgbClr val="262626"/>
-                </a:solidFill>
+              <a:rPr sz="1270" b="0" i="0">
+                <a:solidFill>
+                  <a:srgbClr val="000000"/>
+                </a:solidFill>
+                <a:latin typeface="Times New Roman"/>
+                <a:ea typeface="Times New Roman"/>
+                <a:cs typeface="Times New Roman"/>
               </a:rPr>
               <a:t> across platforms.</a:t>
             </a:r>
@@ -12670,10 +13854,24 @@
           <a:lstStyle/>
           <a:p>
             <a:fld id="{B4EE2AE5-9218-4A07-842F-E84162EAAD55}" type="slidenum">
-              <a:rPr lang="en-IN" smtClean="0"/>
+              <a:rPr lang="en-IN" smtClean="0">
+                <a:solidFill>
+                  <a:srgbClr val="000000"/>
+                </a:solidFill>
+                <a:latin typeface="Times New Roman"/>
+                <a:ea typeface="Times New Roman"/>
+                <a:cs typeface="Times New Roman"/>
+              </a:rPr>
               <a:t>8</a:t>
             </a:fld>
-            <a:endParaRPr lang="en-IN" dirty="0"/>
+            <a:endParaRPr lang="en-IN" dirty="0">
+              <a:solidFill>
+                <a:srgbClr val="000000"/>
+              </a:solidFill>
+              <a:latin typeface="Times New Roman"/>
+              <a:ea typeface="Times New Roman"/>
+              <a:cs typeface="Times New Roman"/>
+            </a:endParaRPr>
           </a:p>
         </p:txBody>
       </p:sp>
@@ -12719,11 +13917,11 @@
               <a:buChar char="•"/>
               <a:defRPr sz="2800" kern="1200">
                 <a:solidFill>
-                  <a:schemeClr val="tx1"/>
-                </a:solidFill>
-                <a:latin typeface="+mn-lt"/>
-                <a:ea typeface="+mn-ea"/>
-                <a:cs typeface="+mn-cs"/>
+                  <a:srgbClr val="000000"/>
+                </a:solidFill>
+                <a:latin typeface="Times New Roman"/>
+                <a:ea typeface="Times New Roman"/>
+                <a:cs typeface="Times New Roman"/>
               </a:defRPr>
             </a:lvl1pPr>
             <a:lvl2pPr marL="685800" indent="-228600" algn="l" defTabSz="914400" rtl="0" eaLnBrk="1" latinLnBrk="0" hangingPunct="1">
@@ -12737,11 +13935,11 @@
               <a:buChar char="•"/>
               <a:defRPr sz="2400" kern="1200">
                 <a:solidFill>
-                  <a:schemeClr val="tx1"/>
-                </a:solidFill>
-                <a:latin typeface="+mn-lt"/>
-                <a:ea typeface="+mn-ea"/>
-                <a:cs typeface="+mn-cs"/>
+                  <a:srgbClr val="000000"/>
+                </a:solidFill>
+                <a:latin typeface="Times New Roman"/>
+                <a:ea typeface="Times New Roman"/>
+                <a:cs typeface="Times New Roman"/>
               </a:defRPr>
             </a:lvl2pPr>
             <a:lvl3pPr marL="1143000" indent="-228600" algn="l" defTabSz="914400" rtl="0" eaLnBrk="1" latinLnBrk="0" hangingPunct="1">
@@ -12755,11 +13953,11 @@
               <a:buChar char="•"/>
               <a:defRPr sz="2000" kern="1200">
                 <a:solidFill>
-                  <a:schemeClr val="tx1"/>
-                </a:solidFill>
-                <a:latin typeface="+mn-lt"/>
-                <a:ea typeface="+mn-ea"/>
-                <a:cs typeface="+mn-cs"/>
+                  <a:srgbClr val="000000"/>
+                </a:solidFill>
+                <a:latin typeface="Times New Roman"/>
+                <a:ea typeface="Times New Roman"/>
+                <a:cs typeface="Times New Roman"/>
               </a:defRPr>
             </a:lvl3pPr>
             <a:lvl4pPr marL="1600200" indent="-228600" algn="l" defTabSz="914400" rtl="0" eaLnBrk="1" latinLnBrk="0" hangingPunct="1">
@@ -12773,11 +13971,11 @@
               <a:buChar char="•"/>
               <a:defRPr sz="1800" kern="1200">
                 <a:solidFill>
-                  <a:schemeClr val="tx1"/>
-                </a:solidFill>
-                <a:latin typeface="+mn-lt"/>
-                <a:ea typeface="+mn-ea"/>
-                <a:cs typeface="+mn-cs"/>
+                  <a:srgbClr val="000000"/>
+                </a:solidFill>
+                <a:latin typeface="Times New Roman"/>
+                <a:ea typeface="Times New Roman"/>
+                <a:cs typeface="Times New Roman"/>
               </a:defRPr>
             </a:lvl4pPr>
             <a:lvl5pPr marL="2057400" indent="-228600" algn="l" defTabSz="914400" rtl="0" eaLnBrk="1" latinLnBrk="0" hangingPunct="1">
@@ -12791,11 +13989,11 @@
               <a:buChar char="•"/>
               <a:defRPr sz="1800" kern="1200">
                 <a:solidFill>
-                  <a:schemeClr val="tx1"/>
-                </a:solidFill>
-                <a:latin typeface="+mn-lt"/>
-                <a:ea typeface="+mn-ea"/>
-                <a:cs typeface="+mn-cs"/>
+                  <a:srgbClr val="000000"/>
+                </a:solidFill>
+                <a:latin typeface="Times New Roman"/>
+                <a:ea typeface="Times New Roman"/>
+                <a:cs typeface="Times New Roman"/>
               </a:defRPr>
             </a:lvl5pPr>
             <a:lvl6pPr marL="2514600" indent="-228600" algn="l" defTabSz="914400" rtl="0" eaLnBrk="1" latinLnBrk="0" hangingPunct="1">
@@ -12809,11 +14007,11 @@
               <a:buChar char="•"/>
               <a:defRPr sz="1800" kern="1200">
                 <a:solidFill>
-                  <a:schemeClr val="tx1"/>
-                </a:solidFill>
-                <a:latin typeface="+mn-lt"/>
-                <a:ea typeface="+mn-ea"/>
-                <a:cs typeface="+mn-cs"/>
+                  <a:srgbClr val="000000"/>
+                </a:solidFill>
+                <a:latin typeface="Times New Roman"/>
+                <a:ea typeface="Times New Roman"/>
+                <a:cs typeface="Times New Roman"/>
               </a:defRPr>
             </a:lvl6pPr>
             <a:lvl7pPr marL="2971800" indent="-228600" algn="l" defTabSz="914400" rtl="0" eaLnBrk="1" latinLnBrk="0" hangingPunct="1">
@@ -12827,11 +14025,11 @@
               <a:buChar char="•"/>
               <a:defRPr sz="1800" kern="1200">
                 <a:solidFill>
-                  <a:schemeClr val="tx1"/>
-                </a:solidFill>
-                <a:latin typeface="+mn-lt"/>
-                <a:ea typeface="+mn-ea"/>
-                <a:cs typeface="+mn-cs"/>
+                  <a:srgbClr val="000000"/>
+                </a:solidFill>
+                <a:latin typeface="Times New Roman"/>
+                <a:ea typeface="Times New Roman"/>
+                <a:cs typeface="Times New Roman"/>
               </a:defRPr>
             </a:lvl7pPr>
             <a:lvl8pPr marL="3429000" indent="-228600" algn="l" defTabSz="914400" rtl="0" eaLnBrk="1" latinLnBrk="0" hangingPunct="1">
@@ -12845,11 +14043,11 @@
               <a:buChar char="•"/>
               <a:defRPr sz="1800" kern="1200">
                 <a:solidFill>
-                  <a:schemeClr val="tx1"/>
-                </a:solidFill>
-                <a:latin typeface="+mn-lt"/>
-                <a:ea typeface="+mn-ea"/>
-                <a:cs typeface="+mn-cs"/>
+                  <a:srgbClr val="000000"/>
+                </a:solidFill>
+                <a:latin typeface="Times New Roman"/>
+                <a:ea typeface="Times New Roman"/>
+                <a:cs typeface="Times New Roman"/>
               </a:defRPr>
             </a:lvl8pPr>
             <a:lvl9pPr marL="3886200" indent="-228600" algn="l" defTabSz="914400" rtl="0" eaLnBrk="1" latinLnBrk="0" hangingPunct="1">
@@ -12863,11 +14061,11 @@
               <a:buChar char="•"/>
               <a:defRPr sz="1800" kern="1200">
                 <a:solidFill>
-                  <a:schemeClr val="tx1"/>
-                </a:solidFill>
-                <a:latin typeface="+mn-lt"/>
-                <a:ea typeface="+mn-ea"/>
-                <a:cs typeface="+mn-cs"/>
+                  <a:srgbClr val="000000"/>
+                </a:solidFill>
+                <a:latin typeface="Times New Roman"/>
+                <a:ea typeface="Times New Roman"/>
+                <a:cs typeface="Times New Roman"/>
               </a:defRPr>
             </a:lvl9pPr>
           </a:lstStyle>
@@ -12883,13 +14081,23 @@
                 <a:spcPts val="400"/>
               </a:spcAft>
               <a:buNone/>
-              <a:defRPr/>
+              <a:defRPr>
+                <a:solidFill>
+                  <a:srgbClr val="000000"/>
+                </a:solidFill>
+                <a:latin typeface="Times New Roman"/>
+                <a:ea typeface="Times New Roman"/>
+                <a:cs typeface="Times New Roman"/>
+              </a:defRPr>
             </a:pPr>
             <a:r>
-              <a:rPr sz="1900" b="1" i="0">
-                <a:solidFill>
-                  <a:srgbClr val="1F3864"/>
-                </a:solidFill>
+              <a:rPr sz="2090" b="1" i="0">
+                <a:solidFill>
+                  <a:srgbClr val="000000"/>
+                </a:solidFill>
+                <a:latin typeface="Times New Roman"/>
+                <a:ea typeface="Times New Roman"/>
+                <a:cs typeface="Times New Roman"/>
               </a:rPr>
               <a:t>Madhavan G   ·   Sriram Sivakumar</a:t>
             </a:r>
@@ -12908,10 +14116,13 @@
               <a:buNone/>
             </a:pPr>
             <a:r>
-              <a:rPr sz="1600" b="0" i="0">
-                <a:solidFill>
-                  <a:srgbClr val="595959"/>
-                </a:solidFill>
+              <a:rPr sz="1760" b="0" i="0">
+                <a:solidFill>
+                  <a:srgbClr val="000000"/>
+                </a:solidFill>
+                <a:latin typeface="Times New Roman"/>
+                <a:ea typeface="Times New Roman"/>
+                <a:cs typeface="Times New Roman"/>
               </a:rPr>
               <a:t>B.E. Computer Science and Engineering</a:t>
             </a:r>
@@ -12940,10 +14151,24 @@
           <a:lstStyle/>
           <a:p>
             <a:r>
-              <a:rPr lang="en-US"/>
+              <a:rPr lang="en-US">
+                <a:solidFill>
+                  <a:srgbClr val="000000"/>
+                </a:solidFill>
+                <a:latin typeface="Times New Roman"/>
+                <a:ea typeface="Times New Roman"/>
+                <a:cs typeface="Times New Roman"/>
+              </a:rPr>
               <a:t>Date: 07/10/2026</a:t>
             </a:r>
-            <a:endParaRPr lang="en-IN" dirty="0"/>
+            <a:endParaRPr lang="en-IN" dirty="0">
+              <a:solidFill>
+                <a:srgbClr val="000000"/>
+              </a:solidFill>
+              <a:latin typeface="Times New Roman"/>
+              <a:ea typeface="Times New Roman"/>
+              <a:cs typeface="Times New Roman"/>
+            </a:endParaRPr>
           </a:p>
         </p:txBody>
       </p:sp>
@@ -13051,10 +14276,24 @@
           <a:lstStyle/>
           <a:p>
             <a:r>
-              <a:rPr lang="en-US" dirty="0"/>
+              <a:rPr lang="en-US" dirty="0">
+                <a:solidFill>
+                  <a:srgbClr val="000000"/>
+                </a:solidFill>
+                <a:latin typeface="Times New Roman"/>
+                <a:ea typeface="Times New Roman"/>
+                <a:cs typeface="Times New Roman"/>
+              </a:rPr>
               <a:t>II–Year PBL Project Final Review</a:t>
             </a:r>
-            <a:endParaRPr lang="en-IN" dirty="0"/>
+            <a:endParaRPr lang="en-IN" dirty="0">
+              <a:solidFill>
+                <a:srgbClr val="000000"/>
+              </a:solidFill>
+              <a:latin typeface="Times New Roman"/>
+              <a:ea typeface="Times New Roman"/>
+              <a:cs typeface="Times New Roman"/>
+            </a:endParaRPr>
           </a:p>
         </p:txBody>
       </p:sp>
@@ -13088,12 +14327,23 @@
           <a:p>
             <a:r>
               <a:rPr lang="en-IN" sz="2200" dirty="0">
+                <a:solidFill>
+                  <a:srgbClr val="000000"/>
+                </a:solidFill>
                 <a:latin typeface="Times New Roman" panose="02020603050405020304" pitchFamily="18" charset="0"/>
-                <a:cs typeface="Times New Roman" panose="02020603050405020304" pitchFamily="18" charset="0"/>
+                <a:ea typeface="Times New Roman"/>
+                <a:cs typeface="Times New Roman"/>
               </a:rPr>
               <a:t>GitHub Repository</a:t>
             </a:r>
-            <a:endParaRPr lang="en-IN" dirty="0"/>
+            <a:endParaRPr lang="en-IN" dirty="0">
+              <a:solidFill>
+                <a:srgbClr val="000000"/>
+              </a:solidFill>
+              <a:latin typeface="Times New Roman"/>
+              <a:ea typeface="Times New Roman"/>
+              <a:cs typeface="Times New Roman"/>
+            </a:endParaRPr>
           </a:p>
         </p:txBody>
       </p:sp>
@@ -13192,11 +14442,11 @@
                 <a:buChar char="•"/>
                 <a:defRPr sz="2800" kern="1200">
                   <a:solidFill>
-                    <a:schemeClr val="tx1"/>
+                    <a:srgbClr val="000000"/>
                   </a:solidFill>
-                  <a:latin typeface="+mn-lt"/>
-                  <a:ea typeface="+mn-ea"/>
-                  <a:cs typeface="+mn-cs"/>
+                  <a:latin typeface="Times New Roman"/>
+                  <a:ea typeface="Times New Roman"/>
+                  <a:cs typeface="Times New Roman"/>
                 </a:defRPr>
               </a:lvl1pPr>
               <a:lvl2pPr marL="685800" indent="-228600" algn="l" defTabSz="914400" rtl="0" eaLnBrk="1" latinLnBrk="0" hangingPunct="1">
@@ -13210,11 +14460,11 @@
                 <a:buChar char="•"/>
                 <a:defRPr sz="2400" kern="1200">
                   <a:solidFill>
-                    <a:schemeClr val="tx1"/>
+                    <a:srgbClr val="000000"/>
                   </a:solidFill>
-                  <a:latin typeface="+mn-lt"/>
-                  <a:ea typeface="+mn-ea"/>
-                  <a:cs typeface="+mn-cs"/>
+                  <a:latin typeface="Times New Roman"/>
+                  <a:ea typeface="Times New Roman"/>
+                  <a:cs typeface="Times New Roman"/>
                 </a:defRPr>
               </a:lvl2pPr>
               <a:lvl3pPr marL="1143000" indent="-228600" algn="l" defTabSz="914400" rtl="0" eaLnBrk="1" latinLnBrk="0" hangingPunct="1">
@@ -13228,11 +14478,11 @@
                 <a:buChar char="•"/>
                 <a:defRPr sz="2000" kern="1200">
                   <a:solidFill>
-                    <a:schemeClr val="tx1"/>
+                    <a:srgbClr val="000000"/>
                   </a:solidFill>
-                  <a:latin typeface="+mn-lt"/>
-                  <a:ea typeface="+mn-ea"/>
-                  <a:cs typeface="+mn-cs"/>
+                  <a:latin typeface="Times New Roman"/>
+                  <a:ea typeface="Times New Roman"/>
+                  <a:cs typeface="Times New Roman"/>
                 </a:defRPr>
               </a:lvl3pPr>
               <a:lvl4pPr marL="1600200" indent="-228600" algn="l" defTabSz="914400" rtl="0" eaLnBrk="1" latinLnBrk="0" hangingPunct="1">
@@ -13246,11 +14496,11 @@
                 <a:buChar char="•"/>
                 <a:defRPr sz="1800" kern="1200">
                   <a:solidFill>
-                    <a:schemeClr val="tx1"/>
+                    <a:srgbClr val="000000"/>
                   </a:solidFill>
-                  <a:latin typeface="+mn-lt"/>
-                  <a:ea typeface="+mn-ea"/>
-                  <a:cs typeface="+mn-cs"/>
+                  <a:latin typeface="Times New Roman"/>
+                  <a:ea typeface="Times New Roman"/>
+                  <a:cs typeface="Times New Roman"/>
                 </a:defRPr>
               </a:lvl4pPr>
               <a:lvl5pPr marL="2057400" indent="-228600" algn="l" defTabSz="914400" rtl="0" eaLnBrk="1" latinLnBrk="0" hangingPunct="1">
@@ -13264,11 +14514,11 @@
                 <a:buChar char="•"/>
                 <a:defRPr sz="1800" kern="1200">
                   <a:solidFill>
-                    <a:schemeClr val="tx1"/>
+                    <a:srgbClr val="000000"/>
                   </a:solidFill>
-                  <a:latin typeface="+mn-lt"/>
-                  <a:ea typeface="+mn-ea"/>
-                  <a:cs typeface="+mn-cs"/>
+                  <a:latin typeface="Times New Roman"/>
+                  <a:ea typeface="Times New Roman"/>
+                  <a:cs typeface="Times New Roman"/>
                 </a:defRPr>
               </a:lvl5pPr>
               <a:lvl6pPr marL="2514600" indent="-228600" algn="l" defTabSz="914400" rtl="0" eaLnBrk="1" latinLnBrk="0" hangingPunct="1">
@@ -13282,11 +14532,11 @@
                 <a:buChar char="•"/>
                 <a:defRPr sz="1800" kern="1200">
                   <a:solidFill>
-                    <a:schemeClr val="tx1"/>
+                    <a:srgbClr val="000000"/>
                   </a:solidFill>
-                  <a:latin typeface="+mn-lt"/>
-                  <a:ea typeface="+mn-ea"/>
-                  <a:cs typeface="+mn-cs"/>
+                  <a:latin typeface="Times New Roman"/>
+                  <a:ea typeface="Times New Roman"/>
+                  <a:cs typeface="Times New Roman"/>
                 </a:defRPr>
               </a:lvl6pPr>
               <a:lvl7pPr marL="2971800" indent="-228600" algn="l" defTabSz="914400" rtl="0" eaLnBrk="1" latinLnBrk="0" hangingPunct="1">
@@ -13300,11 +14550,11 @@
                 <a:buChar char="•"/>
                 <a:defRPr sz="1800" kern="1200">
                   <a:solidFill>
-                    <a:schemeClr val="tx1"/>
+                    <a:srgbClr val="000000"/>
                   </a:solidFill>
-                  <a:latin typeface="+mn-lt"/>
-                  <a:ea typeface="+mn-ea"/>
-                  <a:cs typeface="+mn-cs"/>
+                  <a:latin typeface="Times New Roman"/>
+                  <a:ea typeface="Times New Roman"/>
+                  <a:cs typeface="Times New Roman"/>
                 </a:defRPr>
               </a:lvl7pPr>
               <a:lvl8pPr marL="3429000" indent="-228600" algn="l" defTabSz="914400" rtl="0" eaLnBrk="1" latinLnBrk="0" hangingPunct="1">
@@ -13318,11 +14568,11 @@
                 <a:buChar char="•"/>
                 <a:defRPr sz="1800" kern="1200">
                   <a:solidFill>
-                    <a:schemeClr val="tx1"/>
+                    <a:srgbClr val="000000"/>
                   </a:solidFill>
-                  <a:latin typeface="+mn-lt"/>
-                  <a:ea typeface="+mn-ea"/>
-                  <a:cs typeface="+mn-cs"/>
+                  <a:latin typeface="Times New Roman"/>
+                  <a:ea typeface="Times New Roman"/>
+                  <a:cs typeface="Times New Roman"/>
                 </a:defRPr>
               </a:lvl8pPr>
               <a:lvl9pPr marL="3886200" indent="-228600" algn="l" defTabSz="914400" rtl="0" eaLnBrk="1" latinLnBrk="0" hangingPunct="1">
@@ -13336,11 +14586,11 @@
                 <a:buChar char="•"/>
                 <a:defRPr sz="1800" kern="1200">
                   <a:solidFill>
-                    <a:schemeClr val="tx1"/>
+                    <a:srgbClr val="000000"/>
                   </a:solidFill>
-                  <a:latin typeface="+mn-lt"/>
-                  <a:ea typeface="+mn-ea"/>
-                  <a:cs typeface="+mn-cs"/>
+                  <a:latin typeface="Times New Roman"/>
+                  <a:ea typeface="Times New Roman"/>
+                  <a:cs typeface="Times New Roman"/>
                 </a:defRPr>
               </a:lvl9pPr>
             </a:lstStyle>
@@ -13358,16 +14608,23 @@
                 <a:buNone/>
               </a:pPr>
               <a:r>
-                <a:rPr sz="1400" b="1" i="0">
+                <a:rPr sz="1540" b="1" i="0">
                   <a:solidFill>
-                    <a:srgbClr val="1F3864"/>
+                    <a:srgbClr val="000000"/>
                   </a:solidFill>
+                  <a:latin typeface="Times New Roman"/>
+                  <a:ea typeface="Times New Roman"/>
+                  <a:cs typeface="Times New Roman"/>
                 </a:rPr>
                 <a:t>Project Video Link</a:t>
               </a:r>
               <a:endParaRPr lang="en-US" sz="2000" b="1" dirty="0">
-                <a:latin typeface="Times New Roman" panose="02020603050405020304" pitchFamily="18" charset="0"/>
-                <a:cs typeface="Times New Roman" panose="02020603050405020304" pitchFamily="18" charset="0"/>
+                <a:solidFill>
+                  <a:srgbClr val="000000"/>
+                </a:solidFill>
+                <a:latin typeface="Times New Roman"/>
+                <a:ea typeface="Times New Roman"/>
+                <a:cs typeface="Times New Roman"/>
               </a:endParaRPr>
             </a:p>
             <a:p>
@@ -13384,10 +14641,13 @@
                 <a:buNone/>
               </a:pPr>
               <a:r>
-                <a:rPr sz="1100" b="0" i="1">
+                <a:rPr sz="1210" b="0" i="1">
                   <a:solidFill>
-                    <a:srgbClr val="595959"/>
+                    <a:srgbClr val="000000"/>
                   </a:solidFill>
+                  <a:latin typeface="Times New Roman"/>
+                  <a:ea typeface="Times New Roman"/>
+                  <a:cs typeface="Times New Roman"/>
                 </a:rPr>
                 <a:t>&lt;paste the drive / YouTube URL of the voice-over demo here&gt;</a:t>
               </a:r>
@@ -13490,11 +14750,11 @@
                 <a:buChar char="•"/>
                 <a:defRPr sz="2800" kern="1200">
                   <a:solidFill>
-                    <a:schemeClr val="tx1"/>
+                    <a:srgbClr val="000000"/>
                   </a:solidFill>
-                  <a:latin typeface="+mn-lt"/>
-                  <a:ea typeface="+mn-ea"/>
-                  <a:cs typeface="+mn-cs"/>
+                  <a:latin typeface="Times New Roman"/>
+                  <a:ea typeface="Times New Roman"/>
+                  <a:cs typeface="Times New Roman"/>
                 </a:defRPr>
               </a:lvl1pPr>
               <a:lvl2pPr marL="685800" indent="-228600" algn="l" defTabSz="914400" rtl="0" eaLnBrk="1" latinLnBrk="0" hangingPunct="1">
@@ -13508,11 +14768,11 @@
                 <a:buChar char="•"/>
                 <a:defRPr sz="2400" kern="1200">
                   <a:solidFill>
-                    <a:schemeClr val="tx1"/>
+                    <a:srgbClr val="000000"/>
                   </a:solidFill>
-                  <a:latin typeface="+mn-lt"/>
-                  <a:ea typeface="+mn-ea"/>
-                  <a:cs typeface="+mn-cs"/>
+                  <a:latin typeface="Times New Roman"/>
+                  <a:ea typeface="Times New Roman"/>
+                  <a:cs typeface="Times New Roman"/>
                 </a:defRPr>
               </a:lvl2pPr>
               <a:lvl3pPr marL="1143000" indent="-228600" algn="l" defTabSz="914400" rtl="0" eaLnBrk="1" latinLnBrk="0" hangingPunct="1">
@@ -13526,11 +14786,11 @@
                 <a:buChar char="•"/>
                 <a:defRPr sz="2000" kern="1200">
                   <a:solidFill>
-                    <a:schemeClr val="tx1"/>
+                    <a:srgbClr val="000000"/>
                   </a:solidFill>
-                  <a:latin typeface="+mn-lt"/>
-                  <a:ea typeface="+mn-ea"/>
-                  <a:cs typeface="+mn-cs"/>
+                  <a:latin typeface="Times New Roman"/>
+                  <a:ea typeface="Times New Roman"/>
+                  <a:cs typeface="Times New Roman"/>
                 </a:defRPr>
               </a:lvl3pPr>
               <a:lvl4pPr marL="1600200" indent="-228600" algn="l" defTabSz="914400" rtl="0" eaLnBrk="1" latinLnBrk="0" hangingPunct="1">
@@ -13544,11 +14804,11 @@
                 <a:buChar char="•"/>
                 <a:defRPr sz="1800" kern="1200">
                   <a:solidFill>
-                    <a:schemeClr val="tx1"/>
+                    <a:srgbClr val="000000"/>
                   </a:solidFill>
-                  <a:latin typeface="+mn-lt"/>
-                  <a:ea typeface="+mn-ea"/>
-                  <a:cs typeface="+mn-cs"/>
+                  <a:latin typeface="Times New Roman"/>
+                  <a:ea typeface="Times New Roman"/>
+                  <a:cs typeface="Times New Roman"/>
                 </a:defRPr>
               </a:lvl4pPr>
               <a:lvl5pPr marL="2057400" indent="-228600" algn="l" defTabSz="914400" rtl="0" eaLnBrk="1" latinLnBrk="0" hangingPunct="1">
@@ -13562,11 +14822,11 @@
                 <a:buChar char="•"/>
                 <a:defRPr sz="1800" kern="1200">
                   <a:solidFill>
-                    <a:schemeClr val="tx1"/>
+                    <a:srgbClr val="000000"/>
                   </a:solidFill>
-                  <a:latin typeface="+mn-lt"/>
-                  <a:ea typeface="+mn-ea"/>
-                  <a:cs typeface="+mn-cs"/>
+                  <a:latin typeface="Times New Roman"/>
+                  <a:ea typeface="Times New Roman"/>
+                  <a:cs typeface="Times New Roman"/>
                 </a:defRPr>
               </a:lvl5pPr>
               <a:lvl6pPr marL="2514600" indent="-228600" algn="l" defTabSz="914400" rtl="0" eaLnBrk="1" latinLnBrk="0" hangingPunct="1">
@@ -13580,11 +14840,11 @@
                 <a:buChar char="•"/>
                 <a:defRPr sz="1800" kern="1200">
                   <a:solidFill>
-                    <a:schemeClr val="tx1"/>
+                    <a:srgbClr val="000000"/>
                   </a:solidFill>
-                  <a:latin typeface="+mn-lt"/>
-                  <a:ea typeface="+mn-ea"/>
-                  <a:cs typeface="+mn-cs"/>
+                  <a:latin typeface="Times New Roman"/>
+                  <a:ea typeface="Times New Roman"/>
+                  <a:cs typeface="Times New Roman"/>
                 </a:defRPr>
               </a:lvl6pPr>
               <a:lvl7pPr marL="2971800" indent="-228600" algn="l" defTabSz="914400" rtl="0" eaLnBrk="1" latinLnBrk="0" hangingPunct="1">
@@ -13598,11 +14858,11 @@
                 <a:buChar char="•"/>
                 <a:defRPr sz="1800" kern="1200">
                   <a:solidFill>
-                    <a:schemeClr val="tx1"/>
+                    <a:srgbClr val="000000"/>
                   </a:solidFill>
-                  <a:latin typeface="+mn-lt"/>
-                  <a:ea typeface="+mn-ea"/>
-                  <a:cs typeface="+mn-cs"/>
+                  <a:latin typeface="Times New Roman"/>
+                  <a:ea typeface="Times New Roman"/>
+                  <a:cs typeface="Times New Roman"/>
                 </a:defRPr>
               </a:lvl7pPr>
               <a:lvl8pPr marL="3429000" indent="-228600" algn="l" defTabSz="914400" rtl="0" eaLnBrk="1" latinLnBrk="0" hangingPunct="1">
@@ -13616,11 +14876,11 @@
                 <a:buChar char="•"/>
                 <a:defRPr sz="1800" kern="1200">
                   <a:solidFill>
-                    <a:schemeClr val="tx1"/>
+                    <a:srgbClr val="000000"/>
                   </a:solidFill>
-                  <a:latin typeface="+mn-lt"/>
-                  <a:ea typeface="+mn-ea"/>
-                  <a:cs typeface="+mn-cs"/>
+                  <a:latin typeface="Times New Roman"/>
+                  <a:ea typeface="Times New Roman"/>
+                  <a:cs typeface="Times New Roman"/>
                 </a:defRPr>
               </a:lvl8pPr>
               <a:lvl9pPr marL="3886200" indent="-228600" algn="l" defTabSz="914400" rtl="0" eaLnBrk="1" latinLnBrk="0" hangingPunct="1">
@@ -13634,11 +14894,11 @@
                 <a:buChar char="•"/>
                 <a:defRPr sz="1800" kern="1200">
                   <a:solidFill>
-                    <a:schemeClr val="tx1"/>
+                    <a:srgbClr val="000000"/>
                   </a:solidFill>
-                  <a:latin typeface="+mn-lt"/>
-                  <a:ea typeface="+mn-ea"/>
-                  <a:cs typeface="+mn-cs"/>
+                  <a:latin typeface="Times New Roman"/>
+                  <a:ea typeface="Times New Roman"/>
+                  <a:cs typeface="Times New Roman"/>
                 </a:defRPr>
               </a:lvl9pPr>
             </a:lstStyle>
@@ -13656,16 +14916,23 @@
                 <a:buNone/>
               </a:pPr>
               <a:r>
-                <a:rPr sz="1400" b="1" i="0">
+                <a:rPr sz="1540" b="1" i="0">
                   <a:solidFill>
-                    <a:srgbClr val="1F3864"/>
+                    <a:srgbClr val="000000"/>
                   </a:solidFill>
+                  <a:latin typeface="Times New Roman"/>
+                  <a:ea typeface="Times New Roman"/>
+                  <a:cs typeface="Times New Roman"/>
                 </a:rPr>
                 <a:t>GitHub Repository Link</a:t>
               </a:r>
               <a:endParaRPr lang="en-US" sz="2000" b="1" dirty="0">
-                <a:latin typeface="Times New Roman" panose="02020603050405020304" pitchFamily="18" charset="0"/>
-                <a:cs typeface="Times New Roman" panose="02020603050405020304" pitchFamily="18" charset="0"/>
+                <a:solidFill>
+                  <a:srgbClr val="000000"/>
+                </a:solidFill>
+                <a:latin typeface="Times New Roman"/>
+                <a:ea typeface="Times New Roman"/>
+                <a:cs typeface="Times New Roman"/>
               </a:endParaRPr>
             </a:p>
             <a:p>
@@ -13682,10 +14949,13 @@
                 <a:buNone/>
               </a:pPr>
               <a:r>
-                <a:rPr sz="1000" b="0" i="0">
+                <a:rPr sz="1100" b="0" i="0">
                   <a:solidFill>
-                    <a:srgbClr val="4472C4"/>
+                    <a:srgbClr val="000000"/>
                   </a:solidFill>
+                  <a:latin typeface="Times New Roman"/>
+                  <a:ea typeface="Times New Roman"/>
+                  <a:cs typeface="Times New Roman"/>
                 </a:rPr>
                 <a:t>https://github.com/Madhavan777/Solar-Flare-Prediction-System-Weather</a:t>
               </a:r>
@@ -13743,10 +15013,13 @@
               <a:buNone/>
             </a:pPr>
             <a:r>
-              <a:rPr sz="900" b="0" i="1">
-                <a:solidFill>
-                  <a:srgbClr val="595959"/>
-                </a:solidFill>
+              <a:rPr sz="990" b="0" i="1">
+                <a:solidFill>
+                  <a:srgbClr val="000000"/>
+                </a:solidFill>
+                <a:latin typeface="Times New Roman"/>
+                <a:ea typeface="Times New Roman"/>
+                <a:cs typeface="Times New Roman"/>
               </a:rPr>
               <a:t>Scan for the repository</a:t>
             </a:r>
